--- a/TDs/FR_EN/figures.pptx
+++ b/TDs/FR_EN/figures.pptx
@@ -16,6 +16,7 @@
     <p:sldId id="260" r:id="rId10"/>
     <p:sldId id="265" r:id="rId11"/>
     <p:sldId id="263" r:id="rId12"/>
+    <p:sldId id="267" r:id="rId13"/>
   </p:sldIdLst>
   <p:sldSz cx="8640763" cy="11520488"/>
   <p:notesSz cx="6858000" cy="9144000"/>
@@ -122,6 +123,507 @@
 </p:presentation>
 </file>
 
+<file path=ppt/revisionInfo.xml><?xml version="1.0" encoding="utf-8"?>
+<p1510:revInfo xmlns:a="http://schemas.openxmlformats.org/drawingml/2006/main" xmlns:r="http://schemas.openxmlformats.org/officeDocument/2006/relationships" xmlns:p1510="http://schemas.microsoft.com/office/powerpoint/2015/10/main">
+  <p1510:revLst>
+    <p1510:client id="{77B61B6D-0D6A-43E8-9103-3B0046EA4C4F}" v="69" dt="2026-06-24T09:07:38.998"/>
+  </p1510:revLst>
+</p1510:revInfo>
+</file>
+
+<file path=ppt/changesInfos/changesInfo1.xml><?xml version="1.0" encoding="utf-8"?>
+<pc:chgInfo xmlns:a="http://schemas.openxmlformats.org/drawingml/2006/main" xmlns:r="http://schemas.openxmlformats.org/officeDocument/2006/relationships" xmlns:ac="http://schemas.microsoft.com/office/drawing/2013/main/command" xmlns:pc="http://schemas.microsoft.com/office/powerpoint/2013/main/command">
+  <pc:docChgLst>
+    <pc:chgData name="Alexis MARTIN" userId="ec32c3d9-5957-42d0-8757-996fd533d25b" providerId="ADAL" clId="{B76BE869-635B-4DC9-A437-AFDC8BC5A345}"/>
+    <pc:docChg chg="undo custSel addSld modSld">
+      <pc:chgData name="Alexis MARTIN" userId="ec32c3d9-5957-42d0-8757-996fd533d25b" providerId="ADAL" clId="{B76BE869-635B-4DC9-A437-AFDC8BC5A345}" dt="2026-06-24T09:07:43.742" v="209" actId="14100"/>
+      <pc:docMkLst>
+        <pc:docMk/>
+      </pc:docMkLst>
+      <pc:sldChg chg="addSp delSp modSp new mod">
+        <pc:chgData name="Alexis MARTIN" userId="ec32c3d9-5957-42d0-8757-996fd533d25b" providerId="ADAL" clId="{B76BE869-635B-4DC9-A437-AFDC8BC5A345}" dt="2026-06-24T09:07:43.742" v="209" actId="14100"/>
+        <pc:sldMkLst>
+          <pc:docMk/>
+          <pc:sldMk cId="4196119950" sldId="267"/>
+        </pc:sldMkLst>
+        <pc:spChg chg="del">
+          <ac:chgData name="Alexis MARTIN" userId="ec32c3d9-5957-42d0-8757-996fd533d25b" providerId="ADAL" clId="{B76BE869-635B-4DC9-A437-AFDC8BC5A345}" dt="2026-06-24T08:56:50.914" v="1" actId="478"/>
+          <ac:spMkLst>
+            <pc:docMk/>
+            <pc:sldMk cId="4196119950" sldId="267"/>
+            <ac:spMk id="2" creationId="{9B0B5C94-271F-D4AB-2D84-F5F625BDF425}"/>
+          </ac:spMkLst>
+        </pc:spChg>
+        <pc:spChg chg="del">
+          <ac:chgData name="Alexis MARTIN" userId="ec32c3d9-5957-42d0-8757-996fd533d25b" providerId="ADAL" clId="{B76BE869-635B-4DC9-A437-AFDC8BC5A345}" dt="2026-06-24T08:56:50.914" v="1" actId="478"/>
+          <ac:spMkLst>
+            <pc:docMk/>
+            <pc:sldMk cId="4196119950" sldId="267"/>
+            <ac:spMk id="3" creationId="{43AAEF68-11BA-8D93-C30C-4D5F0520B9F1}"/>
+          </ac:spMkLst>
+        </pc:spChg>
+        <pc:spChg chg="add mod">
+          <ac:chgData name="Alexis MARTIN" userId="ec32c3d9-5957-42d0-8757-996fd533d25b" providerId="ADAL" clId="{B76BE869-635B-4DC9-A437-AFDC8BC5A345}" dt="2026-06-24T08:57:13.266" v="7"/>
+          <ac:spMkLst>
+            <pc:docMk/>
+            <pc:sldMk cId="4196119950" sldId="267"/>
+            <ac:spMk id="10" creationId="{E163650E-D77A-6E2E-4EB3-C4DBB38335C4}"/>
+          </ac:spMkLst>
+        </pc:spChg>
+        <pc:spChg chg="add mod">
+          <ac:chgData name="Alexis MARTIN" userId="ec32c3d9-5957-42d0-8757-996fd533d25b" providerId="ADAL" clId="{B76BE869-635B-4DC9-A437-AFDC8BC5A345}" dt="2026-06-24T08:57:13.266" v="7"/>
+          <ac:spMkLst>
+            <pc:docMk/>
+            <pc:sldMk cId="4196119950" sldId="267"/>
+            <ac:spMk id="15" creationId="{C9D5286F-91D3-0CD6-61A2-B237502E6DEA}"/>
+          </ac:spMkLst>
+        </pc:spChg>
+        <pc:spChg chg="add mod">
+          <ac:chgData name="Alexis MARTIN" userId="ec32c3d9-5957-42d0-8757-996fd533d25b" providerId="ADAL" clId="{B76BE869-635B-4DC9-A437-AFDC8BC5A345}" dt="2026-06-24T08:57:13.266" v="7"/>
+          <ac:spMkLst>
+            <pc:docMk/>
+            <pc:sldMk cId="4196119950" sldId="267"/>
+            <ac:spMk id="22" creationId="{2755656C-45A2-75BC-905B-32A362F60905}"/>
+          </ac:spMkLst>
+        </pc:spChg>
+        <pc:spChg chg="add mod">
+          <ac:chgData name="Alexis MARTIN" userId="ec32c3d9-5957-42d0-8757-996fd533d25b" providerId="ADAL" clId="{B76BE869-635B-4DC9-A437-AFDC8BC5A345}" dt="2026-06-24T08:57:13.266" v="7"/>
+          <ac:spMkLst>
+            <pc:docMk/>
+            <pc:sldMk cId="4196119950" sldId="267"/>
+            <ac:spMk id="23" creationId="{7C6DABDF-A376-974C-ED46-E4D5A4A0E850}"/>
+          </ac:spMkLst>
+        </pc:spChg>
+        <pc:spChg chg="add mod">
+          <ac:chgData name="Alexis MARTIN" userId="ec32c3d9-5957-42d0-8757-996fd533d25b" providerId="ADAL" clId="{B76BE869-635B-4DC9-A437-AFDC8BC5A345}" dt="2026-06-24T08:57:13.266" v="7"/>
+          <ac:spMkLst>
+            <pc:docMk/>
+            <pc:sldMk cId="4196119950" sldId="267"/>
+            <ac:spMk id="26" creationId="{9081D3B4-7149-3DBC-A0AC-1B11390E87B3}"/>
+          </ac:spMkLst>
+        </pc:spChg>
+        <pc:spChg chg="add mod">
+          <ac:chgData name="Alexis MARTIN" userId="ec32c3d9-5957-42d0-8757-996fd533d25b" providerId="ADAL" clId="{B76BE869-635B-4DC9-A437-AFDC8BC5A345}" dt="2026-06-24T08:57:13.266" v="7"/>
+          <ac:spMkLst>
+            <pc:docMk/>
+            <pc:sldMk cId="4196119950" sldId="267"/>
+            <ac:spMk id="30" creationId="{3C200553-4917-BE59-0E55-F7B6FB15C15D}"/>
+          </ac:spMkLst>
+        </pc:spChg>
+        <pc:spChg chg="add mod">
+          <ac:chgData name="Alexis MARTIN" userId="ec32c3d9-5957-42d0-8757-996fd533d25b" providerId="ADAL" clId="{B76BE869-635B-4DC9-A437-AFDC8BC5A345}" dt="2026-06-24T08:57:13.266" v="7"/>
+          <ac:spMkLst>
+            <pc:docMk/>
+            <pc:sldMk cId="4196119950" sldId="267"/>
+            <ac:spMk id="31" creationId="{352CD195-014C-563E-13F2-F3A997D8A7C7}"/>
+          </ac:spMkLst>
+        </pc:spChg>
+        <pc:spChg chg="add mod">
+          <ac:chgData name="Alexis MARTIN" userId="ec32c3d9-5957-42d0-8757-996fd533d25b" providerId="ADAL" clId="{B76BE869-635B-4DC9-A437-AFDC8BC5A345}" dt="2026-06-24T08:57:13.266" v="7"/>
+          <ac:spMkLst>
+            <pc:docMk/>
+            <pc:sldMk cId="4196119950" sldId="267"/>
+            <ac:spMk id="32" creationId="{81EB927F-2702-998F-F149-F60325FA57E5}"/>
+          </ac:spMkLst>
+        </pc:spChg>
+        <pc:spChg chg="add mod">
+          <ac:chgData name="Alexis MARTIN" userId="ec32c3d9-5957-42d0-8757-996fd533d25b" providerId="ADAL" clId="{B76BE869-635B-4DC9-A437-AFDC8BC5A345}" dt="2026-06-24T08:57:13.266" v="7"/>
+          <ac:spMkLst>
+            <pc:docMk/>
+            <pc:sldMk cId="4196119950" sldId="267"/>
+            <ac:spMk id="36" creationId="{8518A937-322B-18C5-9F28-BEF344E1B47C}"/>
+          </ac:spMkLst>
+        </pc:spChg>
+        <pc:spChg chg="add mod">
+          <ac:chgData name="Alexis MARTIN" userId="ec32c3d9-5957-42d0-8757-996fd533d25b" providerId="ADAL" clId="{B76BE869-635B-4DC9-A437-AFDC8BC5A345}" dt="2026-06-24T08:57:13.266" v="7"/>
+          <ac:spMkLst>
+            <pc:docMk/>
+            <pc:sldMk cId="4196119950" sldId="267"/>
+            <ac:spMk id="38" creationId="{3E2DE5D5-F139-552E-1257-20C2C9952CA6}"/>
+          </ac:spMkLst>
+        </pc:spChg>
+        <pc:spChg chg="add mod">
+          <ac:chgData name="Alexis MARTIN" userId="ec32c3d9-5957-42d0-8757-996fd533d25b" providerId="ADAL" clId="{B76BE869-635B-4DC9-A437-AFDC8BC5A345}" dt="2026-06-24T09:00:55.721" v="86" actId="1076"/>
+          <ac:spMkLst>
+            <pc:docMk/>
+            <pc:sldMk cId="4196119950" sldId="267"/>
+            <ac:spMk id="75" creationId="{A2D8A5D3-F7E7-61AF-3249-1CA11BB673D8}"/>
+          </ac:spMkLst>
+        </pc:spChg>
+        <pc:spChg chg="add mod">
+          <ac:chgData name="Alexis MARTIN" userId="ec32c3d9-5957-42d0-8757-996fd533d25b" providerId="ADAL" clId="{B76BE869-635B-4DC9-A437-AFDC8BC5A345}" dt="2026-06-24T09:01:16.269" v="90" actId="1076"/>
+          <ac:spMkLst>
+            <pc:docMk/>
+            <pc:sldMk cId="4196119950" sldId="267"/>
+            <ac:spMk id="76" creationId="{21E553D2-4A6B-1909-17AB-41655A844C3F}"/>
+          </ac:spMkLst>
+        </pc:spChg>
+        <pc:spChg chg="add mod">
+          <ac:chgData name="Alexis MARTIN" userId="ec32c3d9-5957-42d0-8757-996fd533d25b" providerId="ADAL" clId="{B76BE869-635B-4DC9-A437-AFDC8BC5A345}" dt="2026-06-24T09:01:27.083" v="95" actId="1076"/>
+          <ac:spMkLst>
+            <pc:docMk/>
+            <pc:sldMk cId="4196119950" sldId="267"/>
+            <ac:spMk id="77" creationId="{4983C7AC-4BCB-BDD9-1EDE-256D147EFF33}"/>
+          </ac:spMkLst>
+        </pc:spChg>
+        <pc:spChg chg="add mod">
+          <ac:chgData name="Alexis MARTIN" userId="ec32c3d9-5957-42d0-8757-996fd533d25b" providerId="ADAL" clId="{B76BE869-635B-4DC9-A437-AFDC8BC5A345}" dt="2026-06-24T09:03:14.820" v="137" actId="1037"/>
+          <ac:spMkLst>
+            <pc:docMk/>
+            <pc:sldMk cId="4196119950" sldId="267"/>
+            <ac:spMk id="96" creationId="{1BB07C83-028C-1D90-C685-4C1568C9C68D}"/>
+          </ac:spMkLst>
+        </pc:spChg>
+        <pc:spChg chg="add mod">
+          <ac:chgData name="Alexis MARTIN" userId="ec32c3d9-5957-42d0-8757-996fd533d25b" providerId="ADAL" clId="{B76BE869-635B-4DC9-A437-AFDC8BC5A345}" dt="2026-06-24T09:03:40.584" v="151" actId="1076"/>
+          <ac:spMkLst>
+            <pc:docMk/>
+            <pc:sldMk cId="4196119950" sldId="267"/>
+            <ac:spMk id="97" creationId="{DE396919-36E0-25F4-1F11-4E52CA5E7C65}"/>
+          </ac:spMkLst>
+        </pc:spChg>
+        <pc:picChg chg="add del mod">
+          <ac:chgData name="Alexis MARTIN" userId="ec32c3d9-5957-42d0-8757-996fd533d25b" providerId="ADAL" clId="{B76BE869-635B-4DC9-A437-AFDC8BC5A345}" dt="2026-06-24T08:57:09.198" v="6" actId="478"/>
+          <ac:picMkLst>
+            <pc:docMk/>
+            <pc:sldMk cId="4196119950" sldId="267"/>
+            <ac:picMk id="5" creationId="{12B445C5-60E9-4955-2A32-90F099819AAA}"/>
+          </ac:picMkLst>
+        </pc:picChg>
+        <pc:cxnChg chg="add mod">
+          <ac:chgData name="Alexis MARTIN" userId="ec32c3d9-5957-42d0-8757-996fd533d25b" providerId="ADAL" clId="{B76BE869-635B-4DC9-A437-AFDC8BC5A345}" dt="2026-06-24T08:57:49.183" v="13" actId="14100"/>
+          <ac:cxnSpMkLst>
+            <pc:docMk/>
+            <pc:sldMk cId="4196119950" sldId="267"/>
+            <ac:cxnSpMk id="44" creationId="{35728AAC-C21E-3EB0-AB72-307364A283A6}"/>
+          </ac:cxnSpMkLst>
+        </pc:cxnChg>
+        <pc:cxnChg chg="add mod">
+          <ac:chgData name="Alexis MARTIN" userId="ec32c3d9-5957-42d0-8757-996fd533d25b" providerId="ADAL" clId="{B76BE869-635B-4DC9-A437-AFDC8BC5A345}" dt="2026-06-24T08:58:03.824" v="17" actId="1076"/>
+          <ac:cxnSpMkLst>
+            <pc:docMk/>
+            <pc:sldMk cId="4196119950" sldId="267"/>
+            <ac:cxnSpMk id="47" creationId="{F97349C7-86F9-FFF0-83B0-7189A1CE9A8B}"/>
+          </ac:cxnSpMkLst>
+        </pc:cxnChg>
+        <pc:cxnChg chg="add mod">
+          <ac:chgData name="Alexis MARTIN" userId="ec32c3d9-5957-42d0-8757-996fd533d25b" providerId="ADAL" clId="{B76BE869-635B-4DC9-A437-AFDC8BC5A345}" dt="2026-06-24T08:58:22.670" v="32" actId="1035"/>
+          <ac:cxnSpMkLst>
+            <pc:docMk/>
+            <pc:sldMk cId="4196119950" sldId="267"/>
+            <ac:cxnSpMk id="48" creationId="{1479BFEC-11A9-323E-243F-2D7C38E6593E}"/>
+          </ac:cxnSpMkLst>
+        </pc:cxnChg>
+        <pc:cxnChg chg="add mod">
+          <ac:chgData name="Alexis MARTIN" userId="ec32c3d9-5957-42d0-8757-996fd533d25b" providerId="ADAL" clId="{B76BE869-635B-4DC9-A437-AFDC8BC5A345}" dt="2026-06-24T08:58:31.931" v="38" actId="1036"/>
+          <ac:cxnSpMkLst>
+            <pc:docMk/>
+            <pc:sldMk cId="4196119950" sldId="267"/>
+            <ac:cxnSpMk id="52" creationId="{1C81863A-3C64-5874-989E-347E18822738}"/>
+          </ac:cxnSpMkLst>
+        </pc:cxnChg>
+        <pc:cxnChg chg="add mod">
+          <ac:chgData name="Alexis MARTIN" userId="ec32c3d9-5957-42d0-8757-996fd533d25b" providerId="ADAL" clId="{B76BE869-635B-4DC9-A437-AFDC8BC5A345}" dt="2026-06-24T08:58:39.973" v="41" actId="14100"/>
+          <ac:cxnSpMkLst>
+            <pc:docMk/>
+            <pc:sldMk cId="4196119950" sldId="267"/>
+            <ac:cxnSpMk id="53" creationId="{EDF93D96-505F-5038-47A7-5A87A3ADF00A}"/>
+          </ac:cxnSpMkLst>
+        </pc:cxnChg>
+        <pc:cxnChg chg="add mod">
+          <ac:chgData name="Alexis MARTIN" userId="ec32c3d9-5957-42d0-8757-996fd533d25b" providerId="ADAL" clId="{B76BE869-635B-4DC9-A437-AFDC8BC5A345}" dt="2026-06-24T08:58:48.726" v="42"/>
+          <ac:cxnSpMkLst>
+            <pc:docMk/>
+            <pc:sldMk cId="4196119950" sldId="267"/>
+            <ac:cxnSpMk id="55" creationId="{85EA698E-001D-210E-5D3A-AD3DB0179A04}"/>
+          </ac:cxnSpMkLst>
+        </pc:cxnChg>
+        <pc:cxnChg chg="add mod">
+          <ac:chgData name="Alexis MARTIN" userId="ec32c3d9-5957-42d0-8757-996fd533d25b" providerId="ADAL" clId="{B76BE869-635B-4DC9-A437-AFDC8BC5A345}" dt="2026-06-24T08:58:55.424" v="45" actId="14100"/>
+          <ac:cxnSpMkLst>
+            <pc:docMk/>
+            <pc:sldMk cId="4196119950" sldId="267"/>
+            <ac:cxnSpMk id="56" creationId="{C9969ACB-50B5-FDB9-88A8-7C88ADE0B3DE}"/>
+          </ac:cxnSpMkLst>
+        </pc:cxnChg>
+        <pc:cxnChg chg="add mod">
+          <ac:chgData name="Alexis MARTIN" userId="ec32c3d9-5957-42d0-8757-996fd533d25b" providerId="ADAL" clId="{B76BE869-635B-4DC9-A437-AFDC8BC5A345}" dt="2026-06-24T08:59:18.947" v="51" actId="14100"/>
+          <ac:cxnSpMkLst>
+            <pc:docMk/>
+            <pc:sldMk cId="4196119950" sldId="267"/>
+            <ac:cxnSpMk id="58" creationId="{714A8CE8-4EF8-08AF-8D5E-09971E038A42}"/>
+          </ac:cxnSpMkLst>
+        </pc:cxnChg>
+        <pc:cxnChg chg="add mod">
+          <ac:chgData name="Alexis MARTIN" userId="ec32c3d9-5957-42d0-8757-996fd533d25b" providerId="ADAL" clId="{B76BE869-635B-4DC9-A437-AFDC8BC5A345}" dt="2026-06-24T08:59:10.941" v="50" actId="1076"/>
+          <ac:cxnSpMkLst>
+            <pc:docMk/>
+            <pc:sldMk cId="4196119950" sldId="267"/>
+            <ac:cxnSpMk id="59" creationId="{B0B2AEE1-0740-0B46-FF5E-F817080E0F0F}"/>
+          </ac:cxnSpMkLst>
+        </pc:cxnChg>
+        <pc:cxnChg chg="add mod">
+          <ac:chgData name="Alexis MARTIN" userId="ec32c3d9-5957-42d0-8757-996fd533d25b" providerId="ADAL" clId="{B76BE869-635B-4DC9-A437-AFDC8BC5A345}" dt="2026-06-24T08:59:27.168" v="54" actId="14100"/>
+          <ac:cxnSpMkLst>
+            <pc:docMk/>
+            <pc:sldMk cId="4196119950" sldId="267"/>
+            <ac:cxnSpMk id="61" creationId="{9A90BB71-902B-2845-AD8C-5A5B654ED2F7}"/>
+          </ac:cxnSpMkLst>
+        </pc:cxnChg>
+        <pc:cxnChg chg="add mod">
+          <ac:chgData name="Alexis MARTIN" userId="ec32c3d9-5957-42d0-8757-996fd533d25b" providerId="ADAL" clId="{B76BE869-635B-4DC9-A437-AFDC8BC5A345}" dt="2026-06-24T08:59:37.145" v="62" actId="14100"/>
+          <ac:cxnSpMkLst>
+            <pc:docMk/>
+            <pc:sldMk cId="4196119950" sldId="267"/>
+            <ac:cxnSpMk id="64" creationId="{6ABAF7A6-A0D8-EF9C-5EA7-A638D60F385C}"/>
+          </ac:cxnSpMkLst>
+        </pc:cxnChg>
+        <pc:cxnChg chg="add mod">
+          <ac:chgData name="Alexis MARTIN" userId="ec32c3d9-5957-42d0-8757-996fd533d25b" providerId="ADAL" clId="{B76BE869-635B-4DC9-A437-AFDC8BC5A345}" dt="2026-06-24T08:59:48.701" v="68" actId="14100"/>
+          <ac:cxnSpMkLst>
+            <pc:docMk/>
+            <pc:sldMk cId="4196119950" sldId="267"/>
+            <ac:cxnSpMk id="66" creationId="{D03F3A32-1DA2-6427-8805-8006E2E4DD1F}"/>
+          </ac:cxnSpMkLst>
+        </pc:cxnChg>
+        <pc:cxnChg chg="add mod">
+          <ac:chgData name="Alexis MARTIN" userId="ec32c3d9-5957-42d0-8757-996fd533d25b" providerId="ADAL" clId="{B76BE869-635B-4DC9-A437-AFDC8BC5A345}" dt="2026-06-24T08:59:58.318" v="71" actId="14100"/>
+          <ac:cxnSpMkLst>
+            <pc:docMk/>
+            <pc:sldMk cId="4196119950" sldId="267"/>
+            <ac:cxnSpMk id="68" creationId="{5271CFCE-C1B9-A50D-C55A-A745536B9E16}"/>
+          </ac:cxnSpMkLst>
+        </pc:cxnChg>
+        <pc:cxnChg chg="add mod">
+          <ac:chgData name="Alexis MARTIN" userId="ec32c3d9-5957-42d0-8757-996fd533d25b" providerId="ADAL" clId="{B76BE869-635B-4DC9-A437-AFDC8BC5A345}" dt="2026-06-24T09:00:05.022" v="74" actId="14100"/>
+          <ac:cxnSpMkLst>
+            <pc:docMk/>
+            <pc:sldMk cId="4196119950" sldId="267"/>
+            <ac:cxnSpMk id="70" creationId="{A266829B-3849-BE25-968A-A2BD30EF3FE0}"/>
+          </ac:cxnSpMkLst>
+        </pc:cxnChg>
+        <pc:cxnChg chg="add mod">
+          <ac:chgData name="Alexis MARTIN" userId="ec32c3d9-5957-42d0-8757-996fd533d25b" providerId="ADAL" clId="{B76BE869-635B-4DC9-A437-AFDC8BC5A345}" dt="2026-06-24T09:00:29.216" v="78" actId="1582"/>
+          <ac:cxnSpMkLst>
+            <pc:docMk/>
+            <pc:sldMk cId="4196119950" sldId="267"/>
+            <ac:cxnSpMk id="72" creationId="{108B3D46-580C-E4AF-1DE5-E522A54D7161}"/>
+          </ac:cxnSpMkLst>
+        </pc:cxnChg>
+        <pc:cxnChg chg="add mod">
+          <ac:chgData name="Alexis MARTIN" userId="ec32c3d9-5957-42d0-8757-996fd533d25b" providerId="ADAL" clId="{B76BE869-635B-4DC9-A437-AFDC8BC5A345}" dt="2026-06-24T09:01:49.132" v="98" actId="208"/>
+          <ac:cxnSpMkLst>
+            <pc:docMk/>
+            <pc:sldMk cId="4196119950" sldId="267"/>
+            <ac:cxnSpMk id="78" creationId="{9FF6E869-A0AE-1521-F272-75FC01C13B39}"/>
+          </ac:cxnSpMkLst>
+        </pc:cxnChg>
+        <pc:cxnChg chg="add mod">
+          <ac:chgData name="Alexis MARTIN" userId="ec32c3d9-5957-42d0-8757-996fd533d25b" providerId="ADAL" clId="{B76BE869-635B-4DC9-A437-AFDC8BC5A345}" dt="2026-06-24T09:01:56.393" v="101" actId="14100"/>
+          <ac:cxnSpMkLst>
+            <pc:docMk/>
+            <pc:sldMk cId="4196119950" sldId="267"/>
+            <ac:cxnSpMk id="79" creationId="{C994D144-FB0F-F73A-E23B-20EE8A4E165E}"/>
+          </ac:cxnSpMkLst>
+        </pc:cxnChg>
+        <pc:cxnChg chg="add mod">
+          <ac:chgData name="Alexis MARTIN" userId="ec32c3d9-5957-42d0-8757-996fd533d25b" providerId="ADAL" clId="{B76BE869-635B-4DC9-A437-AFDC8BC5A345}" dt="2026-06-24T09:02:04.815" v="105" actId="14100"/>
+          <ac:cxnSpMkLst>
+            <pc:docMk/>
+            <pc:sldMk cId="4196119950" sldId="267"/>
+            <ac:cxnSpMk id="81" creationId="{23484161-ABC4-04B1-39AF-D25FBB3A97C9}"/>
+          </ac:cxnSpMkLst>
+        </pc:cxnChg>
+        <pc:cxnChg chg="add mod">
+          <ac:chgData name="Alexis MARTIN" userId="ec32c3d9-5957-42d0-8757-996fd533d25b" providerId="ADAL" clId="{B76BE869-635B-4DC9-A437-AFDC8BC5A345}" dt="2026-06-24T09:02:12.343" v="108" actId="14100"/>
+          <ac:cxnSpMkLst>
+            <pc:docMk/>
+            <pc:sldMk cId="4196119950" sldId="267"/>
+            <ac:cxnSpMk id="85" creationId="{9CF8C6F1-333B-7576-597C-BF2CF8517860}"/>
+          </ac:cxnSpMkLst>
+        </pc:cxnChg>
+        <pc:cxnChg chg="add mod">
+          <ac:chgData name="Alexis MARTIN" userId="ec32c3d9-5957-42d0-8757-996fd533d25b" providerId="ADAL" clId="{B76BE869-635B-4DC9-A437-AFDC8BC5A345}" dt="2026-06-24T09:02:17.592" v="111" actId="14100"/>
+          <ac:cxnSpMkLst>
+            <pc:docMk/>
+            <pc:sldMk cId="4196119950" sldId="267"/>
+            <ac:cxnSpMk id="87" creationId="{B0DB8D3A-2603-44E4-8BDD-D24C549EA39F}"/>
+          </ac:cxnSpMkLst>
+        </pc:cxnChg>
+        <pc:cxnChg chg="add mod">
+          <ac:chgData name="Alexis MARTIN" userId="ec32c3d9-5957-42d0-8757-996fd533d25b" providerId="ADAL" clId="{B76BE869-635B-4DC9-A437-AFDC8BC5A345}" dt="2026-06-24T09:02:22.522" v="113" actId="1076"/>
+          <ac:cxnSpMkLst>
+            <pc:docMk/>
+            <pc:sldMk cId="4196119950" sldId="267"/>
+            <ac:cxnSpMk id="89" creationId="{58731FC8-E6A2-E745-B480-AE7ED2796984}"/>
+          </ac:cxnSpMkLst>
+        </pc:cxnChg>
+        <pc:cxnChg chg="add mod">
+          <ac:chgData name="Alexis MARTIN" userId="ec32c3d9-5957-42d0-8757-996fd533d25b" providerId="ADAL" clId="{B76BE869-635B-4DC9-A437-AFDC8BC5A345}" dt="2026-06-24T09:02:35.896" v="116" actId="14100"/>
+          <ac:cxnSpMkLst>
+            <pc:docMk/>
+            <pc:sldMk cId="4196119950" sldId="267"/>
+            <ac:cxnSpMk id="90" creationId="{E22F4527-C265-3AC7-3DC5-2B23B8301232}"/>
+          </ac:cxnSpMkLst>
+        </pc:cxnChg>
+        <pc:cxnChg chg="add mod">
+          <ac:chgData name="Alexis MARTIN" userId="ec32c3d9-5957-42d0-8757-996fd533d25b" providerId="ADAL" clId="{B76BE869-635B-4DC9-A437-AFDC8BC5A345}" dt="2026-06-24T09:02:43.392" v="119" actId="14100"/>
+          <ac:cxnSpMkLst>
+            <pc:docMk/>
+            <pc:sldMk cId="4196119950" sldId="267"/>
+            <ac:cxnSpMk id="92" creationId="{B74765D2-9ACB-850F-F814-F734741261E5}"/>
+          </ac:cxnSpMkLst>
+        </pc:cxnChg>
+        <pc:cxnChg chg="add mod">
+          <ac:chgData name="Alexis MARTIN" userId="ec32c3d9-5957-42d0-8757-996fd533d25b" providerId="ADAL" clId="{B76BE869-635B-4DC9-A437-AFDC8BC5A345}" dt="2026-06-24T09:02:49.230" v="122" actId="14100"/>
+          <ac:cxnSpMkLst>
+            <pc:docMk/>
+            <pc:sldMk cId="4196119950" sldId="267"/>
+            <ac:cxnSpMk id="94" creationId="{88A81794-E195-BCC5-3FB4-687260C1909F}"/>
+          </ac:cxnSpMkLst>
+        </pc:cxnChg>
+        <pc:cxnChg chg="add mod">
+          <ac:chgData name="Alexis MARTIN" userId="ec32c3d9-5957-42d0-8757-996fd533d25b" providerId="ADAL" clId="{B76BE869-635B-4DC9-A437-AFDC8BC5A345}" dt="2026-06-24T09:05:02.431" v="166" actId="693"/>
+          <ac:cxnSpMkLst>
+            <pc:docMk/>
+            <pc:sldMk cId="4196119950" sldId="267"/>
+            <ac:cxnSpMk id="98" creationId="{C3D13A28-BAF0-0E71-2F6A-A79F0CD62590}"/>
+          </ac:cxnSpMkLst>
+        </pc:cxnChg>
+        <pc:cxnChg chg="add mod">
+          <ac:chgData name="Alexis MARTIN" userId="ec32c3d9-5957-42d0-8757-996fd533d25b" providerId="ADAL" clId="{B76BE869-635B-4DC9-A437-AFDC8BC5A345}" dt="2026-06-24T09:04:20.577" v="157" actId="1076"/>
+          <ac:cxnSpMkLst>
+            <pc:docMk/>
+            <pc:sldMk cId="4196119950" sldId="267"/>
+            <ac:cxnSpMk id="99" creationId="{A42BD313-597B-6F04-6A40-6C4E7F3CAC57}"/>
+          </ac:cxnSpMkLst>
+        </pc:cxnChg>
+        <pc:cxnChg chg="add mod">
+          <ac:chgData name="Alexis MARTIN" userId="ec32c3d9-5957-42d0-8757-996fd533d25b" providerId="ADAL" clId="{B76BE869-635B-4DC9-A437-AFDC8BC5A345}" dt="2026-06-24T09:05:12.200" v="168" actId="1076"/>
+          <ac:cxnSpMkLst>
+            <pc:docMk/>
+            <pc:sldMk cId="4196119950" sldId="267"/>
+            <ac:cxnSpMk id="101" creationId="{82A24A0F-8B95-7A8A-D56D-667A16524866}"/>
+          </ac:cxnSpMkLst>
+        </pc:cxnChg>
+        <pc:cxnChg chg="add mod">
+          <ac:chgData name="Alexis MARTIN" userId="ec32c3d9-5957-42d0-8757-996fd533d25b" providerId="ADAL" clId="{B76BE869-635B-4DC9-A437-AFDC8BC5A345}" dt="2026-06-24T09:05:34.633" v="172" actId="14100"/>
+          <ac:cxnSpMkLst>
+            <pc:docMk/>
+            <pc:sldMk cId="4196119950" sldId="267"/>
+            <ac:cxnSpMk id="102" creationId="{8483BAFE-17DE-DC7E-480D-803155CDC665}"/>
+          </ac:cxnSpMkLst>
+        </pc:cxnChg>
+        <pc:cxnChg chg="add mod">
+          <ac:chgData name="Alexis MARTIN" userId="ec32c3d9-5957-42d0-8757-996fd533d25b" providerId="ADAL" clId="{B76BE869-635B-4DC9-A437-AFDC8BC5A345}" dt="2026-06-24T09:05:50.171" v="176" actId="208"/>
+          <ac:cxnSpMkLst>
+            <pc:docMk/>
+            <pc:sldMk cId="4196119950" sldId="267"/>
+            <ac:cxnSpMk id="105" creationId="{0CB7DB6C-6BA5-2D62-40A1-1CC28C4B3E44}"/>
+          </ac:cxnSpMkLst>
+        </pc:cxnChg>
+        <pc:cxnChg chg="add mod">
+          <ac:chgData name="Alexis MARTIN" userId="ec32c3d9-5957-42d0-8757-996fd533d25b" providerId="ADAL" clId="{B76BE869-635B-4DC9-A437-AFDC8BC5A345}" dt="2026-06-24T09:06:03.249" v="179" actId="14100"/>
+          <ac:cxnSpMkLst>
+            <pc:docMk/>
+            <pc:sldMk cId="4196119950" sldId="267"/>
+            <ac:cxnSpMk id="106" creationId="{BD54D403-9A25-9AD7-8B99-D8D6FFCF0F1C}"/>
+          </ac:cxnSpMkLst>
+        </pc:cxnChg>
+        <pc:cxnChg chg="add del mod">
+          <ac:chgData name="Alexis MARTIN" userId="ec32c3d9-5957-42d0-8757-996fd533d25b" providerId="ADAL" clId="{B76BE869-635B-4DC9-A437-AFDC8BC5A345}" dt="2026-06-24T09:06:21.159" v="182" actId="478"/>
+          <ac:cxnSpMkLst>
+            <pc:docMk/>
+            <pc:sldMk cId="4196119950" sldId="267"/>
+            <ac:cxnSpMk id="108" creationId="{3B39B355-5479-FC3D-E74D-391AAE3A80BE}"/>
+          </ac:cxnSpMkLst>
+        </pc:cxnChg>
+        <pc:cxnChg chg="add mod">
+          <ac:chgData name="Alexis MARTIN" userId="ec32c3d9-5957-42d0-8757-996fd533d25b" providerId="ADAL" clId="{B76BE869-635B-4DC9-A437-AFDC8BC5A345}" dt="2026-06-24T09:06:27.414" v="184" actId="14100"/>
+          <ac:cxnSpMkLst>
+            <pc:docMk/>
+            <pc:sldMk cId="4196119950" sldId="267"/>
+            <ac:cxnSpMk id="109" creationId="{1BDB43D2-928C-6064-5B63-45CBE8759901}"/>
+          </ac:cxnSpMkLst>
+        </pc:cxnChg>
+        <pc:cxnChg chg="add mod">
+          <ac:chgData name="Alexis MARTIN" userId="ec32c3d9-5957-42d0-8757-996fd533d25b" providerId="ADAL" clId="{B76BE869-635B-4DC9-A437-AFDC8BC5A345}" dt="2026-06-24T09:06:29.946" v="185" actId="14100"/>
+          <ac:cxnSpMkLst>
+            <pc:docMk/>
+            <pc:sldMk cId="4196119950" sldId="267"/>
+            <ac:cxnSpMk id="110" creationId="{6EBC90B8-F6D4-B06D-09E2-81208CFF5D2C}"/>
+          </ac:cxnSpMkLst>
+        </pc:cxnChg>
+        <pc:cxnChg chg="add mod">
+          <ac:chgData name="Alexis MARTIN" userId="ec32c3d9-5957-42d0-8757-996fd533d25b" providerId="ADAL" clId="{B76BE869-635B-4DC9-A437-AFDC8BC5A345}" dt="2026-06-24T09:06:25.030" v="183" actId="14100"/>
+          <ac:cxnSpMkLst>
+            <pc:docMk/>
+            <pc:sldMk cId="4196119950" sldId="267"/>
+            <ac:cxnSpMk id="111" creationId="{DAA0336B-7865-07CF-DD24-2F3DB9C6E9A2}"/>
+          </ac:cxnSpMkLst>
+        </pc:cxnChg>
+        <pc:cxnChg chg="add mod">
+          <ac:chgData name="Alexis MARTIN" userId="ec32c3d9-5957-42d0-8757-996fd533d25b" providerId="ADAL" clId="{B76BE869-635B-4DC9-A437-AFDC8BC5A345}" dt="2026-06-24T09:06:59.770" v="194" actId="1076"/>
+          <ac:cxnSpMkLst>
+            <pc:docMk/>
+            <pc:sldMk cId="4196119950" sldId="267"/>
+            <ac:cxnSpMk id="115" creationId="{DD05A595-61EE-4410-0343-2B3E7EAD7010}"/>
+          </ac:cxnSpMkLst>
+        </pc:cxnChg>
+        <pc:cxnChg chg="add mod">
+          <ac:chgData name="Alexis MARTIN" userId="ec32c3d9-5957-42d0-8757-996fd533d25b" providerId="ADAL" clId="{B76BE869-635B-4DC9-A437-AFDC8BC5A345}" dt="2026-06-24T09:06:59.770" v="194" actId="1076"/>
+          <ac:cxnSpMkLst>
+            <pc:docMk/>
+            <pc:sldMk cId="4196119950" sldId="267"/>
+            <ac:cxnSpMk id="116" creationId="{B38E8877-3C32-C147-55B5-EC524EFBFE32}"/>
+          </ac:cxnSpMkLst>
+        </pc:cxnChg>
+        <pc:cxnChg chg="add mod">
+          <ac:chgData name="Alexis MARTIN" userId="ec32c3d9-5957-42d0-8757-996fd533d25b" providerId="ADAL" clId="{B76BE869-635B-4DC9-A437-AFDC8BC5A345}" dt="2026-06-24T09:07:17.536" v="197" actId="14100"/>
+          <ac:cxnSpMkLst>
+            <pc:docMk/>
+            <pc:sldMk cId="4196119950" sldId="267"/>
+            <ac:cxnSpMk id="123" creationId="{58AABCD4-DD1F-1D8F-F3FD-188E58521613}"/>
+          </ac:cxnSpMkLst>
+        </pc:cxnChg>
+        <pc:cxnChg chg="add mod">
+          <ac:chgData name="Alexis MARTIN" userId="ec32c3d9-5957-42d0-8757-996fd533d25b" providerId="ADAL" clId="{B76BE869-635B-4DC9-A437-AFDC8BC5A345}" dt="2026-06-24T09:07:24.532" v="200" actId="14100"/>
+          <ac:cxnSpMkLst>
+            <pc:docMk/>
+            <pc:sldMk cId="4196119950" sldId="267"/>
+            <ac:cxnSpMk id="125" creationId="{B952C007-483A-7018-40C1-A8FC47FC69FF}"/>
+          </ac:cxnSpMkLst>
+        </pc:cxnChg>
+        <pc:cxnChg chg="add mod">
+          <ac:chgData name="Alexis MARTIN" userId="ec32c3d9-5957-42d0-8757-996fd533d25b" providerId="ADAL" clId="{B76BE869-635B-4DC9-A437-AFDC8BC5A345}" dt="2026-06-24T09:07:32.073" v="204" actId="14100"/>
+          <ac:cxnSpMkLst>
+            <pc:docMk/>
+            <pc:sldMk cId="4196119950" sldId="267"/>
+            <ac:cxnSpMk id="127" creationId="{7785030E-6187-95DA-87D0-8F926DCD4896}"/>
+          </ac:cxnSpMkLst>
+        </pc:cxnChg>
+        <pc:cxnChg chg="add mod">
+          <ac:chgData name="Alexis MARTIN" userId="ec32c3d9-5957-42d0-8757-996fd533d25b" providerId="ADAL" clId="{B76BE869-635B-4DC9-A437-AFDC8BC5A345}" dt="2026-06-24T09:07:37.604" v="206" actId="1076"/>
+          <ac:cxnSpMkLst>
+            <pc:docMk/>
+            <pc:sldMk cId="4196119950" sldId="267"/>
+            <ac:cxnSpMk id="130" creationId="{5551F38F-DA8D-CB63-BB7C-9E3093071D35}"/>
+          </ac:cxnSpMkLst>
+        </pc:cxnChg>
+        <pc:cxnChg chg="add mod">
+          <ac:chgData name="Alexis MARTIN" userId="ec32c3d9-5957-42d0-8757-996fd533d25b" providerId="ADAL" clId="{B76BE869-635B-4DC9-A437-AFDC8BC5A345}" dt="2026-06-24T09:07:43.742" v="209" actId="14100"/>
+          <ac:cxnSpMkLst>
+            <pc:docMk/>
+            <pc:sldMk cId="4196119950" sldId="267"/>
+            <ac:cxnSpMk id="131" creationId="{2F8EF38C-F80F-E154-8404-0AC2829C7D1E}"/>
+          </ac:cxnSpMkLst>
+        </pc:cxnChg>
+      </pc:sldChg>
+    </pc:docChg>
+  </pc:docChgLst>
+</pc:chgInfo>
+</file>
+
 <file path=ppt/slideLayouts/slideLayout1.xml><?xml version="1.0" encoding="utf-8"?>
 <p:sldLayout xmlns:a="http://schemas.openxmlformats.org/drawingml/2006/main" xmlns:r="http://schemas.openxmlformats.org/officeDocument/2006/relationships" xmlns:p="http://schemas.openxmlformats.org/presentationml/2006/main" type="title" preserve="1">
   <p:cSld name="Diapositive de titre">
@@ -164,7 +666,7 @@
           </a:lstStyle>
           <a:p>
             <a:r>
-              <a:rPr lang="fr-FR" smtClean="0"/>
+              <a:rPr lang="fr-FR"/>
               <a:t>Modifiez le style du titre</a:t>
             </a:r>
             <a:endParaRPr lang="en-US" dirty="0"/>
@@ -229,7 +731,7 @@
           </a:lstStyle>
           <a:p>
             <a:r>
-              <a:rPr lang="fr-FR" smtClean="0"/>
+              <a:rPr lang="fr-FR"/>
               <a:t>Modifier le style des sous-titres du masque</a:t>
             </a:r>
             <a:endParaRPr lang="en-US" dirty="0"/>
@@ -253,7 +755,7 @@
           <a:p>
             <a:fld id="{E540F50D-E62A-47E5-A5CF-BA54E2A2B6C1}" type="datetimeFigureOut">
               <a:rPr lang="fr-FR" smtClean="0"/>
-              <a:t>12/09/2024</a:t>
+              <a:t>24/06/2026</a:t>
             </a:fld>
             <a:endParaRPr lang="fr-FR"/>
           </a:p>
@@ -347,7 +849,7 @@
           <a:lstStyle/>
           <a:p>
             <a:r>
-              <a:rPr lang="fr-FR" smtClean="0"/>
+              <a:rPr lang="fr-FR"/>
               <a:t>Modifiez le style du titre</a:t>
             </a:r>
             <a:endParaRPr lang="en-US" dirty="0"/>
@@ -371,35 +873,35 @@
           <a:p>
             <a:pPr lvl="0"/>
             <a:r>
-              <a:rPr lang="fr-FR" smtClean="0"/>
+              <a:rPr lang="fr-FR"/>
               <a:t>Modifier les styles du texte du masque</a:t>
             </a:r>
           </a:p>
           <a:p>
             <a:pPr lvl="1"/>
             <a:r>
-              <a:rPr lang="fr-FR" smtClean="0"/>
+              <a:rPr lang="fr-FR"/>
               <a:t>Deuxième niveau</a:t>
             </a:r>
           </a:p>
           <a:p>
             <a:pPr lvl="2"/>
             <a:r>
-              <a:rPr lang="fr-FR" smtClean="0"/>
+              <a:rPr lang="fr-FR"/>
               <a:t>Troisième niveau</a:t>
             </a:r>
           </a:p>
           <a:p>
             <a:pPr lvl="3"/>
             <a:r>
-              <a:rPr lang="fr-FR" smtClean="0"/>
+              <a:rPr lang="fr-FR"/>
               <a:t>Quatrième niveau</a:t>
             </a:r>
           </a:p>
           <a:p>
             <a:pPr lvl="4"/>
             <a:r>
-              <a:rPr lang="fr-FR" smtClean="0"/>
+              <a:rPr lang="fr-FR"/>
               <a:t>Cinquième niveau</a:t>
             </a:r>
             <a:endParaRPr lang="en-US" dirty="0"/>
@@ -423,7 +925,7 @@
           <a:p>
             <a:fld id="{E540F50D-E62A-47E5-A5CF-BA54E2A2B6C1}" type="datetimeFigureOut">
               <a:rPr lang="fr-FR" smtClean="0"/>
-              <a:t>12/09/2024</a:t>
+              <a:t>24/06/2026</a:t>
             </a:fld>
             <a:endParaRPr lang="fr-FR"/>
           </a:p>
@@ -522,7 +1024,7 @@
           <a:lstStyle/>
           <a:p>
             <a:r>
-              <a:rPr lang="fr-FR" smtClean="0"/>
+              <a:rPr lang="fr-FR"/>
               <a:t>Modifiez le style du titre</a:t>
             </a:r>
             <a:endParaRPr lang="en-US" dirty="0"/>
@@ -551,35 +1053,35 @@
           <a:p>
             <a:pPr lvl="0"/>
             <a:r>
-              <a:rPr lang="fr-FR" smtClean="0"/>
+              <a:rPr lang="fr-FR"/>
               <a:t>Modifier les styles du texte du masque</a:t>
             </a:r>
           </a:p>
           <a:p>
             <a:pPr lvl="1"/>
             <a:r>
-              <a:rPr lang="fr-FR" smtClean="0"/>
+              <a:rPr lang="fr-FR"/>
               <a:t>Deuxième niveau</a:t>
             </a:r>
           </a:p>
           <a:p>
             <a:pPr lvl="2"/>
             <a:r>
-              <a:rPr lang="fr-FR" smtClean="0"/>
+              <a:rPr lang="fr-FR"/>
               <a:t>Troisième niveau</a:t>
             </a:r>
           </a:p>
           <a:p>
             <a:pPr lvl="3"/>
             <a:r>
-              <a:rPr lang="fr-FR" smtClean="0"/>
+              <a:rPr lang="fr-FR"/>
               <a:t>Quatrième niveau</a:t>
             </a:r>
           </a:p>
           <a:p>
             <a:pPr lvl="4"/>
             <a:r>
-              <a:rPr lang="fr-FR" smtClean="0"/>
+              <a:rPr lang="fr-FR"/>
               <a:t>Cinquième niveau</a:t>
             </a:r>
             <a:endParaRPr lang="en-US" dirty="0"/>
@@ -603,7 +1105,7 @@
           <a:p>
             <a:fld id="{E540F50D-E62A-47E5-A5CF-BA54E2A2B6C1}" type="datetimeFigureOut">
               <a:rPr lang="fr-FR" smtClean="0"/>
-              <a:t>12/09/2024</a:t>
+              <a:t>24/06/2026</a:t>
             </a:fld>
             <a:endParaRPr lang="fr-FR"/>
           </a:p>
@@ -697,7 +1199,7 @@
           <a:lstStyle/>
           <a:p>
             <a:r>
-              <a:rPr lang="fr-FR" smtClean="0"/>
+              <a:rPr lang="fr-FR"/>
               <a:t>Modifiez le style du titre</a:t>
             </a:r>
             <a:endParaRPr lang="en-US" dirty="0"/>
@@ -721,35 +1223,35 @@
           <a:p>
             <a:pPr lvl="0"/>
             <a:r>
-              <a:rPr lang="fr-FR" smtClean="0"/>
+              <a:rPr lang="fr-FR"/>
               <a:t>Modifier les styles du texte du masque</a:t>
             </a:r>
           </a:p>
           <a:p>
             <a:pPr lvl="1"/>
             <a:r>
-              <a:rPr lang="fr-FR" smtClean="0"/>
+              <a:rPr lang="fr-FR"/>
               <a:t>Deuxième niveau</a:t>
             </a:r>
           </a:p>
           <a:p>
             <a:pPr lvl="2"/>
             <a:r>
-              <a:rPr lang="fr-FR" smtClean="0"/>
+              <a:rPr lang="fr-FR"/>
               <a:t>Troisième niveau</a:t>
             </a:r>
           </a:p>
           <a:p>
             <a:pPr lvl="3"/>
             <a:r>
-              <a:rPr lang="fr-FR" smtClean="0"/>
+              <a:rPr lang="fr-FR"/>
               <a:t>Quatrième niveau</a:t>
             </a:r>
           </a:p>
           <a:p>
             <a:pPr lvl="4"/>
             <a:r>
-              <a:rPr lang="fr-FR" smtClean="0"/>
+              <a:rPr lang="fr-FR"/>
               <a:t>Cinquième niveau</a:t>
             </a:r>
             <a:endParaRPr lang="en-US" dirty="0"/>
@@ -773,7 +1275,7 @@
           <a:p>
             <a:fld id="{E540F50D-E62A-47E5-A5CF-BA54E2A2B6C1}" type="datetimeFigureOut">
               <a:rPr lang="fr-FR" smtClean="0"/>
-              <a:t>12/09/2024</a:t>
+              <a:t>24/06/2026</a:t>
             </a:fld>
             <a:endParaRPr lang="fr-FR"/>
           </a:p>
@@ -876,7 +1378,7 @@
           </a:lstStyle>
           <a:p>
             <a:r>
-              <a:rPr lang="fr-FR" smtClean="0"/>
+              <a:rPr lang="fr-FR"/>
               <a:t>Modifiez le style du titre</a:t>
             </a:r>
             <a:endParaRPr lang="en-US" dirty="0"/>
@@ -994,7 +1496,7 @@
           <a:p>
             <a:pPr lvl="0"/>
             <a:r>
-              <a:rPr lang="fr-FR" smtClean="0"/>
+              <a:rPr lang="fr-FR"/>
               <a:t>Modifier les styles du texte du masque</a:t>
             </a:r>
           </a:p>
@@ -1017,7 +1519,7 @@
           <a:p>
             <a:fld id="{E540F50D-E62A-47E5-A5CF-BA54E2A2B6C1}" type="datetimeFigureOut">
               <a:rPr lang="fr-FR" smtClean="0"/>
-              <a:t>12/09/2024</a:t>
+              <a:t>24/06/2026</a:t>
             </a:fld>
             <a:endParaRPr lang="fr-FR"/>
           </a:p>
@@ -1111,7 +1613,7 @@
           <a:lstStyle/>
           <a:p>
             <a:r>
-              <a:rPr lang="fr-FR" smtClean="0"/>
+              <a:rPr lang="fr-FR"/>
               <a:t>Modifiez le style du titre</a:t>
             </a:r>
             <a:endParaRPr lang="en-US" dirty="0"/>
@@ -1140,35 +1642,35 @@
           <a:p>
             <a:pPr lvl="0"/>
             <a:r>
-              <a:rPr lang="fr-FR" smtClean="0"/>
+              <a:rPr lang="fr-FR"/>
               <a:t>Modifier les styles du texte du masque</a:t>
             </a:r>
           </a:p>
           <a:p>
             <a:pPr lvl="1"/>
             <a:r>
-              <a:rPr lang="fr-FR" smtClean="0"/>
+              <a:rPr lang="fr-FR"/>
               <a:t>Deuxième niveau</a:t>
             </a:r>
           </a:p>
           <a:p>
             <a:pPr lvl="2"/>
             <a:r>
-              <a:rPr lang="fr-FR" smtClean="0"/>
+              <a:rPr lang="fr-FR"/>
               <a:t>Troisième niveau</a:t>
             </a:r>
           </a:p>
           <a:p>
             <a:pPr lvl="3"/>
             <a:r>
-              <a:rPr lang="fr-FR" smtClean="0"/>
+              <a:rPr lang="fr-FR"/>
               <a:t>Quatrième niveau</a:t>
             </a:r>
           </a:p>
           <a:p>
             <a:pPr lvl="4"/>
             <a:r>
-              <a:rPr lang="fr-FR" smtClean="0"/>
+              <a:rPr lang="fr-FR"/>
               <a:t>Cinquième niveau</a:t>
             </a:r>
             <a:endParaRPr lang="en-US" dirty="0"/>
@@ -1197,35 +1699,35 @@
           <a:p>
             <a:pPr lvl="0"/>
             <a:r>
-              <a:rPr lang="fr-FR" smtClean="0"/>
+              <a:rPr lang="fr-FR"/>
               <a:t>Modifier les styles du texte du masque</a:t>
             </a:r>
           </a:p>
           <a:p>
             <a:pPr lvl="1"/>
             <a:r>
-              <a:rPr lang="fr-FR" smtClean="0"/>
+              <a:rPr lang="fr-FR"/>
               <a:t>Deuxième niveau</a:t>
             </a:r>
           </a:p>
           <a:p>
             <a:pPr lvl="2"/>
             <a:r>
-              <a:rPr lang="fr-FR" smtClean="0"/>
+              <a:rPr lang="fr-FR"/>
               <a:t>Troisième niveau</a:t>
             </a:r>
           </a:p>
           <a:p>
             <a:pPr lvl="3"/>
             <a:r>
-              <a:rPr lang="fr-FR" smtClean="0"/>
+              <a:rPr lang="fr-FR"/>
               <a:t>Quatrième niveau</a:t>
             </a:r>
           </a:p>
           <a:p>
             <a:pPr lvl="4"/>
             <a:r>
-              <a:rPr lang="fr-FR" smtClean="0"/>
+              <a:rPr lang="fr-FR"/>
               <a:t>Cinquième niveau</a:t>
             </a:r>
             <a:endParaRPr lang="en-US" dirty="0"/>
@@ -1249,7 +1751,7 @@
           <a:p>
             <a:fld id="{E540F50D-E62A-47E5-A5CF-BA54E2A2B6C1}" type="datetimeFigureOut">
               <a:rPr lang="fr-FR" smtClean="0"/>
-              <a:t>12/09/2024</a:t>
+              <a:t>24/06/2026</a:t>
             </a:fld>
             <a:endParaRPr lang="fr-FR"/>
           </a:p>
@@ -1348,7 +1850,7 @@
           <a:lstStyle/>
           <a:p>
             <a:r>
-              <a:rPr lang="fr-FR" smtClean="0"/>
+              <a:rPr lang="fr-FR"/>
               <a:t>Modifiez le style du titre</a:t>
             </a:r>
             <a:endParaRPr lang="en-US" dirty="0"/>
@@ -1414,7 +1916,7 @@
           <a:p>
             <a:pPr lvl="0"/>
             <a:r>
-              <a:rPr lang="fr-FR" smtClean="0"/>
+              <a:rPr lang="fr-FR"/>
               <a:t>Modifier les styles du texte du masque</a:t>
             </a:r>
           </a:p>
@@ -1442,35 +1944,35 @@
           <a:p>
             <a:pPr lvl="0"/>
             <a:r>
-              <a:rPr lang="fr-FR" smtClean="0"/>
+              <a:rPr lang="fr-FR"/>
               <a:t>Modifier les styles du texte du masque</a:t>
             </a:r>
           </a:p>
           <a:p>
             <a:pPr lvl="1"/>
             <a:r>
-              <a:rPr lang="fr-FR" smtClean="0"/>
+              <a:rPr lang="fr-FR"/>
               <a:t>Deuxième niveau</a:t>
             </a:r>
           </a:p>
           <a:p>
             <a:pPr lvl="2"/>
             <a:r>
-              <a:rPr lang="fr-FR" smtClean="0"/>
+              <a:rPr lang="fr-FR"/>
               <a:t>Troisième niveau</a:t>
             </a:r>
           </a:p>
           <a:p>
             <a:pPr lvl="3"/>
             <a:r>
-              <a:rPr lang="fr-FR" smtClean="0"/>
+              <a:rPr lang="fr-FR"/>
               <a:t>Quatrième niveau</a:t>
             </a:r>
           </a:p>
           <a:p>
             <a:pPr lvl="4"/>
             <a:r>
-              <a:rPr lang="fr-FR" smtClean="0"/>
+              <a:rPr lang="fr-FR"/>
               <a:t>Cinquième niveau</a:t>
             </a:r>
             <a:endParaRPr lang="en-US" dirty="0"/>
@@ -1536,7 +2038,7 @@
           <a:p>
             <a:pPr lvl="0"/>
             <a:r>
-              <a:rPr lang="fr-FR" smtClean="0"/>
+              <a:rPr lang="fr-FR"/>
               <a:t>Modifier les styles du texte du masque</a:t>
             </a:r>
           </a:p>
@@ -1564,35 +2066,35 @@
           <a:p>
             <a:pPr lvl="0"/>
             <a:r>
-              <a:rPr lang="fr-FR" smtClean="0"/>
+              <a:rPr lang="fr-FR"/>
               <a:t>Modifier les styles du texte du masque</a:t>
             </a:r>
           </a:p>
           <a:p>
             <a:pPr lvl="1"/>
             <a:r>
-              <a:rPr lang="fr-FR" smtClean="0"/>
+              <a:rPr lang="fr-FR"/>
               <a:t>Deuxième niveau</a:t>
             </a:r>
           </a:p>
           <a:p>
             <a:pPr lvl="2"/>
             <a:r>
-              <a:rPr lang="fr-FR" smtClean="0"/>
+              <a:rPr lang="fr-FR"/>
               <a:t>Troisième niveau</a:t>
             </a:r>
           </a:p>
           <a:p>
             <a:pPr lvl="3"/>
             <a:r>
-              <a:rPr lang="fr-FR" smtClean="0"/>
+              <a:rPr lang="fr-FR"/>
               <a:t>Quatrième niveau</a:t>
             </a:r>
           </a:p>
           <a:p>
             <a:pPr lvl="4"/>
             <a:r>
-              <a:rPr lang="fr-FR" smtClean="0"/>
+              <a:rPr lang="fr-FR"/>
               <a:t>Cinquième niveau</a:t>
             </a:r>
             <a:endParaRPr lang="en-US" dirty="0"/>
@@ -1616,7 +2118,7 @@
           <a:p>
             <a:fld id="{E540F50D-E62A-47E5-A5CF-BA54E2A2B6C1}" type="datetimeFigureOut">
               <a:rPr lang="fr-FR" smtClean="0"/>
-              <a:t>12/09/2024</a:t>
+              <a:t>24/06/2026</a:t>
             </a:fld>
             <a:endParaRPr lang="fr-FR"/>
           </a:p>
@@ -1710,7 +2212,7 @@
           <a:lstStyle/>
           <a:p>
             <a:r>
-              <a:rPr lang="fr-FR" smtClean="0"/>
+              <a:rPr lang="fr-FR"/>
               <a:t>Modifiez le style du titre</a:t>
             </a:r>
             <a:endParaRPr lang="en-US" dirty="0"/>
@@ -1734,7 +2236,7 @@
           <a:p>
             <a:fld id="{E540F50D-E62A-47E5-A5CF-BA54E2A2B6C1}" type="datetimeFigureOut">
               <a:rPr lang="fr-FR" smtClean="0"/>
-              <a:t>12/09/2024</a:t>
+              <a:t>24/06/2026</a:t>
             </a:fld>
             <a:endParaRPr lang="fr-FR"/>
           </a:p>
@@ -1829,7 +2331,7 @@
           <a:p>
             <a:fld id="{E540F50D-E62A-47E5-A5CF-BA54E2A2B6C1}" type="datetimeFigureOut">
               <a:rPr lang="fr-FR" smtClean="0"/>
-              <a:t>12/09/2024</a:t>
+              <a:t>24/06/2026</a:t>
             </a:fld>
             <a:endParaRPr lang="fr-FR"/>
           </a:p>
@@ -1932,7 +2434,7 @@
           </a:lstStyle>
           <a:p>
             <a:r>
-              <a:rPr lang="fr-FR" smtClean="0"/>
+              <a:rPr lang="fr-FR"/>
               <a:t>Modifiez le style du titre</a:t>
             </a:r>
             <a:endParaRPr lang="en-US" dirty="0"/>
@@ -1989,35 +2491,35 @@
           <a:p>
             <a:pPr lvl="0"/>
             <a:r>
-              <a:rPr lang="fr-FR" smtClean="0"/>
+              <a:rPr lang="fr-FR"/>
               <a:t>Modifier les styles du texte du masque</a:t>
             </a:r>
           </a:p>
           <a:p>
             <a:pPr lvl="1"/>
             <a:r>
-              <a:rPr lang="fr-FR" smtClean="0"/>
+              <a:rPr lang="fr-FR"/>
               <a:t>Deuxième niveau</a:t>
             </a:r>
           </a:p>
           <a:p>
             <a:pPr lvl="2"/>
             <a:r>
-              <a:rPr lang="fr-FR" smtClean="0"/>
+              <a:rPr lang="fr-FR"/>
               <a:t>Troisième niveau</a:t>
             </a:r>
           </a:p>
           <a:p>
             <a:pPr lvl="3"/>
             <a:r>
-              <a:rPr lang="fr-FR" smtClean="0"/>
+              <a:rPr lang="fr-FR"/>
               <a:t>Quatrième niveau</a:t>
             </a:r>
           </a:p>
           <a:p>
             <a:pPr lvl="4"/>
             <a:r>
-              <a:rPr lang="fr-FR" smtClean="0"/>
+              <a:rPr lang="fr-FR"/>
               <a:t>Cinquième niveau</a:t>
             </a:r>
             <a:endParaRPr lang="en-US" dirty="0"/>
@@ -2083,7 +2585,7 @@
           <a:p>
             <a:pPr lvl="0"/>
             <a:r>
-              <a:rPr lang="fr-FR" smtClean="0"/>
+              <a:rPr lang="fr-FR"/>
               <a:t>Modifier les styles du texte du masque</a:t>
             </a:r>
           </a:p>
@@ -2106,7 +2608,7 @@
           <a:p>
             <a:fld id="{E540F50D-E62A-47E5-A5CF-BA54E2A2B6C1}" type="datetimeFigureOut">
               <a:rPr lang="fr-FR" smtClean="0"/>
-              <a:t>12/09/2024</a:t>
+              <a:t>24/06/2026</a:t>
             </a:fld>
             <a:endParaRPr lang="fr-FR"/>
           </a:p>
@@ -2209,7 +2711,7 @@
           </a:lstStyle>
           <a:p>
             <a:r>
-              <a:rPr lang="fr-FR" smtClean="0"/>
+              <a:rPr lang="fr-FR"/>
               <a:t>Modifiez le style du titre</a:t>
             </a:r>
             <a:endParaRPr lang="en-US" dirty="0"/>
@@ -2274,7 +2776,7 @@
           </a:lstStyle>
           <a:p>
             <a:r>
-              <a:rPr lang="fr-FR" smtClean="0"/>
+              <a:rPr lang="fr-FR"/>
               <a:t>Cliquez sur l'icône pour ajouter une image</a:t>
             </a:r>
             <a:endParaRPr lang="en-US" dirty="0"/>
@@ -2340,7 +2842,7 @@
           <a:p>
             <a:pPr lvl="0"/>
             <a:r>
-              <a:rPr lang="fr-FR" smtClean="0"/>
+              <a:rPr lang="fr-FR"/>
               <a:t>Modifier les styles du texte du masque</a:t>
             </a:r>
           </a:p>
@@ -2363,7 +2865,7 @@
           <a:p>
             <a:fld id="{E540F50D-E62A-47E5-A5CF-BA54E2A2B6C1}" type="datetimeFigureOut">
               <a:rPr lang="fr-FR" smtClean="0"/>
-              <a:t>12/09/2024</a:t>
+              <a:t>24/06/2026</a:t>
             </a:fld>
             <a:endParaRPr lang="fr-FR"/>
           </a:p>
@@ -2472,7 +2974,7 @@
           <a:lstStyle/>
           <a:p>
             <a:r>
-              <a:rPr lang="fr-FR" smtClean="0"/>
+              <a:rPr lang="fr-FR"/>
               <a:t>Modifiez le style du titre</a:t>
             </a:r>
             <a:endParaRPr lang="en-US" dirty="0"/>
@@ -2506,35 +3008,35 @@
           <a:p>
             <a:pPr lvl="0"/>
             <a:r>
-              <a:rPr lang="fr-FR" smtClean="0"/>
+              <a:rPr lang="fr-FR"/>
               <a:t>Modifier les styles du texte du masque</a:t>
             </a:r>
           </a:p>
           <a:p>
             <a:pPr lvl="1"/>
             <a:r>
-              <a:rPr lang="fr-FR" smtClean="0"/>
+              <a:rPr lang="fr-FR"/>
               <a:t>Deuxième niveau</a:t>
             </a:r>
           </a:p>
           <a:p>
             <a:pPr lvl="2"/>
             <a:r>
-              <a:rPr lang="fr-FR" smtClean="0"/>
+              <a:rPr lang="fr-FR"/>
               <a:t>Troisième niveau</a:t>
             </a:r>
           </a:p>
           <a:p>
             <a:pPr lvl="3"/>
             <a:r>
-              <a:rPr lang="fr-FR" smtClean="0"/>
+              <a:rPr lang="fr-FR"/>
               <a:t>Quatrième niveau</a:t>
             </a:r>
           </a:p>
           <a:p>
             <a:pPr lvl="4"/>
             <a:r>
-              <a:rPr lang="fr-FR" smtClean="0"/>
+              <a:rPr lang="fr-FR"/>
               <a:t>Cinquième niveau</a:t>
             </a:r>
             <a:endParaRPr lang="en-US" dirty="0"/>
@@ -2576,7 +3078,7 @@
           <a:p>
             <a:fld id="{E540F50D-E62A-47E5-A5CF-BA54E2A2B6C1}" type="datetimeFigureOut">
               <a:rPr lang="fr-FR" smtClean="0"/>
-              <a:t>12/09/2024</a:t>
+              <a:t>24/06/2026</a:t>
             </a:fld>
             <a:endParaRPr lang="fr-FR"/>
           </a:p>
@@ -4881,10 +5383,9 @@
           <a:lstStyle/>
           <a:p>
             <a:r>
-              <a:rPr lang="fr-FR" sz="2800" b="1" dirty="0" smtClean="0"/>
+              <a:rPr lang="fr-FR" sz="2800" b="1" dirty="0"/>
               <a:t>R</a:t>
             </a:r>
-            <a:endParaRPr lang="fr-FR" sz="2800" b="1" dirty="0"/>
           </a:p>
         </p:txBody>
       </p:sp>
@@ -4911,10 +5412,9 @@
           <a:lstStyle/>
           <a:p>
             <a:r>
-              <a:rPr lang="fr-FR" sz="2800" b="1" dirty="0" smtClean="0"/>
+              <a:rPr lang="fr-FR" sz="2800" b="1" dirty="0"/>
               <a:t>C</a:t>
             </a:r>
-            <a:endParaRPr lang="fr-FR" sz="2800" b="1" dirty="0"/>
           </a:p>
         </p:txBody>
       </p:sp>
@@ -6540,6 +7040,4195 @@
 </p:sld>
 </file>
 
+<file path=ppt/slides/slide12.xml><?xml version="1.0" encoding="utf-8"?>
+<p:sld xmlns:a="http://schemas.openxmlformats.org/drawingml/2006/main" xmlns:r="http://schemas.openxmlformats.org/officeDocument/2006/relationships" xmlns:p="http://schemas.openxmlformats.org/presentationml/2006/main">
+  <p:cSld>
+    <p:spTree>
+      <p:nvGrpSpPr>
+        <p:cNvPr id="1" name=""/>
+        <p:cNvGrpSpPr/>
+        <p:nvPr/>
+      </p:nvGrpSpPr>
+      <p:grpSpPr>
+        <a:xfrm>
+          <a:off x="0" y="0"/>
+          <a:ext cx="0" cy="0"/>
+          <a:chOff x="0" y="0"/>
+          <a:chExt cx="0" cy="0"/>
+        </a:xfrm>
+      </p:grpSpPr>
+      <p:cxnSp>
+        <p:nvCxnSpPr>
+          <p:cNvPr id="6" name="Connecteur droit avec flèche 5">
+            <a:extLst>
+              <a:ext uri="{FF2B5EF4-FFF2-40B4-BE49-F238E27FC236}">
+                <a16:creationId xmlns:a16="http://schemas.microsoft.com/office/drawing/2014/main" id="{AFBFB69A-2DD6-BB2D-1CE9-8677977612E7}"/>
+              </a:ext>
+            </a:extLst>
+          </p:cNvPr>
+          <p:cNvCxnSpPr/>
+          <p:nvPr/>
+        </p:nvCxnSpPr>
+        <p:spPr>
+          <a:xfrm>
+            <a:off x="2179829" y="4125369"/>
+            <a:ext cx="2739514" cy="0"/>
+          </a:xfrm>
+          <a:prstGeom prst="straightConnector1">
+            <a:avLst/>
+          </a:prstGeom>
+          <a:ln w="38100">
+            <a:tailEnd type="triangle"/>
+          </a:ln>
+        </p:spPr>
+        <p:style>
+          <a:lnRef idx="1">
+            <a:schemeClr val="dk1"/>
+          </a:lnRef>
+          <a:fillRef idx="0">
+            <a:schemeClr val="dk1"/>
+          </a:fillRef>
+          <a:effectRef idx="0">
+            <a:schemeClr val="dk1"/>
+          </a:effectRef>
+          <a:fontRef idx="minor">
+            <a:schemeClr val="tx1"/>
+          </a:fontRef>
+        </p:style>
+      </p:cxnSp>
+      <p:cxnSp>
+        <p:nvCxnSpPr>
+          <p:cNvPr id="7" name="Connecteur droit avec flèche 6">
+            <a:extLst>
+              <a:ext uri="{FF2B5EF4-FFF2-40B4-BE49-F238E27FC236}">
+                <a16:creationId xmlns:a16="http://schemas.microsoft.com/office/drawing/2014/main" id="{EB233D0A-FAAA-B257-8622-4B17AC46BCF6}"/>
+              </a:ext>
+            </a:extLst>
+          </p:cNvPr>
+          <p:cNvCxnSpPr/>
+          <p:nvPr/>
+        </p:nvCxnSpPr>
+        <p:spPr>
+          <a:xfrm flipV="1">
+            <a:off x="2273110" y="3482221"/>
+            <a:ext cx="0" cy="760977"/>
+          </a:xfrm>
+          <a:prstGeom prst="straightConnector1">
+            <a:avLst/>
+          </a:prstGeom>
+          <a:ln w="38100">
+            <a:tailEnd type="triangle"/>
+          </a:ln>
+        </p:spPr>
+        <p:style>
+          <a:lnRef idx="1">
+            <a:schemeClr val="dk1"/>
+          </a:lnRef>
+          <a:fillRef idx="0">
+            <a:schemeClr val="dk1"/>
+          </a:fillRef>
+          <a:effectRef idx="0">
+            <a:schemeClr val="dk1"/>
+          </a:effectRef>
+          <a:fontRef idx="minor">
+            <a:schemeClr val="tx1"/>
+          </a:fontRef>
+        </p:style>
+      </p:cxnSp>
+      <p:sp>
+        <p:nvSpPr>
+          <p:cNvPr id="8" name="ZoneTexte 7">
+            <a:extLst>
+              <a:ext uri="{FF2B5EF4-FFF2-40B4-BE49-F238E27FC236}">
+                <a16:creationId xmlns:a16="http://schemas.microsoft.com/office/drawing/2014/main" id="{3DE4DDCA-3A3B-833A-0E01-0D77BD408BFC}"/>
+              </a:ext>
+            </a:extLst>
+          </p:cNvPr>
+          <p:cNvSpPr txBox="1"/>
+          <p:nvPr/>
+        </p:nvSpPr>
+        <p:spPr>
+          <a:xfrm>
+            <a:off x="4919343" y="3981444"/>
+            <a:ext cx="240772" cy="288669"/>
+          </a:xfrm>
+          <a:prstGeom prst="rect">
+            <a:avLst/>
+          </a:prstGeom>
+          <a:noFill/>
+        </p:spPr>
+        <p:txBody>
+          <a:bodyPr wrap="none" rtlCol="0">
+            <a:spAutoFit/>
+          </a:bodyPr>
+          <a:lstStyle/>
+          <a:p>
+            <a:r>
+              <a:rPr lang="fr-FR" sz="1276" b="1" dirty="0"/>
+              <a:t>t</a:t>
+            </a:r>
+          </a:p>
+        </p:txBody>
+      </p:sp>
+      <mc:AlternateContent xmlns:mc="http://schemas.openxmlformats.org/markup-compatibility/2006">
+        <mc:Choice xmlns:a14="http://schemas.microsoft.com/office/drawing/2010/main" Requires="a14">
+          <p:sp>
+            <p:nvSpPr>
+              <p:cNvPr id="9" name="ZoneTexte 8">
+                <a:extLst>
+                  <a:ext uri="{FF2B5EF4-FFF2-40B4-BE49-F238E27FC236}">
+                    <a16:creationId xmlns:a16="http://schemas.microsoft.com/office/drawing/2014/main" id="{8D750AEE-40B7-5E8D-65DE-1B3BBF8197F8}"/>
+                  </a:ext>
+                </a:extLst>
+              </p:cNvPr>
+              <p:cNvSpPr txBox="1"/>
+              <p:nvPr/>
+            </p:nvSpPr>
+            <p:spPr>
+              <a:xfrm>
+                <a:off x="1980909" y="3351344"/>
+                <a:ext cx="344966" cy="288669"/>
+              </a:xfrm>
+              <a:prstGeom prst="rect">
+                <a:avLst/>
+              </a:prstGeom>
+              <a:noFill/>
+            </p:spPr>
+            <p:txBody>
+              <a:bodyPr wrap="none" rtlCol="0">
+                <a:spAutoFit/>
+              </a:bodyPr>
+              <a:lstStyle/>
+              <a:p>
+                <a:pPr/>
+                <a14:m>
+                  <m:oMathPara xmlns:m="http://schemas.openxmlformats.org/officeDocument/2006/math">
+                    <m:oMathParaPr>
+                      <m:jc m:val="centerGroup"/>
+                    </m:oMathParaPr>
+                    <m:oMath xmlns:m="http://schemas.openxmlformats.org/officeDocument/2006/math">
+                      <m:r>
+                        <a:rPr lang="fr-FR" sz="1276" b="1" i="1">
+                          <a:latin typeface="Cambria Math" panose="02040503050406030204" pitchFamily="18" charset="0"/>
+                          <a:ea typeface="Cambria Math" panose="02040503050406030204" pitchFamily="18" charset="0"/>
+                        </a:rPr>
+                        <m:t>𝝋</m:t>
+                      </m:r>
+                    </m:oMath>
+                  </m:oMathPara>
+                </a14:m>
+                <a:endParaRPr lang="fr-FR" sz="1276" b="1" dirty="0"/>
+              </a:p>
+            </p:txBody>
+          </p:sp>
+        </mc:Choice>
+        <mc:Fallback>
+          <p:sp>
+            <p:nvSpPr>
+              <p:cNvPr id="9" name="ZoneTexte 8">
+                <a:extLst>
+                  <a:ext uri="{FF2B5EF4-FFF2-40B4-BE49-F238E27FC236}">
+                    <a16:creationId xmlns:a16="http://schemas.microsoft.com/office/drawing/2014/main" id="{8D750AEE-40B7-5E8D-65DE-1B3BBF8197F8}"/>
+                  </a:ext>
+                </a:extLst>
+              </p:cNvPr>
+              <p:cNvSpPr txBox="1">
+                <a:spLocks noRot="1" noChangeAspect="1" noMove="1" noResize="1" noEditPoints="1" noAdjustHandles="1" noChangeArrowheads="1" noChangeShapeType="1" noTextEdit="1"/>
+              </p:cNvSpPr>
+              <p:nvPr/>
+            </p:nvSpPr>
+            <p:spPr>
+              <a:xfrm>
+                <a:off x="1980909" y="3351344"/>
+                <a:ext cx="344966" cy="288669"/>
+              </a:xfrm>
+              <a:prstGeom prst="rect">
+                <a:avLst/>
+              </a:prstGeom>
+              <a:blipFill>
+                <a:blip r:embed="rId2"/>
+                <a:stretch>
+                  <a:fillRect b="-2128"/>
+                </a:stretch>
+              </a:blipFill>
+            </p:spPr>
+            <p:txBody>
+              <a:bodyPr/>
+              <a:lstStyle/>
+              <a:p>
+                <a:r>
+                  <a:rPr lang="fr-FR">
+                    <a:noFill/>
+                  </a:rPr>
+                  <a:t> </a:t>
+                </a:r>
+              </a:p>
+            </p:txBody>
+          </p:sp>
+        </mc:Fallback>
+      </mc:AlternateContent>
+      <p:sp>
+        <p:nvSpPr>
+          <p:cNvPr id="10" name="ZoneTexte 9">
+            <a:extLst>
+              <a:ext uri="{FF2B5EF4-FFF2-40B4-BE49-F238E27FC236}">
+                <a16:creationId xmlns:a16="http://schemas.microsoft.com/office/drawing/2014/main" id="{E163650E-D77A-6E2E-4EB3-C4DBB38335C4}"/>
+              </a:ext>
+            </a:extLst>
+          </p:cNvPr>
+          <p:cNvSpPr txBox="1"/>
+          <p:nvPr/>
+        </p:nvSpPr>
+        <p:spPr>
+          <a:xfrm>
+            <a:off x="2097552" y="4135187"/>
+            <a:ext cx="268022" cy="288669"/>
+          </a:xfrm>
+          <a:prstGeom prst="rect">
+            <a:avLst/>
+          </a:prstGeom>
+          <a:noFill/>
+        </p:spPr>
+        <p:txBody>
+          <a:bodyPr wrap="none" rtlCol="0">
+            <a:spAutoFit/>
+          </a:bodyPr>
+          <a:lstStyle/>
+          <a:p>
+            <a:r>
+              <a:rPr lang="fr-FR" sz="1276" b="1" dirty="0"/>
+              <a:t>0</a:t>
+            </a:r>
+          </a:p>
+        </p:txBody>
+      </p:sp>
+      <mc:AlternateContent xmlns:mc="http://schemas.openxmlformats.org/markup-compatibility/2006">
+        <mc:Choice xmlns:a14="http://schemas.microsoft.com/office/drawing/2010/main" Requires="a14">
+          <p:sp>
+            <p:nvSpPr>
+              <p:cNvPr id="11" name="ZoneTexte 10">
+                <a:extLst>
+                  <a:ext uri="{FF2B5EF4-FFF2-40B4-BE49-F238E27FC236}">
+                    <a16:creationId xmlns:a16="http://schemas.microsoft.com/office/drawing/2014/main" id="{F934D5DD-3722-AF0F-6795-FC1E6CE064EA}"/>
+                  </a:ext>
+                </a:extLst>
+              </p:cNvPr>
+              <p:cNvSpPr txBox="1"/>
+              <p:nvPr/>
+            </p:nvSpPr>
+            <p:spPr>
+              <a:xfrm>
+                <a:off x="2799898" y="4115550"/>
+                <a:ext cx="434734" cy="288669"/>
+              </a:xfrm>
+              <a:prstGeom prst="rect">
+                <a:avLst/>
+              </a:prstGeom>
+              <a:noFill/>
+            </p:spPr>
+            <p:txBody>
+              <a:bodyPr wrap="none" rtlCol="0">
+                <a:spAutoFit/>
+              </a:bodyPr>
+              <a:lstStyle/>
+              <a:p>
+                <a:pPr/>
+                <a14:m>
+                  <m:oMathPara xmlns:m="http://schemas.openxmlformats.org/officeDocument/2006/math">
+                    <m:oMathParaPr>
+                      <m:jc m:val="centerGroup"/>
+                    </m:oMathParaPr>
+                    <m:oMath xmlns:m="http://schemas.openxmlformats.org/officeDocument/2006/math">
+                      <m:r>
+                        <a:rPr lang="fr-FR" sz="1276" b="1" i="1">
+                          <a:latin typeface="Cambria Math" panose="02040503050406030204" pitchFamily="18" charset="0"/>
+                        </a:rPr>
+                        <m:t>𝜶</m:t>
+                      </m:r>
+                      <m:r>
+                        <a:rPr lang="fr-FR" sz="1276" b="1" i="1">
+                          <a:latin typeface="Cambria Math" panose="02040503050406030204" pitchFamily="18" charset="0"/>
+                        </a:rPr>
+                        <m:t>𝑻</m:t>
+                      </m:r>
+                    </m:oMath>
+                  </m:oMathPara>
+                </a14:m>
+                <a:endParaRPr lang="fr-FR" sz="1276" b="1" dirty="0"/>
+              </a:p>
+            </p:txBody>
+          </p:sp>
+        </mc:Choice>
+        <mc:Fallback>
+          <p:sp>
+            <p:nvSpPr>
+              <p:cNvPr id="11" name="ZoneTexte 10">
+                <a:extLst>
+                  <a:ext uri="{FF2B5EF4-FFF2-40B4-BE49-F238E27FC236}">
+                    <a16:creationId xmlns:a16="http://schemas.microsoft.com/office/drawing/2014/main" id="{F934D5DD-3722-AF0F-6795-FC1E6CE064EA}"/>
+                  </a:ext>
+                </a:extLst>
+              </p:cNvPr>
+              <p:cNvSpPr txBox="1">
+                <a:spLocks noRot="1" noChangeAspect="1" noMove="1" noResize="1" noEditPoints="1" noAdjustHandles="1" noChangeArrowheads="1" noChangeShapeType="1" noTextEdit="1"/>
+              </p:cNvSpPr>
+              <p:nvPr/>
+            </p:nvSpPr>
+            <p:spPr>
+              <a:xfrm>
+                <a:off x="2799898" y="4115550"/>
+                <a:ext cx="434734" cy="288669"/>
+              </a:xfrm>
+              <a:prstGeom prst="rect">
+                <a:avLst/>
+              </a:prstGeom>
+              <a:blipFill>
+                <a:blip r:embed="rId3"/>
+                <a:stretch>
+                  <a:fillRect/>
+                </a:stretch>
+              </a:blipFill>
+            </p:spPr>
+            <p:txBody>
+              <a:bodyPr/>
+              <a:lstStyle/>
+              <a:p>
+                <a:r>
+                  <a:rPr lang="fr-FR">
+                    <a:noFill/>
+                  </a:rPr>
+                  <a:t> </a:t>
+                </a:r>
+              </a:p>
+            </p:txBody>
+          </p:sp>
+        </mc:Fallback>
+      </mc:AlternateContent>
+      <p:sp>
+        <p:nvSpPr>
+          <p:cNvPr id="12" name="ZoneTexte 11">
+            <a:extLst>
+              <a:ext uri="{FF2B5EF4-FFF2-40B4-BE49-F238E27FC236}">
+                <a16:creationId xmlns:a16="http://schemas.microsoft.com/office/drawing/2014/main" id="{5E178576-21E5-A65D-A86D-7E548E2322B8}"/>
+              </a:ext>
+            </a:extLst>
+          </p:cNvPr>
+          <p:cNvSpPr txBox="1"/>
+          <p:nvPr/>
+        </p:nvSpPr>
+        <p:spPr>
+          <a:xfrm>
+            <a:off x="4357413" y="4125368"/>
+            <a:ext cx="266420" cy="288669"/>
+          </a:xfrm>
+          <a:prstGeom prst="rect">
+            <a:avLst/>
+          </a:prstGeom>
+          <a:noFill/>
+        </p:spPr>
+        <p:txBody>
+          <a:bodyPr wrap="none" rtlCol="0">
+            <a:spAutoFit/>
+          </a:bodyPr>
+          <a:lstStyle/>
+          <a:p>
+            <a:r>
+              <a:rPr lang="fr-FR" sz="1276" b="1" dirty="0"/>
+              <a:t>T</a:t>
+            </a:r>
+          </a:p>
+        </p:txBody>
+      </p:sp>
+      <p:cxnSp>
+        <p:nvCxnSpPr>
+          <p:cNvPr id="13" name="Connecteur droit avec flèche 12">
+            <a:extLst>
+              <a:ext uri="{FF2B5EF4-FFF2-40B4-BE49-F238E27FC236}">
+                <a16:creationId xmlns:a16="http://schemas.microsoft.com/office/drawing/2014/main" id="{028BC8D0-1543-6372-3CEF-CF4DFA99DB17}"/>
+              </a:ext>
+            </a:extLst>
+          </p:cNvPr>
+          <p:cNvCxnSpPr/>
+          <p:nvPr/>
+        </p:nvCxnSpPr>
+        <p:spPr>
+          <a:xfrm>
+            <a:off x="2179829" y="5072778"/>
+            <a:ext cx="2739514" cy="0"/>
+          </a:xfrm>
+          <a:prstGeom prst="straightConnector1">
+            <a:avLst/>
+          </a:prstGeom>
+          <a:ln w="38100">
+            <a:tailEnd type="triangle"/>
+          </a:ln>
+        </p:spPr>
+        <p:style>
+          <a:lnRef idx="1">
+            <a:schemeClr val="dk1"/>
+          </a:lnRef>
+          <a:fillRef idx="0">
+            <a:schemeClr val="dk1"/>
+          </a:fillRef>
+          <a:effectRef idx="0">
+            <a:schemeClr val="dk1"/>
+          </a:effectRef>
+          <a:fontRef idx="minor">
+            <a:schemeClr val="tx1"/>
+          </a:fontRef>
+        </p:style>
+      </p:cxnSp>
+      <p:cxnSp>
+        <p:nvCxnSpPr>
+          <p:cNvPr id="14" name="Connecteur droit avec flèche 13">
+            <a:extLst>
+              <a:ext uri="{FF2B5EF4-FFF2-40B4-BE49-F238E27FC236}">
+                <a16:creationId xmlns:a16="http://schemas.microsoft.com/office/drawing/2014/main" id="{A8602D9B-E099-33D6-FE3A-B7EBAA3519BE}"/>
+              </a:ext>
+            </a:extLst>
+          </p:cNvPr>
+          <p:cNvCxnSpPr/>
+          <p:nvPr/>
+        </p:nvCxnSpPr>
+        <p:spPr>
+          <a:xfrm flipV="1">
+            <a:off x="2273110" y="4429631"/>
+            <a:ext cx="0" cy="1266319"/>
+          </a:xfrm>
+          <a:prstGeom prst="straightConnector1">
+            <a:avLst/>
+          </a:prstGeom>
+          <a:ln w="38100">
+            <a:tailEnd type="triangle"/>
+          </a:ln>
+        </p:spPr>
+        <p:style>
+          <a:lnRef idx="1">
+            <a:schemeClr val="dk1"/>
+          </a:lnRef>
+          <a:fillRef idx="0">
+            <a:schemeClr val="dk1"/>
+          </a:fillRef>
+          <a:effectRef idx="0">
+            <a:schemeClr val="dk1"/>
+          </a:effectRef>
+          <a:fontRef idx="minor">
+            <a:schemeClr val="tx1"/>
+          </a:fontRef>
+        </p:style>
+      </p:cxnSp>
+      <p:sp>
+        <p:nvSpPr>
+          <p:cNvPr id="15" name="ZoneTexte 14">
+            <a:extLst>
+              <a:ext uri="{FF2B5EF4-FFF2-40B4-BE49-F238E27FC236}">
+                <a16:creationId xmlns:a16="http://schemas.microsoft.com/office/drawing/2014/main" id="{C9D5286F-91D3-0CD6-61A2-B237502E6DEA}"/>
+              </a:ext>
+            </a:extLst>
+          </p:cNvPr>
+          <p:cNvSpPr txBox="1"/>
+          <p:nvPr/>
+        </p:nvSpPr>
+        <p:spPr>
+          <a:xfrm>
+            <a:off x="4919343" y="4928853"/>
+            <a:ext cx="240772" cy="288669"/>
+          </a:xfrm>
+          <a:prstGeom prst="rect">
+            <a:avLst/>
+          </a:prstGeom>
+          <a:noFill/>
+        </p:spPr>
+        <p:txBody>
+          <a:bodyPr wrap="none" rtlCol="0">
+            <a:spAutoFit/>
+          </a:bodyPr>
+          <a:lstStyle/>
+          <a:p>
+            <a:r>
+              <a:rPr lang="fr-FR" sz="1276" b="1" dirty="0"/>
+              <a:t>t</a:t>
+            </a:r>
+          </a:p>
+        </p:txBody>
+      </p:sp>
+      <p:sp>
+        <p:nvSpPr>
+          <p:cNvPr id="16" name="ZoneTexte 15">
+            <a:extLst>
+              <a:ext uri="{FF2B5EF4-FFF2-40B4-BE49-F238E27FC236}">
+                <a16:creationId xmlns:a16="http://schemas.microsoft.com/office/drawing/2014/main" id="{F9F7E190-10B8-AC51-56D5-15515F5B67D1}"/>
+              </a:ext>
+            </a:extLst>
+          </p:cNvPr>
+          <p:cNvSpPr txBox="1"/>
+          <p:nvPr/>
+        </p:nvSpPr>
+        <p:spPr>
+          <a:xfrm>
+            <a:off x="1867453" y="4327500"/>
+            <a:ext cx="316112" cy="288669"/>
+          </a:xfrm>
+          <a:prstGeom prst="rect">
+            <a:avLst/>
+          </a:prstGeom>
+          <a:noFill/>
+        </p:spPr>
+        <p:txBody>
+          <a:bodyPr wrap="none" rtlCol="0">
+            <a:spAutoFit/>
+          </a:bodyPr>
+          <a:lstStyle/>
+          <a:p>
+            <a:pPr algn="ctr"/>
+            <a:r>
+              <a:rPr lang="fr-FR" sz="1276" b="1" dirty="0"/>
+              <a:t>v</a:t>
+            </a:r>
+            <a:r>
+              <a:rPr lang="fr-FR" sz="1276" b="1" baseline="-25000" dirty="0"/>
+              <a:t>1</a:t>
+            </a:r>
+            <a:endParaRPr lang="fr-FR" sz="1276" b="1" dirty="0">
+              <a:solidFill>
+                <a:schemeClr val="accent1"/>
+              </a:solidFill>
+            </a:endParaRPr>
+          </a:p>
+        </p:txBody>
+      </p:sp>
+      <p:sp>
+        <p:nvSpPr>
+          <p:cNvPr id="17" name="ZoneTexte 16">
+            <a:extLst>
+              <a:ext uri="{FF2B5EF4-FFF2-40B4-BE49-F238E27FC236}">
+                <a16:creationId xmlns:a16="http://schemas.microsoft.com/office/drawing/2014/main" id="{782900A3-3CD1-B70D-2172-B859C1B2C412}"/>
+              </a:ext>
+            </a:extLst>
+          </p:cNvPr>
+          <p:cNvSpPr txBox="1"/>
+          <p:nvPr/>
+        </p:nvSpPr>
+        <p:spPr>
+          <a:xfrm>
+            <a:off x="2068977" y="5063546"/>
+            <a:ext cx="268022" cy="288669"/>
+          </a:xfrm>
+          <a:prstGeom prst="rect">
+            <a:avLst/>
+          </a:prstGeom>
+          <a:noFill/>
+        </p:spPr>
+        <p:txBody>
+          <a:bodyPr wrap="none" rtlCol="0">
+            <a:spAutoFit/>
+          </a:bodyPr>
+          <a:lstStyle/>
+          <a:p>
+            <a:r>
+              <a:rPr lang="fr-FR" sz="1276" b="1" dirty="0"/>
+              <a:t>0</a:t>
+            </a:r>
+          </a:p>
+        </p:txBody>
+      </p:sp>
+      <mc:AlternateContent xmlns:mc="http://schemas.openxmlformats.org/markup-compatibility/2006">
+        <mc:Choice xmlns:a14="http://schemas.microsoft.com/office/drawing/2010/main" Requires="a14">
+          <p:sp>
+            <p:nvSpPr>
+              <p:cNvPr id="18" name="ZoneTexte 17">
+                <a:extLst>
+                  <a:ext uri="{FF2B5EF4-FFF2-40B4-BE49-F238E27FC236}">
+                    <a16:creationId xmlns:a16="http://schemas.microsoft.com/office/drawing/2014/main" id="{A8062312-7865-7E86-E3CD-50AAB222E207}"/>
+                  </a:ext>
+                </a:extLst>
+              </p:cNvPr>
+              <p:cNvSpPr txBox="1"/>
+              <p:nvPr/>
+            </p:nvSpPr>
+            <p:spPr>
+              <a:xfrm>
+                <a:off x="2799898" y="5062958"/>
+                <a:ext cx="434734" cy="288669"/>
+              </a:xfrm>
+              <a:prstGeom prst="rect">
+                <a:avLst/>
+              </a:prstGeom>
+              <a:noFill/>
+            </p:spPr>
+            <p:txBody>
+              <a:bodyPr wrap="none" rtlCol="0">
+                <a:spAutoFit/>
+              </a:bodyPr>
+              <a:lstStyle/>
+              <a:p>
+                <a:pPr/>
+                <a14:m>
+                  <m:oMathPara xmlns:m="http://schemas.openxmlformats.org/officeDocument/2006/math">
+                    <m:oMathParaPr>
+                      <m:jc m:val="centerGroup"/>
+                    </m:oMathParaPr>
+                    <m:oMath xmlns:m="http://schemas.openxmlformats.org/officeDocument/2006/math">
+                      <m:r>
+                        <a:rPr lang="fr-FR" sz="1276" b="1" i="1">
+                          <a:latin typeface="Cambria Math" panose="02040503050406030204" pitchFamily="18" charset="0"/>
+                        </a:rPr>
+                        <m:t>𝜶</m:t>
+                      </m:r>
+                      <m:r>
+                        <a:rPr lang="fr-FR" sz="1276" b="1" i="1">
+                          <a:latin typeface="Cambria Math" panose="02040503050406030204" pitchFamily="18" charset="0"/>
+                        </a:rPr>
+                        <m:t>𝑻</m:t>
+                      </m:r>
+                    </m:oMath>
+                  </m:oMathPara>
+                </a14:m>
+                <a:endParaRPr lang="fr-FR" sz="1276" b="1" dirty="0"/>
+              </a:p>
+            </p:txBody>
+          </p:sp>
+        </mc:Choice>
+        <mc:Fallback>
+          <p:sp>
+            <p:nvSpPr>
+              <p:cNvPr id="18" name="ZoneTexte 17">
+                <a:extLst>
+                  <a:ext uri="{FF2B5EF4-FFF2-40B4-BE49-F238E27FC236}">
+                    <a16:creationId xmlns:a16="http://schemas.microsoft.com/office/drawing/2014/main" id="{A8062312-7865-7E86-E3CD-50AAB222E207}"/>
+                  </a:ext>
+                </a:extLst>
+              </p:cNvPr>
+              <p:cNvSpPr txBox="1">
+                <a:spLocks noRot="1" noChangeAspect="1" noMove="1" noResize="1" noEditPoints="1" noAdjustHandles="1" noChangeArrowheads="1" noChangeShapeType="1" noTextEdit="1"/>
+              </p:cNvSpPr>
+              <p:nvPr/>
+            </p:nvSpPr>
+            <p:spPr>
+              <a:xfrm>
+                <a:off x="2799898" y="5062958"/>
+                <a:ext cx="434734" cy="288669"/>
+              </a:xfrm>
+              <a:prstGeom prst="rect">
+                <a:avLst/>
+              </a:prstGeom>
+              <a:blipFill>
+                <a:blip r:embed="rId4"/>
+                <a:stretch>
+                  <a:fillRect/>
+                </a:stretch>
+              </a:blipFill>
+            </p:spPr>
+            <p:txBody>
+              <a:bodyPr/>
+              <a:lstStyle/>
+              <a:p>
+                <a:r>
+                  <a:rPr lang="fr-FR">
+                    <a:noFill/>
+                  </a:rPr>
+                  <a:t> </a:t>
+                </a:r>
+              </a:p>
+            </p:txBody>
+          </p:sp>
+        </mc:Fallback>
+      </mc:AlternateContent>
+      <p:sp>
+        <p:nvSpPr>
+          <p:cNvPr id="19" name="ZoneTexte 18">
+            <a:extLst>
+              <a:ext uri="{FF2B5EF4-FFF2-40B4-BE49-F238E27FC236}">
+                <a16:creationId xmlns:a16="http://schemas.microsoft.com/office/drawing/2014/main" id="{9C09E2F4-0280-EC05-A71D-1331A20AE469}"/>
+              </a:ext>
+            </a:extLst>
+          </p:cNvPr>
+          <p:cNvSpPr txBox="1"/>
+          <p:nvPr/>
+        </p:nvSpPr>
+        <p:spPr>
+          <a:xfrm>
+            <a:off x="4357413" y="5072778"/>
+            <a:ext cx="266420" cy="288669"/>
+          </a:xfrm>
+          <a:prstGeom prst="rect">
+            <a:avLst/>
+          </a:prstGeom>
+          <a:noFill/>
+        </p:spPr>
+        <p:txBody>
+          <a:bodyPr wrap="none" rtlCol="0">
+            <a:spAutoFit/>
+          </a:bodyPr>
+          <a:lstStyle/>
+          <a:p>
+            <a:r>
+              <a:rPr lang="fr-FR" sz="1276" b="1" dirty="0"/>
+              <a:t>T</a:t>
+            </a:r>
+          </a:p>
+        </p:txBody>
+      </p:sp>
+      <p:cxnSp>
+        <p:nvCxnSpPr>
+          <p:cNvPr id="20" name="Connecteur droit avec flèche 19">
+            <a:extLst>
+              <a:ext uri="{FF2B5EF4-FFF2-40B4-BE49-F238E27FC236}">
+                <a16:creationId xmlns:a16="http://schemas.microsoft.com/office/drawing/2014/main" id="{D2A97DA0-38A4-E52A-A303-D07E4CC32CBD}"/>
+              </a:ext>
+            </a:extLst>
+          </p:cNvPr>
+          <p:cNvCxnSpPr/>
+          <p:nvPr/>
+        </p:nvCxnSpPr>
+        <p:spPr>
+          <a:xfrm>
+            <a:off x="2179829" y="6509735"/>
+            <a:ext cx="2739514" cy="0"/>
+          </a:xfrm>
+          <a:prstGeom prst="straightConnector1">
+            <a:avLst/>
+          </a:prstGeom>
+          <a:ln w="38100">
+            <a:tailEnd type="triangle"/>
+          </a:ln>
+        </p:spPr>
+        <p:style>
+          <a:lnRef idx="1">
+            <a:schemeClr val="dk1"/>
+          </a:lnRef>
+          <a:fillRef idx="0">
+            <a:schemeClr val="dk1"/>
+          </a:fillRef>
+          <a:effectRef idx="0">
+            <a:schemeClr val="dk1"/>
+          </a:effectRef>
+          <a:fontRef idx="minor">
+            <a:schemeClr val="tx1"/>
+          </a:fontRef>
+        </p:style>
+      </p:cxnSp>
+      <p:cxnSp>
+        <p:nvCxnSpPr>
+          <p:cNvPr id="21" name="Connecteur droit avec flèche 20">
+            <a:extLst>
+              <a:ext uri="{FF2B5EF4-FFF2-40B4-BE49-F238E27FC236}">
+                <a16:creationId xmlns:a16="http://schemas.microsoft.com/office/drawing/2014/main" id="{AEF8F215-CB92-06C4-5359-47ADFEB4B5B4}"/>
+              </a:ext>
+            </a:extLst>
+          </p:cNvPr>
+          <p:cNvCxnSpPr/>
+          <p:nvPr/>
+        </p:nvCxnSpPr>
+        <p:spPr>
+          <a:xfrm flipV="1">
+            <a:off x="2273110" y="5866588"/>
+            <a:ext cx="0" cy="1296212"/>
+          </a:xfrm>
+          <a:prstGeom prst="straightConnector1">
+            <a:avLst/>
+          </a:prstGeom>
+          <a:ln w="38100">
+            <a:tailEnd type="triangle"/>
+          </a:ln>
+        </p:spPr>
+        <p:style>
+          <a:lnRef idx="1">
+            <a:schemeClr val="dk1"/>
+          </a:lnRef>
+          <a:fillRef idx="0">
+            <a:schemeClr val="dk1"/>
+          </a:fillRef>
+          <a:effectRef idx="0">
+            <a:schemeClr val="dk1"/>
+          </a:effectRef>
+          <a:fontRef idx="minor">
+            <a:schemeClr val="tx1"/>
+          </a:fontRef>
+        </p:style>
+      </p:cxnSp>
+      <p:sp>
+        <p:nvSpPr>
+          <p:cNvPr id="22" name="ZoneTexte 21">
+            <a:extLst>
+              <a:ext uri="{FF2B5EF4-FFF2-40B4-BE49-F238E27FC236}">
+                <a16:creationId xmlns:a16="http://schemas.microsoft.com/office/drawing/2014/main" id="{2755656C-45A2-75BC-905B-32A362F60905}"/>
+              </a:ext>
+            </a:extLst>
+          </p:cNvPr>
+          <p:cNvSpPr txBox="1"/>
+          <p:nvPr/>
+        </p:nvSpPr>
+        <p:spPr>
+          <a:xfrm>
+            <a:off x="4919343" y="6365811"/>
+            <a:ext cx="240772" cy="288669"/>
+          </a:xfrm>
+          <a:prstGeom prst="rect">
+            <a:avLst/>
+          </a:prstGeom>
+          <a:noFill/>
+        </p:spPr>
+        <p:txBody>
+          <a:bodyPr wrap="none" rtlCol="0">
+            <a:spAutoFit/>
+          </a:bodyPr>
+          <a:lstStyle/>
+          <a:p>
+            <a:r>
+              <a:rPr lang="fr-FR" sz="1276" b="1" dirty="0"/>
+              <a:t>t</a:t>
+            </a:r>
+          </a:p>
+        </p:txBody>
+      </p:sp>
+      <p:sp>
+        <p:nvSpPr>
+          <p:cNvPr id="23" name="ZoneTexte 22">
+            <a:extLst>
+              <a:ext uri="{FF2B5EF4-FFF2-40B4-BE49-F238E27FC236}">
+                <a16:creationId xmlns:a16="http://schemas.microsoft.com/office/drawing/2014/main" id="{7C6DABDF-A376-974C-ED46-E4D5A4A0E850}"/>
+              </a:ext>
+            </a:extLst>
+          </p:cNvPr>
+          <p:cNvSpPr txBox="1"/>
+          <p:nvPr/>
+        </p:nvSpPr>
+        <p:spPr>
+          <a:xfrm>
+            <a:off x="1783572" y="5754223"/>
+            <a:ext cx="474810" cy="288669"/>
+          </a:xfrm>
+          <a:prstGeom prst="rect">
+            <a:avLst/>
+          </a:prstGeom>
+          <a:noFill/>
+        </p:spPr>
+        <p:txBody>
+          <a:bodyPr wrap="none" rtlCol="0">
+            <a:spAutoFit/>
+          </a:bodyPr>
+          <a:lstStyle/>
+          <a:p>
+            <a:r>
+              <a:rPr lang="fr-FR" sz="1276" b="1" dirty="0"/>
+              <a:t>v</a:t>
+            </a:r>
+            <a:r>
+              <a:rPr lang="fr-FR" sz="1276" b="1" baseline="-25000" dirty="0"/>
+              <a:t>L</a:t>
+            </a:r>
+            <a:r>
+              <a:rPr lang="fr-FR" sz="1276" b="1" dirty="0"/>
+              <a:t>, </a:t>
+            </a:r>
+            <a:r>
+              <a:rPr lang="fr-FR" sz="1276" b="1" dirty="0">
+                <a:solidFill>
+                  <a:srgbClr val="FF0000"/>
+                </a:solidFill>
+              </a:rPr>
+              <a:t>i</a:t>
+            </a:r>
+            <a:r>
+              <a:rPr lang="fr-FR" sz="1276" b="1" baseline="-25000" dirty="0">
+                <a:solidFill>
+                  <a:srgbClr val="FF0000"/>
+                </a:solidFill>
+              </a:rPr>
+              <a:t>L</a:t>
+            </a:r>
+            <a:endParaRPr lang="fr-FR" sz="1276" b="1" dirty="0">
+              <a:solidFill>
+                <a:srgbClr val="FF0000"/>
+              </a:solidFill>
+            </a:endParaRPr>
+          </a:p>
+        </p:txBody>
+      </p:sp>
+      <p:sp>
+        <p:nvSpPr>
+          <p:cNvPr id="24" name="ZoneTexte 23">
+            <a:extLst>
+              <a:ext uri="{FF2B5EF4-FFF2-40B4-BE49-F238E27FC236}">
+                <a16:creationId xmlns:a16="http://schemas.microsoft.com/office/drawing/2014/main" id="{1FD5C4B6-27C9-F232-A018-CA5A892194C2}"/>
+              </a:ext>
+            </a:extLst>
+          </p:cNvPr>
+          <p:cNvSpPr txBox="1"/>
+          <p:nvPr/>
+        </p:nvSpPr>
+        <p:spPr>
+          <a:xfrm>
+            <a:off x="2059452" y="6471928"/>
+            <a:ext cx="268022" cy="288669"/>
+          </a:xfrm>
+          <a:prstGeom prst="rect">
+            <a:avLst/>
+          </a:prstGeom>
+          <a:noFill/>
+        </p:spPr>
+        <p:txBody>
+          <a:bodyPr wrap="none" rtlCol="0">
+            <a:spAutoFit/>
+          </a:bodyPr>
+          <a:lstStyle/>
+          <a:p>
+            <a:r>
+              <a:rPr lang="fr-FR" sz="1276" b="1" dirty="0"/>
+              <a:t>0</a:t>
+            </a:r>
+          </a:p>
+        </p:txBody>
+      </p:sp>
+      <mc:AlternateContent xmlns:mc="http://schemas.openxmlformats.org/markup-compatibility/2006">
+        <mc:Choice xmlns:a14="http://schemas.microsoft.com/office/drawing/2010/main" Requires="a14">
+          <p:sp>
+            <p:nvSpPr>
+              <p:cNvPr id="25" name="ZoneTexte 24">
+                <a:extLst>
+                  <a:ext uri="{FF2B5EF4-FFF2-40B4-BE49-F238E27FC236}">
+                    <a16:creationId xmlns:a16="http://schemas.microsoft.com/office/drawing/2014/main" id="{F9EC05DC-3423-873E-0480-3B2AC868EC2F}"/>
+                  </a:ext>
+                </a:extLst>
+              </p:cNvPr>
+              <p:cNvSpPr txBox="1"/>
+              <p:nvPr/>
+            </p:nvSpPr>
+            <p:spPr>
+              <a:xfrm>
+                <a:off x="2799898" y="6499916"/>
+                <a:ext cx="434734" cy="288669"/>
+              </a:xfrm>
+              <a:prstGeom prst="rect">
+                <a:avLst/>
+              </a:prstGeom>
+              <a:noFill/>
+            </p:spPr>
+            <p:txBody>
+              <a:bodyPr wrap="none" rtlCol="0">
+                <a:spAutoFit/>
+              </a:bodyPr>
+              <a:lstStyle/>
+              <a:p>
+                <a:pPr/>
+                <a14:m>
+                  <m:oMathPara xmlns:m="http://schemas.openxmlformats.org/officeDocument/2006/math">
+                    <m:oMathParaPr>
+                      <m:jc m:val="centerGroup"/>
+                    </m:oMathParaPr>
+                    <m:oMath xmlns:m="http://schemas.openxmlformats.org/officeDocument/2006/math">
+                      <m:r>
+                        <a:rPr lang="fr-FR" sz="1276" b="1" i="1">
+                          <a:latin typeface="Cambria Math" panose="02040503050406030204" pitchFamily="18" charset="0"/>
+                        </a:rPr>
+                        <m:t>𝜶</m:t>
+                      </m:r>
+                      <m:r>
+                        <a:rPr lang="fr-FR" sz="1276" b="1" i="1">
+                          <a:latin typeface="Cambria Math" panose="02040503050406030204" pitchFamily="18" charset="0"/>
+                        </a:rPr>
+                        <m:t>𝑻</m:t>
+                      </m:r>
+                    </m:oMath>
+                  </m:oMathPara>
+                </a14:m>
+                <a:endParaRPr lang="fr-FR" sz="1276" b="1" dirty="0"/>
+              </a:p>
+            </p:txBody>
+          </p:sp>
+        </mc:Choice>
+        <mc:Fallback>
+          <p:sp>
+            <p:nvSpPr>
+              <p:cNvPr id="25" name="ZoneTexte 24">
+                <a:extLst>
+                  <a:ext uri="{FF2B5EF4-FFF2-40B4-BE49-F238E27FC236}">
+                    <a16:creationId xmlns:a16="http://schemas.microsoft.com/office/drawing/2014/main" id="{F9EC05DC-3423-873E-0480-3B2AC868EC2F}"/>
+                  </a:ext>
+                </a:extLst>
+              </p:cNvPr>
+              <p:cNvSpPr txBox="1">
+                <a:spLocks noRot="1" noChangeAspect="1" noMove="1" noResize="1" noEditPoints="1" noAdjustHandles="1" noChangeArrowheads="1" noChangeShapeType="1" noTextEdit="1"/>
+              </p:cNvSpPr>
+              <p:nvPr/>
+            </p:nvSpPr>
+            <p:spPr>
+              <a:xfrm>
+                <a:off x="2799898" y="6499916"/>
+                <a:ext cx="434734" cy="288669"/>
+              </a:xfrm>
+              <a:prstGeom prst="rect">
+                <a:avLst/>
+              </a:prstGeom>
+              <a:blipFill>
+                <a:blip r:embed="rId5"/>
+                <a:stretch>
+                  <a:fillRect/>
+                </a:stretch>
+              </a:blipFill>
+            </p:spPr>
+            <p:txBody>
+              <a:bodyPr/>
+              <a:lstStyle/>
+              <a:p>
+                <a:r>
+                  <a:rPr lang="fr-FR">
+                    <a:noFill/>
+                  </a:rPr>
+                  <a:t> </a:t>
+                </a:r>
+              </a:p>
+            </p:txBody>
+          </p:sp>
+        </mc:Fallback>
+      </mc:AlternateContent>
+      <p:sp>
+        <p:nvSpPr>
+          <p:cNvPr id="26" name="ZoneTexte 25">
+            <a:extLst>
+              <a:ext uri="{FF2B5EF4-FFF2-40B4-BE49-F238E27FC236}">
+                <a16:creationId xmlns:a16="http://schemas.microsoft.com/office/drawing/2014/main" id="{9081D3B4-7149-3DBC-A0AC-1B11390E87B3}"/>
+              </a:ext>
+            </a:extLst>
+          </p:cNvPr>
+          <p:cNvSpPr txBox="1"/>
+          <p:nvPr/>
+        </p:nvSpPr>
+        <p:spPr>
+          <a:xfrm>
+            <a:off x="4357413" y="6509735"/>
+            <a:ext cx="266420" cy="288669"/>
+          </a:xfrm>
+          <a:prstGeom prst="rect">
+            <a:avLst/>
+          </a:prstGeom>
+          <a:noFill/>
+        </p:spPr>
+        <p:txBody>
+          <a:bodyPr wrap="none" rtlCol="0">
+            <a:spAutoFit/>
+          </a:bodyPr>
+          <a:lstStyle/>
+          <a:p>
+            <a:r>
+              <a:rPr lang="fr-FR" sz="1276" b="1" dirty="0"/>
+              <a:t>T</a:t>
+            </a:r>
+          </a:p>
+        </p:txBody>
+      </p:sp>
+      <p:cxnSp>
+        <p:nvCxnSpPr>
+          <p:cNvPr id="27" name="Connecteur droit avec flèche 26">
+            <a:extLst>
+              <a:ext uri="{FF2B5EF4-FFF2-40B4-BE49-F238E27FC236}">
+                <a16:creationId xmlns:a16="http://schemas.microsoft.com/office/drawing/2014/main" id="{3E3C649E-E02B-B4A6-7E2F-999C4F3468F5}"/>
+              </a:ext>
+            </a:extLst>
+          </p:cNvPr>
+          <p:cNvCxnSpPr/>
+          <p:nvPr/>
+        </p:nvCxnSpPr>
+        <p:spPr>
+          <a:xfrm>
+            <a:off x="2179829" y="7904525"/>
+            <a:ext cx="2739514" cy="0"/>
+          </a:xfrm>
+          <a:prstGeom prst="straightConnector1">
+            <a:avLst/>
+          </a:prstGeom>
+          <a:ln w="38100">
+            <a:tailEnd type="triangle"/>
+          </a:ln>
+        </p:spPr>
+        <p:style>
+          <a:lnRef idx="1">
+            <a:schemeClr val="dk1"/>
+          </a:lnRef>
+          <a:fillRef idx="0">
+            <a:schemeClr val="dk1"/>
+          </a:fillRef>
+          <a:effectRef idx="0">
+            <a:schemeClr val="dk1"/>
+          </a:effectRef>
+          <a:fontRef idx="minor">
+            <a:schemeClr val="tx1"/>
+          </a:fontRef>
+        </p:style>
+      </p:cxnSp>
+      <p:cxnSp>
+        <p:nvCxnSpPr>
+          <p:cNvPr id="28" name="Connecteur droit avec flèche 27">
+            <a:extLst>
+              <a:ext uri="{FF2B5EF4-FFF2-40B4-BE49-F238E27FC236}">
+                <a16:creationId xmlns:a16="http://schemas.microsoft.com/office/drawing/2014/main" id="{CC66FCE9-C683-7E4D-B53A-8A3802939B88}"/>
+              </a:ext>
+            </a:extLst>
+          </p:cNvPr>
+          <p:cNvCxnSpPr/>
+          <p:nvPr/>
+        </p:nvCxnSpPr>
+        <p:spPr>
+          <a:xfrm flipV="1">
+            <a:off x="2273110" y="7261378"/>
+            <a:ext cx="0" cy="1151876"/>
+          </a:xfrm>
+          <a:prstGeom prst="straightConnector1">
+            <a:avLst/>
+          </a:prstGeom>
+          <a:ln w="38100">
+            <a:tailEnd type="triangle"/>
+          </a:ln>
+        </p:spPr>
+        <p:style>
+          <a:lnRef idx="1">
+            <a:schemeClr val="dk1"/>
+          </a:lnRef>
+          <a:fillRef idx="0">
+            <a:schemeClr val="dk1"/>
+          </a:fillRef>
+          <a:effectRef idx="0">
+            <a:schemeClr val="dk1"/>
+          </a:effectRef>
+          <a:fontRef idx="minor">
+            <a:schemeClr val="tx1"/>
+          </a:fontRef>
+        </p:style>
+      </p:cxnSp>
+      <p:sp>
+        <p:nvSpPr>
+          <p:cNvPr id="29" name="ZoneTexte 28">
+            <a:extLst>
+              <a:ext uri="{FF2B5EF4-FFF2-40B4-BE49-F238E27FC236}">
+                <a16:creationId xmlns:a16="http://schemas.microsoft.com/office/drawing/2014/main" id="{9EA0F12B-B941-607E-08CB-608C67C71348}"/>
+              </a:ext>
+            </a:extLst>
+          </p:cNvPr>
+          <p:cNvSpPr txBox="1"/>
+          <p:nvPr/>
+        </p:nvSpPr>
+        <p:spPr>
+          <a:xfrm>
+            <a:off x="4919343" y="7760601"/>
+            <a:ext cx="240772" cy="288669"/>
+          </a:xfrm>
+          <a:prstGeom prst="rect">
+            <a:avLst/>
+          </a:prstGeom>
+          <a:noFill/>
+        </p:spPr>
+        <p:txBody>
+          <a:bodyPr wrap="none" rtlCol="0">
+            <a:spAutoFit/>
+          </a:bodyPr>
+          <a:lstStyle/>
+          <a:p>
+            <a:r>
+              <a:rPr lang="fr-FR" sz="1276" b="1" dirty="0"/>
+              <a:t>t</a:t>
+            </a:r>
+          </a:p>
+        </p:txBody>
+      </p:sp>
+      <p:sp>
+        <p:nvSpPr>
+          <p:cNvPr id="30" name="ZoneTexte 29">
+            <a:extLst>
+              <a:ext uri="{FF2B5EF4-FFF2-40B4-BE49-F238E27FC236}">
+                <a16:creationId xmlns:a16="http://schemas.microsoft.com/office/drawing/2014/main" id="{3C200553-4917-BE59-0E55-F7B6FB15C15D}"/>
+              </a:ext>
+            </a:extLst>
+          </p:cNvPr>
+          <p:cNvSpPr txBox="1"/>
+          <p:nvPr/>
+        </p:nvSpPr>
+        <p:spPr>
+          <a:xfrm>
+            <a:off x="1754725" y="7159218"/>
+            <a:ext cx="452368" cy="485005"/>
+          </a:xfrm>
+          <a:prstGeom prst="rect">
+            <a:avLst/>
+          </a:prstGeom>
+          <a:noFill/>
+        </p:spPr>
+        <p:txBody>
+          <a:bodyPr wrap="none" rtlCol="0">
+            <a:spAutoFit/>
+          </a:bodyPr>
+          <a:lstStyle/>
+          <a:p>
+            <a:r>
+              <a:rPr lang="fr-FR" sz="1276" b="1" dirty="0"/>
+              <a:t>i</a:t>
+            </a:r>
+            <a:r>
+              <a:rPr lang="fr-FR" sz="1276" b="1" baseline="-25000" dirty="0"/>
+              <a:t>1</a:t>
+            </a:r>
+            <a:r>
+              <a:rPr lang="fr-FR" sz="1276" b="1" dirty="0"/>
+              <a:t>, </a:t>
+            </a:r>
+            <a:r>
+              <a:rPr lang="fr-FR" sz="1276" b="1" dirty="0">
+                <a:solidFill>
+                  <a:srgbClr val="FF0000"/>
+                </a:solidFill>
+              </a:rPr>
+              <a:t>i</a:t>
+            </a:r>
+            <a:r>
+              <a:rPr lang="fr-FR" sz="1276" b="1" baseline="-25000" dirty="0">
+                <a:solidFill>
+                  <a:srgbClr val="FF0000"/>
+                </a:solidFill>
+              </a:rPr>
+              <a:t>2</a:t>
+            </a:r>
+          </a:p>
+          <a:p>
+            <a:r>
+              <a:rPr lang="fr-FR" sz="1276" b="1" dirty="0"/>
+              <a:t>,</a:t>
+            </a:r>
+            <a:r>
+              <a:rPr lang="fr-FR" sz="1276" b="1" dirty="0">
+                <a:solidFill>
+                  <a:schemeClr val="accent1"/>
+                </a:solidFill>
+              </a:rPr>
+              <a:t> </a:t>
+            </a:r>
+            <a:r>
+              <a:rPr lang="fr-FR" sz="1276" b="1" dirty="0">
+                <a:solidFill>
+                  <a:srgbClr val="00B050"/>
+                </a:solidFill>
+              </a:rPr>
+              <a:t>i</a:t>
+            </a:r>
+            <a:r>
+              <a:rPr lang="fr-FR" sz="1276" b="1" baseline="-25000" dirty="0">
+                <a:solidFill>
+                  <a:srgbClr val="00B050"/>
+                </a:solidFill>
+              </a:rPr>
+              <a:t>E</a:t>
+            </a:r>
+          </a:p>
+        </p:txBody>
+      </p:sp>
+      <p:sp>
+        <p:nvSpPr>
+          <p:cNvPr id="31" name="ZoneTexte 30">
+            <a:extLst>
+              <a:ext uri="{FF2B5EF4-FFF2-40B4-BE49-F238E27FC236}">
+                <a16:creationId xmlns:a16="http://schemas.microsoft.com/office/drawing/2014/main" id="{352CD195-014C-563E-13F2-F3A997D8A7C7}"/>
+              </a:ext>
+            </a:extLst>
+          </p:cNvPr>
+          <p:cNvSpPr txBox="1"/>
+          <p:nvPr/>
+        </p:nvSpPr>
+        <p:spPr>
+          <a:xfrm>
+            <a:off x="2059452" y="7914343"/>
+            <a:ext cx="268022" cy="288669"/>
+          </a:xfrm>
+          <a:prstGeom prst="rect">
+            <a:avLst/>
+          </a:prstGeom>
+          <a:noFill/>
+        </p:spPr>
+        <p:txBody>
+          <a:bodyPr wrap="none" rtlCol="0">
+            <a:spAutoFit/>
+          </a:bodyPr>
+          <a:lstStyle/>
+          <a:p>
+            <a:r>
+              <a:rPr lang="fr-FR" sz="1276" b="1" dirty="0"/>
+              <a:t>0</a:t>
+            </a:r>
+          </a:p>
+        </p:txBody>
+      </p:sp>
+      <mc:AlternateContent xmlns:mc="http://schemas.openxmlformats.org/markup-compatibility/2006">
+        <mc:Choice xmlns:a14="http://schemas.microsoft.com/office/drawing/2010/main" Requires="a14">
+          <p:sp>
+            <p:nvSpPr>
+              <p:cNvPr id="32" name="ZoneTexte 31">
+                <a:extLst>
+                  <a:ext uri="{FF2B5EF4-FFF2-40B4-BE49-F238E27FC236}">
+                    <a16:creationId xmlns:a16="http://schemas.microsoft.com/office/drawing/2014/main" id="{81EB927F-2702-998F-F149-F60325FA57E5}"/>
+                  </a:ext>
+                </a:extLst>
+              </p:cNvPr>
+              <p:cNvSpPr txBox="1"/>
+              <p:nvPr/>
+            </p:nvSpPr>
+            <p:spPr>
+              <a:xfrm>
+                <a:off x="2790373" y="7894706"/>
+                <a:ext cx="434734" cy="288669"/>
+              </a:xfrm>
+              <a:prstGeom prst="rect">
+                <a:avLst/>
+              </a:prstGeom>
+              <a:noFill/>
+            </p:spPr>
+            <p:txBody>
+              <a:bodyPr wrap="none" rtlCol="0">
+                <a:spAutoFit/>
+              </a:bodyPr>
+              <a:lstStyle/>
+              <a:p>
+                <a:pPr/>
+                <a14:m>
+                  <m:oMathPara xmlns:m="http://schemas.openxmlformats.org/officeDocument/2006/math">
+                    <m:oMathParaPr>
+                      <m:jc m:val="centerGroup"/>
+                    </m:oMathParaPr>
+                    <m:oMath xmlns:m="http://schemas.openxmlformats.org/officeDocument/2006/math">
+                      <m:r>
+                        <a:rPr lang="fr-FR" sz="1276" b="1" i="1">
+                          <a:latin typeface="Cambria Math" panose="02040503050406030204" pitchFamily="18" charset="0"/>
+                        </a:rPr>
+                        <m:t>𝜶</m:t>
+                      </m:r>
+                      <m:r>
+                        <a:rPr lang="fr-FR" sz="1276" b="1" i="1">
+                          <a:latin typeface="Cambria Math" panose="02040503050406030204" pitchFamily="18" charset="0"/>
+                        </a:rPr>
+                        <m:t>𝑻</m:t>
+                      </m:r>
+                    </m:oMath>
+                  </m:oMathPara>
+                </a14:m>
+                <a:endParaRPr lang="fr-FR" sz="1276" b="1" dirty="0"/>
+              </a:p>
+            </p:txBody>
+          </p:sp>
+        </mc:Choice>
+        <mc:Fallback>
+          <p:sp>
+            <p:nvSpPr>
+              <p:cNvPr id="32" name="ZoneTexte 31">
+                <a:extLst>
+                  <a:ext uri="{FF2B5EF4-FFF2-40B4-BE49-F238E27FC236}">
+                    <a16:creationId xmlns:a16="http://schemas.microsoft.com/office/drawing/2014/main" id="{81EB927F-2702-998F-F149-F60325FA57E5}"/>
+                  </a:ext>
+                </a:extLst>
+              </p:cNvPr>
+              <p:cNvSpPr txBox="1">
+                <a:spLocks noRot="1" noChangeAspect="1" noMove="1" noResize="1" noEditPoints="1" noAdjustHandles="1" noChangeArrowheads="1" noChangeShapeType="1" noTextEdit="1"/>
+              </p:cNvSpPr>
+              <p:nvPr/>
+            </p:nvSpPr>
+            <p:spPr>
+              <a:xfrm>
+                <a:off x="2790373" y="7894706"/>
+                <a:ext cx="434734" cy="288669"/>
+              </a:xfrm>
+              <a:prstGeom prst="rect">
+                <a:avLst/>
+              </a:prstGeom>
+              <a:blipFill>
+                <a:blip r:embed="rId6"/>
+                <a:stretch>
+                  <a:fillRect/>
+                </a:stretch>
+              </a:blipFill>
+            </p:spPr>
+            <p:txBody>
+              <a:bodyPr/>
+              <a:lstStyle/>
+              <a:p>
+                <a:r>
+                  <a:rPr lang="fr-FR">
+                    <a:noFill/>
+                  </a:rPr>
+                  <a:t> </a:t>
+                </a:r>
+              </a:p>
+            </p:txBody>
+          </p:sp>
+        </mc:Fallback>
+      </mc:AlternateContent>
+      <p:sp>
+        <p:nvSpPr>
+          <p:cNvPr id="33" name="ZoneTexte 32">
+            <a:extLst>
+              <a:ext uri="{FF2B5EF4-FFF2-40B4-BE49-F238E27FC236}">
+                <a16:creationId xmlns:a16="http://schemas.microsoft.com/office/drawing/2014/main" id="{2035F5C3-8F2E-0644-DA99-F3E090209CB4}"/>
+              </a:ext>
+            </a:extLst>
+          </p:cNvPr>
+          <p:cNvSpPr txBox="1"/>
+          <p:nvPr/>
+        </p:nvSpPr>
+        <p:spPr>
+          <a:xfrm>
+            <a:off x="4357413" y="7904525"/>
+            <a:ext cx="266420" cy="288669"/>
+          </a:xfrm>
+          <a:prstGeom prst="rect">
+            <a:avLst/>
+          </a:prstGeom>
+          <a:noFill/>
+        </p:spPr>
+        <p:txBody>
+          <a:bodyPr wrap="none" rtlCol="0">
+            <a:spAutoFit/>
+          </a:bodyPr>
+          <a:lstStyle/>
+          <a:p>
+            <a:r>
+              <a:rPr lang="fr-FR" sz="1276" b="1" dirty="0"/>
+              <a:t>T</a:t>
+            </a:r>
+          </a:p>
+        </p:txBody>
+      </p:sp>
+      <p:cxnSp>
+        <p:nvCxnSpPr>
+          <p:cNvPr id="34" name="Connecteur droit avec flèche 33">
+            <a:extLst>
+              <a:ext uri="{FF2B5EF4-FFF2-40B4-BE49-F238E27FC236}">
+                <a16:creationId xmlns:a16="http://schemas.microsoft.com/office/drawing/2014/main" id="{8FE55E2A-3980-905F-5233-0EDDC76EC6AF}"/>
+              </a:ext>
+            </a:extLst>
+          </p:cNvPr>
+          <p:cNvCxnSpPr/>
+          <p:nvPr/>
+        </p:nvCxnSpPr>
+        <p:spPr>
+          <a:xfrm>
+            <a:off x="2063186" y="9050496"/>
+            <a:ext cx="2739514" cy="0"/>
+          </a:xfrm>
+          <a:prstGeom prst="straightConnector1">
+            <a:avLst/>
+          </a:prstGeom>
+          <a:ln w="38100">
+            <a:tailEnd type="triangle"/>
+          </a:ln>
+        </p:spPr>
+        <p:style>
+          <a:lnRef idx="1">
+            <a:schemeClr val="dk1"/>
+          </a:lnRef>
+          <a:fillRef idx="0">
+            <a:schemeClr val="dk1"/>
+          </a:fillRef>
+          <a:effectRef idx="0">
+            <a:schemeClr val="dk1"/>
+          </a:effectRef>
+          <a:fontRef idx="minor">
+            <a:schemeClr val="tx1"/>
+          </a:fontRef>
+        </p:style>
+      </p:cxnSp>
+      <p:cxnSp>
+        <p:nvCxnSpPr>
+          <p:cNvPr id="35" name="Connecteur droit avec flèche 34">
+            <a:extLst>
+              <a:ext uri="{FF2B5EF4-FFF2-40B4-BE49-F238E27FC236}">
+                <a16:creationId xmlns:a16="http://schemas.microsoft.com/office/drawing/2014/main" id="{B49BBE5E-C406-BCE6-ACFF-590B6A3BEC40}"/>
+              </a:ext>
+            </a:extLst>
+          </p:cNvPr>
+          <p:cNvCxnSpPr/>
+          <p:nvPr/>
+        </p:nvCxnSpPr>
+        <p:spPr>
+          <a:xfrm flipV="1">
+            <a:off x="2273110" y="8430184"/>
+            <a:ext cx="0" cy="760977"/>
+          </a:xfrm>
+          <a:prstGeom prst="straightConnector1">
+            <a:avLst/>
+          </a:prstGeom>
+          <a:ln w="38100">
+            <a:tailEnd type="triangle"/>
+          </a:ln>
+        </p:spPr>
+        <p:style>
+          <a:lnRef idx="1">
+            <a:schemeClr val="dk1"/>
+          </a:lnRef>
+          <a:fillRef idx="0">
+            <a:schemeClr val="dk1"/>
+          </a:fillRef>
+          <a:effectRef idx="0">
+            <a:schemeClr val="dk1"/>
+          </a:effectRef>
+          <a:fontRef idx="minor">
+            <a:schemeClr val="tx1"/>
+          </a:fontRef>
+        </p:style>
+      </p:cxnSp>
+      <p:sp>
+        <p:nvSpPr>
+          <p:cNvPr id="36" name="ZoneTexte 35">
+            <a:extLst>
+              <a:ext uri="{FF2B5EF4-FFF2-40B4-BE49-F238E27FC236}">
+                <a16:creationId xmlns:a16="http://schemas.microsoft.com/office/drawing/2014/main" id="{8518A937-322B-18C5-9F28-BEF344E1B47C}"/>
+              </a:ext>
+            </a:extLst>
+          </p:cNvPr>
+          <p:cNvSpPr txBox="1"/>
+          <p:nvPr/>
+        </p:nvSpPr>
+        <p:spPr>
+          <a:xfrm>
+            <a:off x="4802700" y="8906570"/>
+            <a:ext cx="240772" cy="288669"/>
+          </a:xfrm>
+          <a:prstGeom prst="rect">
+            <a:avLst/>
+          </a:prstGeom>
+          <a:noFill/>
+        </p:spPr>
+        <p:txBody>
+          <a:bodyPr wrap="none" rtlCol="0">
+            <a:spAutoFit/>
+          </a:bodyPr>
+          <a:lstStyle/>
+          <a:p>
+            <a:r>
+              <a:rPr lang="fr-FR" sz="1276" b="1" dirty="0"/>
+              <a:t>t</a:t>
+            </a:r>
+          </a:p>
+        </p:txBody>
+      </p:sp>
+      <p:sp>
+        <p:nvSpPr>
+          <p:cNvPr id="37" name="ZoneTexte 36">
+            <a:extLst>
+              <a:ext uri="{FF2B5EF4-FFF2-40B4-BE49-F238E27FC236}">
+                <a16:creationId xmlns:a16="http://schemas.microsoft.com/office/drawing/2014/main" id="{3BD10CEC-6AEB-5B8E-6C3A-61744CBC8EA7}"/>
+              </a:ext>
+            </a:extLst>
+          </p:cNvPr>
+          <p:cNvSpPr txBox="1"/>
+          <p:nvPr/>
+        </p:nvSpPr>
+        <p:spPr>
+          <a:xfrm>
+            <a:off x="1878059" y="8413254"/>
+            <a:ext cx="381836" cy="288669"/>
+          </a:xfrm>
+          <a:prstGeom prst="rect">
+            <a:avLst/>
+          </a:prstGeom>
+          <a:noFill/>
+        </p:spPr>
+        <p:txBody>
+          <a:bodyPr wrap="none" rtlCol="0">
+            <a:spAutoFit/>
+          </a:bodyPr>
+          <a:lstStyle/>
+          <a:p>
+            <a:r>
+              <a:rPr lang="fr-FR" sz="1276" b="1" dirty="0"/>
+              <a:t>v</a:t>
+            </a:r>
+            <a:r>
+              <a:rPr lang="fr-FR" sz="1276" b="1" baseline="-25000" dirty="0"/>
+              <a:t>DS</a:t>
+            </a:r>
+          </a:p>
+        </p:txBody>
+      </p:sp>
+      <p:sp>
+        <p:nvSpPr>
+          <p:cNvPr id="38" name="ZoneTexte 37">
+            <a:extLst>
+              <a:ext uri="{FF2B5EF4-FFF2-40B4-BE49-F238E27FC236}">
+                <a16:creationId xmlns:a16="http://schemas.microsoft.com/office/drawing/2014/main" id="{3E2DE5D5-F139-552E-1257-20C2C9952CA6}"/>
+              </a:ext>
+            </a:extLst>
+          </p:cNvPr>
+          <p:cNvSpPr txBox="1"/>
+          <p:nvPr/>
+        </p:nvSpPr>
+        <p:spPr>
+          <a:xfrm>
+            <a:off x="1980909" y="9060314"/>
+            <a:ext cx="268022" cy="288669"/>
+          </a:xfrm>
+          <a:prstGeom prst="rect">
+            <a:avLst/>
+          </a:prstGeom>
+          <a:noFill/>
+        </p:spPr>
+        <p:txBody>
+          <a:bodyPr wrap="none" rtlCol="0">
+            <a:spAutoFit/>
+          </a:bodyPr>
+          <a:lstStyle/>
+          <a:p>
+            <a:r>
+              <a:rPr lang="fr-FR" sz="1276" b="1" dirty="0"/>
+              <a:t>0</a:t>
+            </a:r>
+          </a:p>
+        </p:txBody>
+      </p:sp>
+      <mc:AlternateContent xmlns:mc="http://schemas.openxmlformats.org/markup-compatibility/2006">
+        <mc:Choice xmlns:a14="http://schemas.microsoft.com/office/drawing/2010/main" Requires="a14">
+          <p:sp>
+            <p:nvSpPr>
+              <p:cNvPr id="39" name="ZoneTexte 38">
+                <a:extLst>
+                  <a:ext uri="{FF2B5EF4-FFF2-40B4-BE49-F238E27FC236}">
+                    <a16:creationId xmlns:a16="http://schemas.microsoft.com/office/drawing/2014/main" id="{63C4B39B-D01E-650C-29A9-A7845A6BB5B6}"/>
+                  </a:ext>
+                </a:extLst>
+              </p:cNvPr>
+              <p:cNvSpPr txBox="1"/>
+              <p:nvPr/>
+            </p:nvSpPr>
+            <p:spPr>
+              <a:xfrm>
+                <a:off x="2788030" y="9040676"/>
+                <a:ext cx="434734" cy="288669"/>
+              </a:xfrm>
+              <a:prstGeom prst="rect">
+                <a:avLst/>
+              </a:prstGeom>
+              <a:noFill/>
+            </p:spPr>
+            <p:txBody>
+              <a:bodyPr wrap="none" rtlCol="0">
+                <a:spAutoFit/>
+              </a:bodyPr>
+              <a:lstStyle/>
+              <a:p>
+                <a:pPr/>
+                <a14:m>
+                  <m:oMathPara xmlns:m="http://schemas.openxmlformats.org/officeDocument/2006/math">
+                    <m:oMathParaPr>
+                      <m:jc m:val="centerGroup"/>
+                    </m:oMathParaPr>
+                    <m:oMath xmlns:m="http://schemas.openxmlformats.org/officeDocument/2006/math">
+                      <m:r>
+                        <a:rPr lang="fr-FR" sz="1276" b="1" i="1">
+                          <a:latin typeface="Cambria Math" panose="02040503050406030204" pitchFamily="18" charset="0"/>
+                        </a:rPr>
+                        <m:t>𝜶</m:t>
+                      </m:r>
+                      <m:r>
+                        <a:rPr lang="fr-FR" sz="1276" b="1" i="1">
+                          <a:latin typeface="Cambria Math" panose="02040503050406030204" pitchFamily="18" charset="0"/>
+                        </a:rPr>
+                        <m:t>𝑻</m:t>
+                      </m:r>
+                    </m:oMath>
+                  </m:oMathPara>
+                </a14:m>
+                <a:endParaRPr lang="fr-FR" sz="1276" b="1" dirty="0"/>
+              </a:p>
+            </p:txBody>
+          </p:sp>
+        </mc:Choice>
+        <mc:Fallback>
+          <p:sp>
+            <p:nvSpPr>
+              <p:cNvPr id="39" name="ZoneTexte 38">
+                <a:extLst>
+                  <a:ext uri="{FF2B5EF4-FFF2-40B4-BE49-F238E27FC236}">
+                    <a16:creationId xmlns:a16="http://schemas.microsoft.com/office/drawing/2014/main" id="{63C4B39B-D01E-650C-29A9-A7845A6BB5B6}"/>
+                  </a:ext>
+                </a:extLst>
+              </p:cNvPr>
+              <p:cNvSpPr txBox="1">
+                <a:spLocks noRot="1" noChangeAspect="1" noMove="1" noResize="1" noEditPoints="1" noAdjustHandles="1" noChangeArrowheads="1" noChangeShapeType="1" noTextEdit="1"/>
+              </p:cNvSpPr>
+              <p:nvPr/>
+            </p:nvSpPr>
+            <p:spPr>
+              <a:xfrm>
+                <a:off x="2788030" y="9040676"/>
+                <a:ext cx="434734" cy="288669"/>
+              </a:xfrm>
+              <a:prstGeom prst="rect">
+                <a:avLst/>
+              </a:prstGeom>
+              <a:blipFill>
+                <a:blip r:embed="rId3"/>
+                <a:stretch>
+                  <a:fillRect/>
+                </a:stretch>
+              </a:blipFill>
+            </p:spPr>
+            <p:txBody>
+              <a:bodyPr/>
+              <a:lstStyle/>
+              <a:p>
+                <a:r>
+                  <a:rPr lang="fr-FR">
+                    <a:noFill/>
+                  </a:rPr>
+                  <a:t> </a:t>
+                </a:r>
+              </a:p>
+            </p:txBody>
+          </p:sp>
+        </mc:Fallback>
+      </mc:AlternateContent>
+      <p:sp>
+        <p:nvSpPr>
+          <p:cNvPr id="40" name="ZoneTexte 39">
+            <a:extLst>
+              <a:ext uri="{FF2B5EF4-FFF2-40B4-BE49-F238E27FC236}">
+                <a16:creationId xmlns:a16="http://schemas.microsoft.com/office/drawing/2014/main" id="{5E697743-977B-1FA3-680D-FBA3D0BB9EF3}"/>
+              </a:ext>
+            </a:extLst>
+          </p:cNvPr>
+          <p:cNvSpPr txBox="1"/>
+          <p:nvPr/>
+        </p:nvSpPr>
+        <p:spPr>
+          <a:xfrm>
+            <a:off x="4345545" y="9050495"/>
+            <a:ext cx="266420" cy="288669"/>
+          </a:xfrm>
+          <a:prstGeom prst="rect">
+            <a:avLst/>
+          </a:prstGeom>
+          <a:noFill/>
+        </p:spPr>
+        <p:txBody>
+          <a:bodyPr wrap="none" rtlCol="0">
+            <a:spAutoFit/>
+          </a:bodyPr>
+          <a:lstStyle/>
+          <a:p>
+            <a:r>
+              <a:rPr lang="fr-FR" sz="1276" b="1" dirty="0"/>
+              <a:t>T</a:t>
+            </a:r>
+          </a:p>
+        </p:txBody>
+      </p:sp>
+      <p:cxnSp>
+        <p:nvCxnSpPr>
+          <p:cNvPr id="41" name="Connecteur droit 40">
+            <a:extLst>
+              <a:ext uri="{FF2B5EF4-FFF2-40B4-BE49-F238E27FC236}">
+                <a16:creationId xmlns:a16="http://schemas.microsoft.com/office/drawing/2014/main" id="{10312073-9325-7CB9-A685-60C8D73741A9}"/>
+              </a:ext>
+            </a:extLst>
+          </p:cNvPr>
+          <p:cNvCxnSpPr/>
+          <p:nvPr/>
+        </p:nvCxnSpPr>
+        <p:spPr>
+          <a:xfrm>
+            <a:off x="3151914" y="3482222"/>
+            <a:ext cx="0" cy="5947528"/>
+          </a:xfrm>
+          <a:prstGeom prst="line">
+            <a:avLst/>
+          </a:prstGeom>
+          <a:ln w="28575">
+            <a:prstDash val="dash"/>
+          </a:ln>
+        </p:spPr>
+        <p:style>
+          <a:lnRef idx="1">
+            <a:schemeClr val="dk1"/>
+          </a:lnRef>
+          <a:fillRef idx="0">
+            <a:schemeClr val="dk1"/>
+          </a:fillRef>
+          <a:effectRef idx="0">
+            <a:schemeClr val="dk1"/>
+          </a:effectRef>
+          <a:fontRef idx="minor">
+            <a:schemeClr val="tx1"/>
+          </a:fontRef>
+        </p:style>
+      </p:cxnSp>
+      <p:cxnSp>
+        <p:nvCxnSpPr>
+          <p:cNvPr id="42" name="Connecteur droit 41">
+            <a:extLst>
+              <a:ext uri="{FF2B5EF4-FFF2-40B4-BE49-F238E27FC236}">
+                <a16:creationId xmlns:a16="http://schemas.microsoft.com/office/drawing/2014/main" id="{B7DDFAE8-4881-49AE-C169-C04609CB3C86}"/>
+              </a:ext>
+            </a:extLst>
+          </p:cNvPr>
+          <p:cNvCxnSpPr/>
+          <p:nvPr/>
+        </p:nvCxnSpPr>
+        <p:spPr>
+          <a:xfrm>
+            <a:off x="4386870" y="3482222"/>
+            <a:ext cx="0" cy="5947528"/>
+          </a:xfrm>
+          <a:prstGeom prst="line">
+            <a:avLst/>
+          </a:prstGeom>
+          <a:ln w="28575">
+            <a:prstDash val="dash"/>
+          </a:ln>
+        </p:spPr>
+        <p:style>
+          <a:lnRef idx="1">
+            <a:schemeClr val="dk1"/>
+          </a:lnRef>
+          <a:fillRef idx="0">
+            <a:schemeClr val="dk1"/>
+          </a:fillRef>
+          <a:effectRef idx="0">
+            <a:schemeClr val="dk1"/>
+          </a:effectRef>
+          <a:fontRef idx="minor">
+            <a:schemeClr val="tx1"/>
+          </a:fontRef>
+        </p:style>
+      </p:cxnSp>
+      <p:cxnSp>
+        <p:nvCxnSpPr>
+          <p:cNvPr id="44" name="Connecteur droit 43">
+            <a:extLst>
+              <a:ext uri="{FF2B5EF4-FFF2-40B4-BE49-F238E27FC236}">
+                <a16:creationId xmlns:a16="http://schemas.microsoft.com/office/drawing/2014/main" id="{35728AAC-C21E-3EB0-AB72-307364A283A6}"/>
+              </a:ext>
+            </a:extLst>
+          </p:cNvPr>
+          <p:cNvCxnSpPr>
+            <a:cxnSpLocks/>
+            <a:stCxn id="10" idx="0"/>
+          </p:cNvCxnSpPr>
+          <p:nvPr/>
+        </p:nvCxnSpPr>
+        <p:spPr>
+          <a:xfrm flipV="1">
+            <a:off x="2231563" y="3695700"/>
+            <a:ext cx="920351" cy="439487"/>
+          </a:xfrm>
+          <a:prstGeom prst="line">
+            <a:avLst/>
+          </a:prstGeom>
+          <a:ln w="38100">
+            <a:solidFill>
+              <a:srgbClr val="FF0000"/>
+            </a:solidFill>
+          </a:ln>
+        </p:spPr>
+        <p:style>
+          <a:lnRef idx="1">
+            <a:schemeClr val="accent1"/>
+          </a:lnRef>
+          <a:fillRef idx="0">
+            <a:schemeClr val="accent1"/>
+          </a:fillRef>
+          <a:effectRef idx="0">
+            <a:schemeClr val="accent1"/>
+          </a:effectRef>
+          <a:fontRef idx="minor">
+            <a:schemeClr val="tx1"/>
+          </a:fontRef>
+        </p:style>
+      </p:cxnSp>
+      <p:cxnSp>
+        <p:nvCxnSpPr>
+          <p:cNvPr id="47" name="Connecteur droit 46">
+            <a:extLst>
+              <a:ext uri="{FF2B5EF4-FFF2-40B4-BE49-F238E27FC236}">
+                <a16:creationId xmlns:a16="http://schemas.microsoft.com/office/drawing/2014/main" id="{F97349C7-86F9-FFF0-83B0-7189A1CE9A8B}"/>
+              </a:ext>
+            </a:extLst>
+          </p:cNvPr>
+          <p:cNvCxnSpPr>
+            <a:cxnSpLocks/>
+          </p:cNvCxnSpPr>
+          <p:nvPr/>
+        </p:nvCxnSpPr>
+        <p:spPr>
+          <a:xfrm flipH="1" flipV="1">
+            <a:off x="3141552" y="3695700"/>
+            <a:ext cx="920351" cy="439487"/>
+          </a:xfrm>
+          <a:prstGeom prst="line">
+            <a:avLst/>
+          </a:prstGeom>
+          <a:ln w="38100">
+            <a:solidFill>
+              <a:srgbClr val="FF0000"/>
+            </a:solidFill>
+          </a:ln>
+        </p:spPr>
+        <p:style>
+          <a:lnRef idx="1">
+            <a:schemeClr val="accent1"/>
+          </a:lnRef>
+          <a:fillRef idx="0">
+            <a:schemeClr val="accent1"/>
+          </a:fillRef>
+          <a:effectRef idx="0">
+            <a:schemeClr val="accent1"/>
+          </a:effectRef>
+          <a:fontRef idx="minor">
+            <a:schemeClr val="tx1"/>
+          </a:fontRef>
+        </p:style>
+      </p:cxnSp>
+      <p:cxnSp>
+        <p:nvCxnSpPr>
+          <p:cNvPr id="48" name="Connecteur droit 47">
+            <a:extLst>
+              <a:ext uri="{FF2B5EF4-FFF2-40B4-BE49-F238E27FC236}">
+                <a16:creationId xmlns:a16="http://schemas.microsoft.com/office/drawing/2014/main" id="{1479BFEC-11A9-323E-243F-2D7C38E6593E}"/>
+              </a:ext>
+            </a:extLst>
+          </p:cNvPr>
+          <p:cNvCxnSpPr>
+            <a:cxnSpLocks/>
+          </p:cNvCxnSpPr>
+          <p:nvPr/>
+        </p:nvCxnSpPr>
+        <p:spPr>
+          <a:xfrm flipH="1">
+            <a:off x="4038600" y="4120880"/>
+            <a:ext cx="348270" cy="0"/>
+          </a:xfrm>
+          <a:prstGeom prst="line">
+            <a:avLst/>
+          </a:prstGeom>
+          <a:ln w="38100">
+            <a:solidFill>
+              <a:srgbClr val="FF0000"/>
+            </a:solidFill>
+          </a:ln>
+        </p:spPr>
+        <p:style>
+          <a:lnRef idx="1">
+            <a:schemeClr val="accent1"/>
+          </a:lnRef>
+          <a:fillRef idx="0">
+            <a:schemeClr val="accent1"/>
+          </a:fillRef>
+          <a:effectRef idx="0">
+            <a:schemeClr val="accent1"/>
+          </a:effectRef>
+          <a:fontRef idx="minor">
+            <a:schemeClr val="tx1"/>
+          </a:fontRef>
+        </p:style>
+      </p:cxnSp>
+      <p:cxnSp>
+        <p:nvCxnSpPr>
+          <p:cNvPr id="52" name="Connecteur droit 51">
+            <a:extLst>
+              <a:ext uri="{FF2B5EF4-FFF2-40B4-BE49-F238E27FC236}">
+                <a16:creationId xmlns:a16="http://schemas.microsoft.com/office/drawing/2014/main" id="{1C81863A-3C64-5874-989E-347E18822738}"/>
+              </a:ext>
+            </a:extLst>
+          </p:cNvPr>
+          <p:cNvCxnSpPr>
+            <a:cxnSpLocks/>
+          </p:cNvCxnSpPr>
+          <p:nvPr/>
+        </p:nvCxnSpPr>
+        <p:spPr>
+          <a:xfrm flipH="1">
+            <a:off x="1924840" y="4122487"/>
+            <a:ext cx="348270" cy="0"/>
+          </a:xfrm>
+          <a:prstGeom prst="line">
+            <a:avLst/>
+          </a:prstGeom>
+          <a:ln w="38100">
+            <a:solidFill>
+              <a:srgbClr val="FF0000"/>
+            </a:solidFill>
+          </a:ln>
+        </p:spPr>
+        <p:style>
+          <a:lnRef idx="1">
+            <a:schemeClr val="accent1"/>
+          </a:lnRef>
+          <a:fillRef idx="0">
+            <a:schemeClr val="accent1"/>
+          </a:fillRef>
+          <a:effectRef idx="0">
+            <a:schemeClr val="accent1"/>
+          </a:effectRef>
+          <a:fontRef idx="minor">
+            <a:schemeClr val="tx1"/>
+          </a:fontRef>
+        </p:style>
+      </p:cxnSp>
+      <p:cxnSp>
+        <p:nvCxnSpPr>
+          <p:cNvPr id="53" name="Connecteur droit 52">
+            <a:extLst>
+              <a:ext uri="{FF2B5EF4-FFF2-40B4-BE49-F238E27FC236}">
+                <a16:creationId xmlns:a16="http://schemas.microsoft.com/office/drawing/2014/main" id="{EDF93D96-505F-5038-47A7-5A87A3ADF00A}"/>
+              </a:ext>
+            </a:extLst>
+          </p:cNvPr>
+          <p:cNvCxnSpPr>
+            <a:cxnSpLocks/>
+          </p:cNvCxnSpPr>
+          <p:nvPr/>
+        </p:nvCxnSpPr>
+        <p:spPr>
+          <a:xfrm flipV="1">
+            <a:off x="4371572" y="3922378"/>
+            <a:ext cx="431128" cy="205873"/>
+          </a:xfrm>
+          <a:prstGeom prst="line">
+            <a:avLst/>
+          </a:prstGeom>
+          <a:ln w="38100">
+            <a:solidFill>
+              <a:srgbClr val="FF0000"/>
+            </a:solidFill>
+          </a:ln>
+        </p:spPr>
+        <p:style>
+          <a:lnRef idx="1">
+            <a:schemeClr val="accent1"/>
+          </a:lnRef>
+          <a:fillRef idx="0">
+            <a:schemeClr val="accent1"/>
+          </a:fillRef>
+          <a:effectRef idx="0">
+            <a:schemeClr val="accent1"/>
+          </a:effectRef>
+          <a:fontRef idx="minor">
+            <a:schemeClr val="tx1"/>
+          </a:fontRef>
+        </p:style>
+      </p:cxnSp>
+      <p:cxnSp>
+        <p:nvCxnSpPr>
+          <p:cNvPr id="56" name="Connecteur droit 55">
+            <a:extLst>
+              <a:ext uri="{FF2B5EF4-FFF2-40B4-BE49-F238E27FC236}">
+                <a16:creationId xmlns:a16="http://schemas.microsoft.com/office/drawing/2014/main" id="{C9969ACB-50B5-FDB9-88A8-7C88ADE0B3DE}"/>
+              </a:ext>
+            </a:extLst>
+          </p:cNvPr>
+          <p:cNvCxnSpPr>
+            <a:cxnSpLocks/>
+          </p:cNvCxnSpPr>
+          <p:nvPr/>
+        </p:nvCxnSpPr>
+        <p:spPr>
+          <a:xfrm flipH="1">
+            <a:off x="2273110" y="4649256"/>
+            <a:ext cx="878804" cy="0"/>
+          </a:xfrm>
+          <a:prstGeom prst="line">
+            <a:avLst/>
+          </a:prstGeom>
+          <a:ln w="38100">
+            <a:solidFill>
+              <a:srgbClr val="FF0000"/>
+            </a:solidFill>
+          </a:ln>
+        </p:spPr>
+        <p:style>
+          <a:lnRef idx="1">
+            <a:schemeClr val="accent1"/>
+          </a:lnRef>
+          <a:fillRef idx="0">
+            <a:schemeClr val="accent1"/>
+          </a:fillRef>
+          <a:effectRef idx="0">
+            <a:schemeClr val="accent1"/>
+          </a:effectRef>
+          <a:fontRef idx="minor">
+            <a:schemeClr val="tx1"/>
+          </a:fontRef>
+        </p:style>
+      </p:cxnSp>
+      <p:cxnSp>
+        <p:nvCxnSpPr>
+          <p:cNvPr id="58" name="Connecteur droit 57">
+            <a:extLst>
+              <a:ext uri="{FF2B5EF4-FFF2-40B4-BE49-F238E27FC236}">
+                <a16:creationId xmlns:a16="http://schemas.microsoft.com/office/drawing/2014/main" id="{714A8CE8-4EF8-08AF-8D5E-09971E038A42}"/>
+              </a:ext>
+            </a:extLst>
+          </p:cNvPr>
+          <p:cNvCxnSpPr>
+            <a:cxnSpLocks/>
+          </p:cNvCxnSpPr>
+          <p:nvPr/>
+        </p:nvCxnSpPr>
+        <p:spPr>
+          <a:xfrm flipH="1">
+            <a:off x="3151914" y="5601756"/>
+            <a:ext cx="814324" cy="0"/>
+          </a:xfrm>
+          <a:prstGeom prst="line">
+            <a:avLst/>
+          </a:prstGeom>
+          <a:ln w="38100">
+            <a:solidFill>
+              <a:srgbClr val="FF0000"/>
+            </a:solidFill>
+          </a:ln>
+        </p:spPr>
+        <p:style>
+          <a:lnRef idx="1">
+            <a:schemeClr val="accent1"/>
+          </a:lnRef>
+          <a:fillRef idx="0">
+            <a:schemeClr val="accent1"/>
+          </a:fillRef>
+          <a:effectRef idx="0">
+            <a:schemeClr val="accent1"/>
+          </a:effectRef>
+          <a:fontRef idx="minor">
+            <a:schemeClr val="tx1"/>
+          </a:fontRef>
+        </p:style>
+      </p:cxnSp>
+      <p:cxnSp>
+        <p:nvCxnSpPr>
+          <p:cNvPr id="59" name="Connecteur droit 58">
+            <a:extLst>
+              <a:ext uri="{FF2B5EF4-FFF2-40B4-BE49-F238E27FC236}">
+                <a16:creationId xmlns:a16="http://schemas.microsoft.com/office/drawing/2014/main" id="{B0B2AEE1-0740-0B46-FF5E-F817080E0F0F}"/>
+              </a:ext>
+            </a:extLst>
+          </p:cNvPr>
+          <p:cNvCxnSpPr/>
+          <p:nvPr/>
+        </p:nvCxnSpPr>
+        <p:spPr>
+          <a:xfrm>
+            <a:off x="3966238" y="3482221"/>
+            <a:ext cx="0" cy="5947528"/>
+          </a:xfrm>
+          <a:prstGeom prst="line">
+            <a:avLst/>
+          </a:prstGeom>
+          <a:ln w="28575">
+            <a:prstDash val="dash"/>
+          </a:ln>
+        </p:spPr>
+        <p:style>
+          <a:lnRef idx="1">
+            <a:schemeClr val="dk1"/>
+          </a:lnRef>
+          <a:fillRef idx="0">
+            <a:schemeClr val="dk1"/>
+          </a:fillRef>
+          <a:effectRef idx="0">
+            <a:schemeClr val="dk1"/>
+          </a:effectRef>
+          <a:fontRef idx="minor">
+            <a:schemeClr val="tx1"/>
+          </a:fontRef>
+        </p:style>
+      </p:cxnSp>
+      <p:cxnSp>
+        <p:nvCxnSpPr>
+          <p:cNvPr id="61" name="Connecteur droit 60">
+            <a:extLst>
+              <a:ext uri="{FF2B5EF4-FFF2-40B4-BE49-F238E27FC236}">
+                <a16:creationId xmlns:a16="http://schemas.microsoft.com/office/drawing/2014/main" id="{9A90BB71-902B-2845-AD8C-5A5B654ED2F7}"/>
+              </a:ext>
+            </a:extLst>
+          </p:cNvPr>
+          <p:cNvCxnSpPr>
+            <a:cxnSpLocks/>
+          </p:cNvCxnSpPr>
+          <p:nvPr/>
+        </p:nvCxnSpPr>
+        <p:spPr>
+          <a:xfrm>
+            <a:off x="3151914" y="4649256"/>
+            <a:ext cx="0" cy="952500"/>
+          </a:xfrm>
+          <a:prstGeom prst="line">
+            <a:avLst/>
+          </a:prstGeom>
+          <a:ln w="38100">
+            <a:solidFill>
+              <a:srgbClr val="FF0000"/>
+            </a:solidFill>
+          </a:ln>
+        </p:spPr>
+        <p:style>
+          <a:lnRef idx="1">
+            <a:schemeClr val="accent1"/>
+          </a:lnRef>
+          <a:fillRef idx="0">
+            <a:schemeClr val="accent1"/>
+          </a:fillRef>
+          <a:effectRef idx="0">
+            <a:schemeClr val="accent1"/>
+          </a:effectRef>
+          <a:fontRef idx="minor">
+            <a:schemeClr val="tx1"/>
+          </a:fontRef>
+        </p:style>
+      </p:cxnSp>
+      <p:cxnSp>
+        <p:nvCxnSpPr>
+          <p:cNvPr id="64" name="Connecteur droit 63">
+            <a:extLst>
+              <a:ext uri="{FF2B5EF4-FFF2-40B4-BE49-F238E27FC236}">
+                <a16:creationId xmlns:a16="http://schemas.microsoft.com/office/drawing/2014/main" id="{6ABAF7A6-A0D8-EF9C-5EA7-A638D60F385C}"/>
+              </a:ext>
+            </a:extLst>
+          </p:cNvPr>
+          <p:cNvCxnSpPr>
+            <a:cxnSpLocks/>
+          </p:cNvCxnSpPr>
+          <p:nvPr/>
+        </p:nvCxnSpPr>
+        <p:spPr>
+          <a:xfrm>
+            <a:off x="3966238" y="5072778"/>
+            <a:ext cx="0" cy="533741"/>
+          </a:xfrm>
+          <a:prstGeom prst="line">
+            <a:avLst/>
+          </a:prstGeom>
+          <a:ln w="38100">
+            <a:solidFill>
+              <a:srgbClr val="FF0000"/>
+            </a:solidFill>
+          </a:ln>
+        </p:spPr>
+        <p:style>
+          <a:lnRef idx="1">
+            <a:schemeClr val="accent1"/>
+          </a:lnRef>
+          <a:fillRef idx="0">
+            <a:schemeClr val="accent1"/>
+          </a:fillRef>
+          <a:effectRef idx="0">
+            <a:schemeClr val="accent1"/>
+          </a:effectRef>
+          <a:fontRef idx="minor">
+            <a:schemeClr val="tx1"/>
+          </a:fontRef>
+        </p:style>
+      </p:cxnSp>
+      <p:cxnSp>
+        <p:nvCxnSpPr>
+          <p:cNvPr id="66" name="Connecteur droit 65">
+            <a:extLst>
+              <a:ext uri="{FF2B5EF4-FFF2-40B4-BE49-F238E27FC236}">
+                <a16:creationId xmlns:a16="http://schemas.microsoft.com/office/drawing/2014/main" id="{D03F3A32-1DA2-6427-8805-8006E2E4DD1F}"/>
+              </a:ext>
+            </a:extLst>
+          </p:cNvPr>
+          <p:cNvCxnSpPr>
+            <a:cxnSpLocks/>
+          </p:cNvCxnSpPr>
+          <p:nvPr/>
+        </p:nvCxnSpPr>
+        <p:spPr>
+          <a:xfrm flipH="1">
+            <a:off x="3966238" y="5067553"/>
+            <a:ext cx="391175" cy="0"/>
+          </a:xfrm>
+          <a:prstGeom prst="line">
+            <a:avLst/>
+          </a:prstGeom>
+          <a:ln w="38100">
+            <a:solidFill>
+              <a:srgbClr val="FF0000"/>
+            </a:solidFill>
+          </a:ln>
+        </p:spPr>
+        <p:style>
+          <a:lnRef idx="1">
+            <a:schemeClr val="accent1"/>
+          </a:lnRef>
+          <a:fillRef idx="0">
+            <a:schemeClr val="accent1"/>
+          </a:fillRef>
+          <a:effectRef idx="0">
+            <a:schemeClr val="accent1"/>
+          </a:effectRef>
+          <a:fontRef idx="minor">
+            <a:schemeClr val="tx1"/>
+          </a:fontRef>
+        </p:style>
+      </p:cxnSp>
+      <p:cxnSp>
+        <p:nvCxnSpPr>
+          <p:cNvPr id="68" name="Connecteur droit 67">
+            <a:extLst>
+              <a:ext uri="{FF2B5EF4-FFF2-40B4-BE49-F238E27FC236}">
+                <a16:creationId xmlns:a16="http://schemas.microsoft.com/office/drawing/2014/main" id="{5271CFCE-C1B9-A50D-C55A-A745536B9E16}"/>
+              </a:ext>
+            </a:extLst>
+          </p:cNvPr>
+          <p:cNvCxnSpPr>
+            <a:cxnSpLocks/>
+          </p:cNvCxnSpPr>
+          <p:nvPr/>
+        </p:nvCxnSpPr>
+        <p:spPr>
+          <a:xfrm>
+            <a:off x="4384935" y="4649256"/>
+            <a:ext cx="0" cy="423522"/>
+          </a:xfrm>
+          <a:prstGeom prst="line">
+            <a:avLst/>
+          </a:prstGeom>
+          <a:ln w="38100">
+            <a:solidFill>
+              <a:srgbClr val="FF0000"/>
+            </a:solidFill>
+          </a:ln>
+        </p:spPr>
+        <p:style>
+          <a:lnRef idx="1">
+            <a:schemeClr val="accent1"/>
+          </a:lnRef>
+          <a:fillRef idx="0">
+            <a:schemeClr val="accent1"/>
+          </a:fillRef>
+          <a:effectRef idx="0">
+            <a:schemeClr val="accent1"/>
+          </a:effectRef>
+          <a:fontRef idx="minor">
+            <a:schemeClr val="tx1"/>
+          </a:fontRef>
+        </p:style>
+      </p:cxnSp>
+      <p:cxnSp>
+        <p:nvCxnSpPr>
+          <p:cNvPr id="70" name="Connecteur droit 69">
+            <a:extLst>
+              <a:ext uri="{FF2B5EF4-FFF2-40B4-BE49-F238E27FC236}">
+                <a16:creationId xmlns:a16="http://schemas.microsoft.com/office/drawing/2014/main" id="{A266829B-3849-BE25-968A-A2BD30EF3FE0}"/>
+              </a:ext>
+            </a:extLst>
+          </p:cNvPr>
+          <p:cNvCxnSpPr>
+            <a:cxnSpLocks/>
+          </p:cNvCxnSpPr>
+          <p:nvPr/>
+        </p:nvCxnSpPr>
+        <p:spPr>
+          <a:xfrm flipH="1">
+            <a:off x="4371572" y="4655325"/>
+            <a:ext cx="431128" cy="0"/>
+          </a:xfrm>
+          <a:prstGeom prst="line">
+            <a:avLst/>
+          </a:prstGeom>
+          <a:ln w="38100">
+            <a:solidFill>
+              <a:srgbClr val="FF0000"/>
+            </a:solidFill>
+          </a:ln>
+        </p:spPr>
+        <p:style>
+          <a:lnRef idx="1">
+            <a:schemeClr val="accent1"/>
+          </a:lnRef>
+          <a:fillRef idx="0">
+            <a:schemeClr val="accent1"/>
+          </a:fillRef>
+          <a:effectRef idx="0">
+            <a:schemeClr val="accent1"/>
+          </a:effectRef>
+          <a:fontRef idx="minor">
+            <a:schemeClr val="tx1"/>
+          </a:fontRef>
+        </p:style>
+      </p:cxnSp>
+      <p:cxnSp>
+        <p:nvCxnSpPr>
+          <p:cNvPr id="72" name="Connecteur droit 71">
+            <a:extLst>
+              <a:ext uri="{FF2B5EF4-FFF2-40B4-BE49-F238E27FC236}">
+                <a16:creationId xmlns:a16="http://schemas.microsoft.com/office/drawing/2014/main" id="{108B3D46-580C-E4AF-1DE5-E522A54D7161}"/>
+              </a:ext>
+            </a:extLst>
+          </p:cNvPr>
+          <p:cNvCxnSpPr>
+            <a:cxnSpLocks/>
+          </p:cNvCxnSpPr>
+          <p:nvPr/>
+        </p:nvCxnSpPr>
+        <p:spPr>
+          <a:xfrm flipH="1">
+            <a:off x="2258382" y="3686514"/>
+            <a:ext cx="1014063" cy="9186"/>
+          </a:xfrm>
+          <a:prstGeom prst="line">
+            <a:avLst/>
+          </a:prstGeom>
+          <a:ln w="12700">
+            <a:prstDash val="dash"/>
+          </a:ln>
+        </p:spPr>
+        <p:style>
+          <a:lnRef idx="1">
+            <a:schemeClr val="dk1"/>
+          </a:lnRef>
+          <a:fillRef idx="0">
+            <a:schemeClr val="dk1"/>
+          </a:fillRef>
+          <a:effectRef idx="0">
+            <a:schemeClr val="dk1"/>
+          </a:effectRef>
+          <a:fontRef idx="minor">
+            <a:schemeClr val="tx1"/>
+          </a:fontRef>
+        </p:style>
+      </p:cxnSp>
+      <mc:AlternateContent xmlns:mc="http://schemas.openxmlformats.org/markup-compatibility/2006">
+        <mc:Choice xmlns:a14="http://schemas.microsoft.com/office/drawing/2010/main" Requires="a14">
+          <p:sp>
+            <p:nvSpPr>
+              <p:cNvPr id="75" name="ZoneTexte 74">
+                <a:extLst>
+                  <a:ext uri="{FF2B5EF4-FFF2-40B4-BE49-F238E27FC236}">
+                    <a16:creationId xmlns:a16="http://schemas.microsoft.com/office/drawing/2014/main" id="{A2D8A5D3-F7E7-61AF-3249-1CA11BB673D8}"/>
+                  </a:ext>
+                </a:extLst>
+              </p:cNvPr>
+              <p:cNvSpPr txBox="1"/>
+              <p:nvPr/>
+            </p:nvSpPr>
+            <p:spPr>
+              <a:xfrm>
+                <a:off x="1950169" y="3548152"/>
+                <a:ext cx="382604" cy="253916"/>
+              </a:xfrm>
+              <a:prstGeom prst="rect">
+                <a:avLst/>
+              </a:prstGeom>
+              <a:noFill/>
+            </p:spPr>
+            <p:txBody>
+              <a:bodyPr wrap="none" rtlCol="0">
+                <a:spAutoFit/>
+              </a:bodyPr>
+              <a:lstStyle/>
+              <a:p>
+                <a:pPr/>
+                <a14:m>
+                  <m:oMathPara xmlns:m="http://schemas.openxmlformats.org/officeDocument/2006/math">
+                    <m:oMathParaPr>
+                      <m:jc m:val="centerGroup"/>
+                    </m:oMathParaPr>
+                    <m:oMath xmlns:m="http://schemas.openxmlformats.org/officeDocument/2006/math">
+                      <m:sSub>
+                        <m:sSubPr>
+                          <m:ctrlPr>
+                            <a:rPr lang="fr-FR" sz="1050" b="1" i="1" smtClean="0">
+                              <a:solidFill>
+                                <a:srgbClr val="FF0000"/>
+                              </a:solidFill>
+                              <a:latin typeface="Cambria Math" panose="02040503050406030204" pitchFamily="18" charset="0"/>
+                              <a:ea typeface="Cambria Math" panose="02040503050406030204" pitchFamily="18" charset="0"/>
+                            </a:rPr>
+                          </m:ctrlPr>
+                        </m:sSubPr>
+                        <m:e>
+                          <m:r>
+                            <a:rPr lang="fr-FR" sz="1050" b="1" i="1" smtClean="0">
+                              <a:solidFill>
+                                <a:srgbClr val="FF0000"/>
+                              </a:solidFill>
+                              <a:latin typeface="Cambria Math" panose="02040503050406030204" pitchFamily="18" charset="0"/>
+                              <a:ea typeface="Cambria Math" panose="02040503050406030204" pitchFamily="18" charset="0"/>
+                            </a:rPr>
+                            <m:t>𝝋</m:t>
+                          </m:r>
+                        </m:e>
+                        <m:sub>
+                          <m:r>
+                            <a:rPr lang="fr-FR" sz="1050" b="1" i="1" smtClean="0">
+                              <a:solidFill>
+                                <a:srgbClr val="FF0000"/>
+                              </a:solidFill>
+                              <a:latin typeface="Cambria Math" panose="02040503050406030204" pitchFamily="18" charset="0"/>
+                              <a:ea typeface="Cambria Math" panose="02040503050406030204" pitchFamily="18" charset="0"/>
+                            </a:rPr>
+                            <m:t>𝟎</m:t>
+                          </m:r>
+                        </m:sub>
+                      </m:sSub>
+                    </m:oMath>
+                  </m:oMathPara>
+                </a14:m>
+                <a:endParaRPr lang="fr-FR" sz="1050" b="1" dirty="0">
+                  <a:solidFill>
+                    <a:srgbClr val="FF0000"/>
+                  </a:solidFill>
+                </a:endParaRPr>
+              </a:p>
+            </p:txBody>
+          </p:sp>
+        </mc:Choice>
+        <mc:Fallback>
+          <p:sp>
+            <p:nvSpPr>
+              <p:cNvPr id="75" name="ZoneTexte 74">
+                <a:extLst>
+                  <a:ext uri="{FF2B5EF4-FFF2-40B4-BE49-F238E27FC236}">
+                    <a16:creationId xmlns:a16="http://schemas.microsoft.com/office/drawing/2014/main" id="{A2D8A5D3-F7E7-61AF-3249-1CA11BB673D8}"/>
+                  </a:ext>
+                </a:extLst>
+              </p:cNvPr>
+              <p:cNvSpPr txBox="1">
+                <a:spLocks noRot="1" noChangeAspect="1" noMove="1" noResize="1" noEditPoints="1" noAdjustHandles="1" noChangeArrowheads="1" noChangeShapeType="1" noTextEdit="1"/>
+              </p:cNvSpPr>
+              <p:nvPr/>
+            </p:nvSpPr>
+            <p:spPr>
+              <a:xfrm>
+                <a:off x="1950169" y="3548152"/>
+                <a:ext cx="382604" cy="253916"/>
+              </a:xfrm>
+              <a:prstGeom prst="rect">
+                <a:avLst/>
+              </a:prstGeom>
+              <a:blipFill>
+                <a:blip r:embed="rId7"/>
+                <a:stretch>
+                  <a:fillRect/>
+                </a:stretch>
+              </a:blipFill>
+            </p:spPr>
+            <p:txBody>
+              <a:bodyPr/>
+              <a:lstStyle/>
+              <a:p>
+                <a:r>
+                  <a:rPr lang="fr-FR">
+                    <a:noFill/>
+                  </a:rPr>
+                  <a:t> </a:t>
+                </a:r>
+              </a:p>
+            </p:txBody>
+          </p:sp>
+        </mc:Fallback>
+      </mc:AlternateContent>
+      <mc:AlternateContent xmlns:mc="http://schemas.openxmlformats.org/markup-compatibility/2006">
+        <mc:Choice xmlns:a14="http://schemas.microsoft.com/office/drawing/2010/main" Requires="a14">
+          <p:sp>
+            <p:nvSpPr>
+              <p:cNvPr id="76" name="ZoneTexte 75">
+                <a:extLst>
+                  <a:ext uri="{FF2B5EF4-FFF2-40B4-BE49-F238E27FC236}">
+                    <a16:creationId xmlns:a16="http://schemas.microsoft.com/office/drawing/2014/main" id="{21E553D2-4A6B-1909-17AB-41655A844C3F}"/>
+                  </a:ext>
+                </a:extLst>
+              </p:cNvPr>
+              <p:cNvSpPr txBox="1"/>
+              <p:nvPr/>
+            </p:nvSpPr>
+            <p:spPr>
+              <a:xfrm>
+                <a:off x="1967888" y="4532412"/>
+                <a:ext cx="303288" cy="253916"/>
+              </a:xfrm>
+              <a:prstGeom prst="rect">
+                <a:avLst/>
+              </a:prstGeom>
+              <a:noFill/>
+            </p:spPr>
+            <p:txBody>
+              <a:bodyPr wrap="none" rtlCol="0">
+                <a:spAutoFit/>
+              </a:bodyPr>
+              <a:lstStyle/>
+              <a:p>
+                <a:pPr/>
+                <a14:m>
+                  <m:oMathPara xmlns:m="http://schemas.openxmlformats.org/officeDocument/2006/math">
+                    <m:oMathParaPr>
+                      <m:jc m:val="centerGroup"/>
+                    </m:oMathParaPr>
+                    <m:oMath xmlns:m="http://schemas.openxmlformats.org/officeDocument/2006/math">
+                      <m:r>
+                        <a:rPr lang="fr-FR" sz="1050" b="1" i="1" smtClean="0">
+                          <a:solidFill>
+                            <a:srgbClr val="FF0000"/>
+                          </a:solidFill>
+                          <a:latin typeface="Cambria Math" panose="02040503050406030204" pitchFamily="18" charset="0"/>
+                          <a:ea typeface="Cambria Math" panose="02040503050406030204" pitchFamily="18" charset="0"/>
+                        </a:rPr>
+                        <m:t>𝑬</m:t>
+                      </m:r>
+                    </m:oMath>
+                  </m:oMathPara>
+                </a14:m>
+                <a:endParaRPr lang="fr-FR" sz="1050" b="1" dirty="0">
+                  <a:solidFill>
+                    <a:srgbClr val="FF0000"/>
+                  </a:solidFill>
+                </a:endParaRPr>
+              </a:p>
+            </p:txBody>
+          </p:sp>
+        </mc:Choice>
+        <mc:Fallback>
+          <p:sp>
+            <p:nvSpPr>
+              <p:cNvPr id="76" name="ZoneTexte 75">
+                <a:extLst>
+                  <a:ext uri="{FF2B5EF4-FFF2-40B4-BE49-F238E27FC236}">
+                    <a16:creationId xmlns:a16="http://schemas.microsoft.com/office/drawing/2014/main" id="{21E553D2-4A6B-1909-17AB-41655A844C3F}"/>
+                  </a:ext>
+                </a:extLst>
+              </p:cNvPr>
+              <p:cNvSpPr txBox="1">
+                <a:spLocks noRot="1" noChangeAspect="1" noMove="1" noResize="1" noEditPoints="1" noAdjustHandles="1" noChangeArrowheads="1" noChangeShapeType="1" noTextEdit="1"/>
+              </p:cNvSpPr>
+              <p:nvPr/>
+            </p:nvSpPr>
+            <p:spPr>
+              <a:xfrm>
+                <a:off x="1967888" y="4532412"/>
+                <a:ext cx="303288" cy="253916"/>
+              </a:xfrm>
+              <a:prstGeom prst="rect">
+                <a:avLst/>
+              </a:prstGeom>
+              <a:blipFill>
+                <a:blip r:embed="rId8"/>
+                <a:stretch>
+                  <a:fillRect/>
+                </a:stretch>
+              </a:blipFill>
+            </p:spPr>
+            <p:txBody>
+              <a:bodyPr/>
+              <a:lstStyle/>
+              <a:p>
+                <a:r>
+                  <a:rPr lang="fr-FR">
+                    <a:noFill/>
+                  </a:rPr>
+                  <a:t> </a:t>
+                </a:r>
+              </a:p>
+            </p:txBody>
+          </p:sp>
+        </mc:Fallback>
+      </mc:AlternateContent>
+      <mc:AlternateContent xmlns:mc="http://schemas.openxmlformats.org/markup-compatibility/2006">
+        <mc:Choice xmlns:a14="http://schemas.microsoft.com/office/drawing/2010/main" Requires="a14">
+          <p:sp>
+            <p:nvSpPr>
+              <p:cNvPr id="77" name="ZoneTexte 76">
+                <a:extLst>
+                  <a:ext uri="{FF2B5EF4-FFF2-40B4-BE49-F238E27FC236}">
+                    <a16:creationId xmlns:a16="http://schemas.microsoft.com/office/drawing/2014/main" id="{4983C7AC-4BCB-BDD9-1EDE-256D147EFF33}"/>
+                  </a:ext>
+                </a:extLst>
+              </p:cNvPr>
+              <p:cNvSpPr txBox="1"/>
+              <p:nvPr/>
+            </p:nvSpPr>
+            <p:spPr>
+              <a:xfrm>
+                <a:off x="1884740" y="5445069"/>
+                <a:ext cx="433131" cy="253916"/>
+              </a:xfrm>
+              <a:prstGeom prst="rect">
+                <a:avLst/>
+              </a:prstGeom>
+              <a:noFill/>
+            </p:spPr>
+            <p:txBody>
+              <a:bodyPr wrap="none" rtlCol="0">
+                <a:spAutoFit/>
+              </a:bodyPr>
+              <a:lstStyle/>
+              <a:p>
+                <a:pPr/>
+                <a14:m>
+                  <m:oMathPara xmlns:m="http://schemas.openxmlformats.org/officeDocument/2006/math">
+                    <m:oMathParaPr>
+                      <m:jc m:val="centerGroup"/>
+                    </m:oMathParaPr>
+                    <m:oMath xmlns:m="http://schemas.openxmlformats.org/officeDocument/2006/math">
+                      <m:r>
+                        <a:rPr lang="fr-FR" sz="1050" b="1" i="1" smtClean="0">
+                          <a:solidFill>
+                            <a:srgbClr val="FF0000"/>
+                          </a:solidFill>
+                          <a:latin typeface="Cambria Math" panose="02040503050406030204" pitchFamily="18" charset="0"/>
+                          <a:ea typeface="Cambria Math" panose="02040503050406030204" pitchFamily="18" charset="0"/>
+                        </a:rPr>
+                        <m:t>− </m:t>
+                      </m:r>
+                      <m:r>
+                        <a:rPr lang="fr-FR" sz="1050" b="1" i="1" smtClean="0">
+                          <a:solidFill>
+                            <a:srgbClr val="FF0000"/>
+                          </a:solidFill>
+                          <a:latin typeface="Cambria Math" panose="02040503050406030204" pitchFamily="18" charset="0"/>
+                          <a:ea typeface="Cambria Math" panose="02040503050406030204" pitchFamily="18" charset="0"/>
+                        </a:rPr>
+                        <m:t>𝑬</m:t>
+                      </m:r>
+                    </m:oMath>
+                  </m:oMathPara>
+                </a14:m>
+                <a:endParaRPr lang="fr-FR" sz="1050" b="1" dirty="0">
+                  <a:solidFill>
+                    <a:srgbClr val="FF0000"/>
+                  </a:solidFill>
+                </a:endParaRPr>
+              </a:p>
+            </p:txBody>
+          </p:sp>
+        </mc:Choice>
+        <mc:Fallback>
+          <p:sp>
+            <p:nvSpPr>
+              <p:cNvPr id="77" name="ZoneTexte 76">
+                <a:extLst>
+                  <a:ext uri="{FF2B5EF4-FFF2-40B4-BE49-F238E27FC236}">
+                    <a16:creationId xmlns:a16="http://schemas.microsoft.com/office/drawing/2014/main" id="{4983C7AC-4BCB-BDD9-1EDE-256D147EFF33}"/>
+                  </a:ext>
+                </a:extLst>
+              </p:cNvPr>
+              <p:cNvSpPr txBox="1">
+                <a:spLocks noRot="1" noChangeAspect="1" noMove="1" noResize="1" noEditPoints="1" noAdjustHandles="1" noChangeArrowheads="1" noChangeShapeType="1" noTextEdit="1"/>
+              </p:cNvSpPr>
+              <p:nvPr/>
+            </p:nvSpPr>
+            <p:spPr>
+              <a:xfrm>
+                <a:off x="1884740" y="5445069"/>
+                <a:ext cx="433131" cy="253916"/>
+              </a:xfrm>
+              <a:prstGeom prst="rect">
+                <a:avLst/>
+              </a:prstGeom>
+              <a:blipFill>
+                <a:blip r:embed="rId9"/>
+                <a:stretch>
+                  <a:fillRect/>
+                </a:stretch>
+              </a:blipFill>
+            </p:spPr>
+            <p:txBody>
+              <a:bodyPr/>
+              <a:lstStyle/>
+              <a:p>
+                <a:r>
+                  <a:rPr lang="fr-FR">
+                    <a:noFill/>
+                  </a:rPr>
+                  <a:t> </a:t>
+                </a:r>
+              </a:p>
+            </p:txBody>
+          </p:sp>
+        </mc:Fallback>
+      </mc:AlternateContent>
+      <p:cxnSp>
+        <p:nvCxnSpPr>
+          <p:cNvPr id="78" name="Connecteur droit 77">
+            <a:extLst>
+              <a:ext uri="{FF2B5EF4-FFF2-40B4-BE49-F238E27FC236}">
+                <a16:creationId xmlns:a16="http://schemas.microsoft.com/office/drawing/2014/main" id="{9FF6E869-A0AE-1521-F272-75FC01C13B39}"/>
+              </a:ext>
+            </a:extLst>
+          </p:cNvPr>
+          <p:cNvCxnSpPr>
+            <a:cxnSpLocks/>
+          </p:cNvCxnSpPr>
+          <p:nvPr/>
+        </p:nvCxnSpPr>
+        <p:spPr>
+          <a:xfrm flipH="1">
+            <a:off x="2280522" y="6043948"/>
+            <a:ext cx="878804" cy="0"/>
+          </a:xfrm>
+          <a:prstGeom prst="line">
+            <a:avLst/>
+          </a:prstGeom>
+          <a:ln w="38100">
+            <a:solidFill>
+              <a:schemeClr val="tx1"/>
+            </a:solidFill>
+          </a:ln>
+        </p:spPr>
+        <p:style>
+          <a:lnRef idx="1">
+            <a:schemeClr val="accent1"/>
+          </a:lnRef>
+          <a:fillRef idx="0">
+            <a:schemeClr val="accent1"/>
+          </a:fillRef>
+          <a:effectRef idx="0">
+            <a:schemeClr val="accent1"/>
+          </a:effectRef>
+          <a:fontRef idx="minor">
+            <a:schemeClr val="tx1"/>
+          </a:fontRef>
+        </p:style>
+      </p:cxnSp>
+      <p:cxnSp>
+        <p:nvCxnSpPr>
+          <p:cNvPr id="79" name="Connecteur droit 78">
+            <a:extLst>
+              <a:ext uri="{FF2B5EF4-FFF2-40B4-BE49-F238E27FC236}">
+                <a16:creationId xmlns:a16="http://schemas.microsoft.com/office/drawing/2014/main" id="{C994D144-FB0F-F73A-E23B-20EE8A4E165E}"/>
+              </a:ext>
+            </a:extLst>
+          </p:cNvPr>
+          <p:cNvCxnSpPr>
+            <a:cxnSpLocks/>
+          </p:cNvCxnSpPr>
+          <p:nvPr/>
+        </p:nvCxnSpPr>
+        <p:spPr>
+          <a:xfrm flipH="1">
+            <a:off x="3141552" y="7057408"/>
+            <a:ext cx="1243383" cy="0"/>
+          </a:xfrm>
+          <a:prstGeom prst="line">
+            <a:avLst/>
+          </a:prstGeom>
+          <a:ln w="38100">
+            <a:solidFill>
+              <a:schemeClr val="tx1"/>
+            </a:solidFill>
+          </a:ln>
+        </p:spPr>
+        <p:style>
+          <a:lnRef idx="1">
+            <a:schemeClr val="accent1"/>
+          </a:lnRef>
+          <a:fillRef idx="0">
+            <a:schemeClr val="accent1"/>
+          </a:fillRef>
+          <a:effectRef idx="0">
+            <a:schemeClr val="accent1"/>
+          </a:effectRef>
+          <a:fontRef idx="minor">
+            <a:schemeClr val="tx1"/>
+          </a:fontRef>
+        </p:style>
+      </p:cxnSp>
+      <p:cxnSp>
+        <p:nvCxnSpPr>
+          <p:cNvPr id="81" name="Connecteur droit 80">
+            <a:extLst>
+              <a:ext uri="{FF2B5EF4-FFF2-40B4-BE49-F238E27FC236}">
+                <a16:creationId xmlns:a16="http://schemas.microsoft.com/office/drawing/2014/main" id="{23484161-ABC4-04B1-39AF-D25FBB3A97C9}"/>
+              </a:ext>
+            </a:extLst>
+          </p:cNvPr>
+          <p:cNvCxnSpPr>
+            <a:cxnSpLocks/>
+          </p:cNvCxnSpPr>
+          <p:nvPr/>
+        </p:nvCxnSpPr>
+        <p:spPr>
+          <a:xfrm>
+            <a:off x="3151914" y="6042892"/>
+            <a:ext cx="0" cy="1014516"/>
+          </a:xfrm>
+          <a:prstGeom prst="line">
+            <a:avLst/>
+          </a:prstGeom>
+          <a:ln w="38100">
+            <a:solidFill>
+              <a:schemeClr val="tx1"/>
+            </a:solidFill>
+          </a:ln>
+        </p:spPr>
+        <p:style>
+          <a:lnRef idx="1">
+            <a:schemeClr val="accent1"/>
+          </a:lnRef>
+          <a:fillRef idx="0">
+            <a:schemeClr val="accent1"/>
+          </a:fillRef>
+          <a:effectRef idx="0">
+            <a:schemeClr val="accent1"/>
+          </a:effectRef>
+          <a:fontRef idx="minor">
+            <a:schemeClr val="tx1"/>
+          </a:fontRef>
+        </p:style>
+      </p:cxnSp>
+      <p:cxnSp>
+        <p:nvCxnSpPr>
+          <p:cNvPr id="85" name="Connecteur droit 84">
+            <a:extLst>
+              <a:ext uri="{FF2B5EF4-FFF2-40B4-BE49-F238E27FC236}">
+                <a16:creationId xmlns:a16="http://schemas.microsoft.com/office/drawing/2014/main" id="{9CF8C6F1-333B-7576-597C-BF2CF8517860}"/>
+              </a:ext>
+            </a:extLst>
+          </p:cNvPr>
+          <p:cNvCxnSpPr>
+            <a:cxnSpLocks/>
+          </p:cNvCxnSpPr>
+          <p:nvPr/>
+        </p:nvCxnSpPr>
+        <p:spPr>
+          <a:xfrm flipH="1">
+            <a:off x="4371572" y="6042892"/>
+            <a:ext cx="431128" cy="0"/>
+          </a:xfrm>
+          <a:prstGeom prst="line">
+            <a:avLst/>
+          </a:prstGeom>
+          <a:ln w="38100">
+            <a:solidFill>
+              <a:schemeClr val="tx1"/>
+            </a:solidFill>
+          </a:ln>
+        </p:spPr>
+        <p:style>
+          <a:lnRef idx="1">
+            <a:schemeClr val="accent1"/>
+          </a:lnRef>
+          <a:fillRef idx="0">
+            <a:schemeClr val="accent1"/>
+          </a:fillRef>
+          <a:effectRef idx="0">
+            <a:schemeClr val="accent1"/>
+          </a:effectRef>
+          <a:fontRef idx="minor">
+            <a:schemeClr val="tx1"/>
+          </a:fontRef>
+        </p:style>
+      </p:cxnSp>
+      <p:cxnSp>
+        <p:nvCxnSpPr>
+          <p:cNvPr id="87" name="Connecteur droit 86">
+            <a:extLst>
+              <a:ext uri="{FF2B5EF4-FFF2-40B4-BE49-F238E27FC236}">
+                <a16:creationId xmlns:a16="http://schemas.microsoft.com/office/drawing/2014/main" id="{B0DB8D3A-2603-44E4-8BDD-D24C549EA39F}"/>
+              </a:ext>
+            </a:extLst>
+          </p:cNvPr>
+          <p:cNvCxnSpPr>
+            <a:cxnSpLocks/>
+          </p:cNvCxnSpPr>
+          <p:nvPr/>
+        </p:nvCxnSpPr>
+        <p:spPr>
+          <a:xfrm flipH="1">
+            <a:off x="1884740" y="7065260"/>
+            <a:ext cx="395782" cy="0"/>
+          </a:xfrm>
+          <a:prstGeom prst="line">
+            <a:avLst/>
+          </a:prstGeom>
+          <a:ln w="38100">
+            <a:solidFill>
+              <a:schemeClr val="tx1"/>
+            </a:solidFill>
+          </a:ln>
+        </p:spPr>
+        <p:style>
+          <a:lnRef idx="1">
+            <a:schemeClr val="accent1"/>
+          </a:lnRef>
+          <a:fillRef idx="0">
+            <a:schemeClr val="accent1"/>
+          </a:fillRef>
+          <a:effectRef idx="0">
+            <a:schemeClr val="accent1"/>
+          </a:effectRef>
+          <a:fontRef idx="minor">
+            <a:schemeClr val="tx1"/>
+          </a:fontRef>
+        </p:style>
+      </p:cxnSp>
+      <p:cxnSp>
+        <p:nvCxnSpPr>
+          <p:cNvPr id="89" name="Connecteur droit 88">
+            <a:extLst>
+              <a:ext uri="{FF2B5EF4-FFF2-40B4-BE49-F238E27FC236}">
+                <a16:creationId xmlns:a16="http://schemas.microsoft.com/office/drawing/2014/main" id="{58731FC8-E6A2-E745-B480-AE7ED2796984}"/>
+              </a:ext>
+            </a:extLst>
+          </p:cNvPr>
+          <p:cNvCxnSpPr>
+            <a:cxnSpLocks/>
+          </p:cNvCxnSpPr>
+          <p:nvPr/>
+        </p:nvCxnSpPr>
+        <p:spPr>
+          <a:xfrm>
+            <a:off x="4389789" y="6042892"/>
+            <a:ext cx="0" cy="1014516"/>
+          </a:xfrm>
+          <a:prstGeom prst="line">
+            <a:avLst/>
+          </a:prstGeom>
+          <a:ln w="38100">
+            <a:solidFill>
+              <a:schemeClr val="tx1"/>
+            </a:solidFill>
+          </a:ln>
+        </p:spPr>
+        <p:style>
+          <a:lnRef idx="1">
+            <a:schemeClr val="accent1"/>
+          </a:lnRef>
+          <a:fillRef idx="0">
+            <a:schemeClr val="accent1"/>
+          </a:fillRef>
+          <a:effectRef idx="0">
+            <a:schemeClr val="accent1"/>
+          </a:effectRef>
+          <a:fontRef idx="minor">
+            <a:schemeClr val="tx1"/>
+          </a:fontRef>
+        </p:style>
+      </p:cxnSp>
+      <p:cxnSp>
+        <p:nvCxnSpPr>
+          <p:cNvPr id="90" name="Connecteur droit 89">
+            <a:extLst>
+              <a:ext uri="{FF2B5EF4-FFF2-40B4-BE49-F238E27FC236}">
+                <a16:creationId xmlns:a16="http://schemas.microsoft.com/office/drawing/2014/main" id="{E22F4527-C265-3AC7-3DC5-2B23B8301232}"/>
+              </a:ext>
+            </a:extLst>
+          </p:cNvPr>
+          <p:cNvCxnSpPr>
+            <a:cxnSpLocks/>
+          </p:cNvCxnSpPr>
+          <p:nvPr/>
+        </p:nvCxnSpPr>
+        <p:spPr>
+          <a:xfrm flipV="1">
+            <a:off x="2280522" y="6099853"/>
+            <a:ext cx="871392" cy="168077"/>
+          </a:xfrm>
+          <a:prstGeom prst="line">
+            <a:avLst/>
+          </a:prstGeom>
+          <a:ln w="38100">
+            <a:solidFill>
+              <a:srgbClr val="FF0000"/>
+            </a:solidFill>
+          </a:ln>
+        </p:spPr>
+        <p:style>
+          <a:lnRef idx="1">
+            <a:schemeClr val="accent1"/>
+          </a:lnRef>
+          <a:fillRef idx="0">
+            <a:schemeClr val="accent1"/>
+          </a:fillRef>
+          <a:effectRef idx="0">
+            <a:schemeClr val="accent1"/>
+          </a:effectRef>
+          <a:fontRef idx="minor">
+            <a:schemeClr val="tx1"/>
+          </a:fontRef>
+        </p:style>
+      </p:cxnSp>
+      <p:cxnSp>
+        <p:nvCxnSpPr>
+          <p:cNvPr id="92" name="Connecteur droit 91">
+            <a:extLst>
+              <a:ext uri="{FF2B5EF4-FFF2-40B4-BE49-F238E27FC236}">
+                <a16:creationId xmlns:a16="http://schemas.microsoft.com/office/drawing/2014/main" id="{B74765D2-9ACB-850F-F814-F734741261E5}"/>
+              </a:ext>
+            </a:extLst>
+          </p:cNvPr>
+          <p:cNvCxnSpPr>
+            <a:cxnSpLocks/>
+          </p:cNvCxnSpPr>
+          <p:nvPr/>
+        </p:nvCxnSpPr>
+        <p:spPr>
+          <a:xfrm>
+            <a:off x="3141552" y="6107977"/>
+            <a:ext cx="1242400" cy="159953"/>
+          </a:xfrm>
+          <a:prstGeom prst="line">
+            <a:avLst/>
+          </a:prstGeom>
+          <a:ln w="38100">
+            <a:solidFill>
+              <a:srgbClr val="FF0000"/>
+            </a:solidFill>
+          </a:ln>
+        </p:spPr>
+        <p:style>
+          <a:lnRef idx="1">
+            <a:schemeClr val="accent1"/>
+          </a:lnRef>
+          <a:fillRef idx="0">
+            <a:schemeClr val="accent1"/>
+          </a:fillRef>
+          <a:effectRef idx="0">
+            <a:schemeClr val="accent1"/>
+          </a:effectRef>
+          <a:fontRef idx="minor">
+            <a:schemeClr val="tx1"/>
+          </a:fontRef>
+        </p:style>
+      </p:cxnSp>
+      <p:cxnSp>
+        <p:nvCxnSpPr>
+          <p:cNvPr id="94" name="Connecteur droit 93">
+            <a:extLst>
+              <a:ext uri="{FF2B5EF4-FFF2-40B4-BE49-F238E27FC236}">
+                <a16:creationId xmlns:a16="http://schemas.microsoft.com/office/drawing/2014/main" id="{88A81794-E195-BCC5-3FB4-687260C1909F}"/>
+              </a:ext>
+            </a:extLst>
+          </p:cNvPr>
+          <p:cNvCxnSpPr>
+            <a:cxnSpLocks/>
+          </p:cNvCxnSpPr>
+          <p:nvPr/>
+        </p:nvCxnSpPr>
+        <p:spPr>
+          <a:xfrm flipV="1">
+            <a:off x="4373590" y="6179601"/>
+            <a:ext cx="418687" cy="80758"/>
+          </a:xfrm>
+          <a:prstGeom prst="line">
+            <a:avLst/>
+          </a:prstGeom>
+          <a:ln w="38100">
+            <a:solidFill>
+              <a:srgbClr val="FF0000"/>
+            </a:solidFill>
+          </a:ln>
+        </p:spPr>
+        <p:style>
+          <a:lnRef idx="1">
+            <a:schemeClr val="accent1"/>
+          </a:lnRef>
+          <a:fillRef idx="0">
+            <a:schemeClr val="accent1"/>
+          </a:fillRef>
+          <a:effectRef idx="0">
+            <a:schemeClr val="accent1"/>
+          </a:effectRef>
+          <a:fontRef idx="minor">
+            <a:schemeClr val="tx1"/>
+          </a:fontRef>
+        </p:style>
+      </p:cxnSp>
+      <mc:AlternateContent xmlns:mc="http://schemas.openxmlformats.org/markup-compatibility/2006">
+        <mc:Choice xmlns:a14="http://schemas.microsoft.com/office/drawing/2010/main" Requires="a14">
+          <p:sp>
+            <p:nvSpPr>
+              <p:cNvPr id="96" name="ZoneTexte 95">
+                <a:extLst>
+                  <a:ext uri="{FF2B5EF4-FFF2-40B4-BE49-F238E27FC236}">
+                    <a16:creationId xmlns:a16="http://schemas.microsoft.com/office/drawing/2014/main" id="{1BB07C83-028C-1D90-C685-4C1568C9C68D}"/>
+                  </a:ext>
+                </a:extLst>
+              </p:cNvPr>
+              <p:cNvSpPr txBox="1"/>
+              <p:nvPr/>
+            </p:nvSpPr>
+            <p:spPr>
+              <a:xfrm>
+                <a:off x="1846302" y="6848534"/>
+                <a:ext cx="494814" cy="253916"/>
+              </a:xfrm>
+              <a:prstGeom prst="rect">
+                <a:avLst/>
+              </a:prstGeom>
+              <a:noFill/>
+            </p:spPr>
+            <p:txBody>
+              <a:bodyPr wrap="none" rtlCol="0">
+                <a:spAutoFit/>
+              </a:bodyPr>
+              <a:lstStyle/>
+              <a:p>
+                <a:pPr/>
+                <a14:m>
+                  <m:oMathPara xmlns:m="http://schemas.openxmlformats.org/officeDocument/2006/math">
+                    <m:oMathParaPr>
+                      <m:jc m:val="centerGroup"/>
+                    </m:oMathParaPr>
+                    <m:oMath xmlns:m="http://schemas.openxmlformats.org/officeDocument/2006/math">
+                      <m:r>
+                        <a:rPr lang="fr-FR" sz="1050" b="1" i="1" smtClean="0">
+                          <a:solidFill>
+                            <a:schemeClr val="tx1"/>
+                          </a:solidFill>
+                          <a:latin typeface="Cambria Math" panose="02040503050406030204" pitchFamily="18" charset="0"/>
+                          <a:ea typeface="Cambria Math" panose="02040503050406030204" pitchFamily="18" charset="0"/>
+                        </a:rPr>
+                        <m:t>− </m:t>
+                      </m:r>
+                      <m:sSub>
+                        <m:sSubPr>
+                          <m:ctrlPr>
+                            <a:rPr lang="fr-FR" sz="1050" b="1" i="1" smtClean="0">
+                              <a:solidFill>
+                                <a:schemeClr val="tx1"/>
+                              </a:solidFill>
+                              <a:latin typeface="Cambria Math" panose="02040503050406030204" pitchFamily="18" charset="0"/>
+                              <a:ea typeface="Cambria Math" panose="02040503050406030204" pitchFamily="18" charset="0"/>
+                            </a:rPr>
+                          </m:ctrlPr>
+                        </m:sSubPr>
+                        <m:e>
+                          <m:r>
+                            <a:rPr lang="fr-FR" sz="1050" b="1" i="1" smtClean="0">
+                              <a:solidFill>
+                                <a:schemeClr val="tx1"/>
+                              </a:solidFill>
+                              <a:latin typeface="Cambria Math" panose="02040503050406030204" pitchFamily="18" charset="0"/>
+                              <a:ea typeface="Cambria Math" panose="02040503050406030204" pitchFamily="18" charset="0"/>
+                            </a:rPr>
+                            <m:t>𝑽</m:t>
+                          </m:r>
+                        </m:e>
+                        <m:sub>
+                          <m:r>
+                            <a:rPr lang="fr-FR" sz="1050" b="1" i="1" smtClean="0">
+                              <a:solidFill>
+                                <a:schemeClr val="tx1"/>
+                              </a:solidFill>
+                              <a:latin typeface="Cambria Math" panose="02040503050406030204" pitchFamily="18" charset="0"/>
+                              <a:ea typeface="Cambria Math" panose="02040503050406030204" pitchFamily="18" charset="0"/>
+                            </a:rPr>
+                            <m:t>𝑺</m:t>
+                          </m:r>
+                        </m:sub>
+                      </m:sSub>
+                    </m:oMath>
+                  </m:oMathPara>
+                </a14:m>
+                <a:endParaRPr lang="fr-FR" sz="1050" b="1" dirty="0">
+                  <a:solidFill>
+                    <a:schemeClr val="tx1"/>
+                  </a:solidFill>
+                </a:endParaRPr>
+              </a:p>
+            </p:txBody>
+          </p:sp>
+        </mc:Choice>
+        <mc:Fallback>
+          <p:sp>
+            <p:nvSpPr>
+              <p:cNvPr id="96" name="ZoneTexte 95">
+                <a:extLst>
+                  <a:ext uri="{FF2B5EF4-FFF2-40B4-BE49-F238E27FC236}">
+                    <a16:creationId xmlns:a16="http://schemas.microsoft.com/office/drawing/2014/main" id="{1BB07C83-028C-1D90-C685-4C1568C9C68D}"/>
+                  </a:ext>
+                </a:extLst>
+              </p:cNvPr>
+              <p:cNvSpPr txBox="1">
+                <a:spLocks noRot="1" noChangeAspect="1" noMove="1" noResize="1" noEditPoints="1" noAdjustHandles="1" noChangeArrowheads="1" noChangeShapeType="1" noTextEdit="1"/>
+              </p:cNvSpPr>
+              <p:nvPr/>
+            </p:nvSpPr>
+            <p:spPr>
+              <a:xfrm>
+                <a:off x="1846302" y="6848534"/>
+                <a:ext cx="494814" cy="253916"/>
+              </a:xfrm>
+              <a:prstGeom prst="rect">
+                <a:avLst/>
+              </a:prstGeom>
+              <a:blipFill>
+                <a:blip r:embed="rId10"/>
+                <a:stretch>
+                  <a:fillRect/>
+                </a:stretch>
+              </a:blipFill>
+            </p:spPr>
+            <p:txBody>
+              <a:bodyPr/>
+              <a:lstStyle/>
+              <a:p>
+                <a:r>
+                  <a:rPr lang="fr-FR">
+                    <a:noFill/>
+                  </a:rPr>
+                  <a:t> </a:t>
+                </a:r>
+              </a:p>
+            </p:txBody>
+          </p:sp>
+        </mc:Fallback>
+      </mc:AlternateContent>
+      <mc:AlternateContent xmlns:mc="http://schemas.openxmlformats.org/markup-compatibility/2006">
+        <mc:Choice xmlns:a14="http://schemas.microsoft.com/office/drawing/2010/main" Requires="a14">
+          <p:sp>
+            <p:nvSpPr>
+              <p:cNvPr id="97" name="ZoneTexte 96">
+                <a:extLst>
+                  <a:ext uri="{FF2B5EF4-FFF2-40B4-BE49-F238E27FC236}">
+                    <a16:creationId xmlns:a16="http://schemas.microsoft.com/office/drawing/2014/main" id="{DE396919-36E0-25F4-1F11-4E52CA5E7C65}"/>
+                  </a:ext>
+                </a:extLst>
+              </p:cNvPr>
+              <p:cNvSpPr txBox="1"/>
+              <p:nvPr/>
+            </p:nvSpPr>
+            <p:spPr>
+              <a:xfrm>
+                <a:off x="1544672" y="5912676"/>
+                <a:ext cx="816762" cy="397866"/>
+              </a:xfrm>
+              <a:prstGeom prst="rect">
+                <a:avLst/>
+              </a:prstGeom>
+              <a:noFill/>
+            </p:spPr>
+            <p:txBody>
+              <a:bodyPr wrap="none" rtlCol="0">
+                <a:spAutoFit/>
+              </a:bodyPr>
+              <a:lstStyle/>
+              <a:p>
+                <a:pPr/>
+                <a14:m>
+                  <m:oMathPara xmlns:m="http://schemas.openxmlformats.org/officeDocument/2006/math">
+                    <m:oMathParaPr>
+                      <m:jc m:val="centerGroup"/>
+                    </m:oMathParaPr>
+                    <m:oMath xmlns:m="http://schemas.openxmlformats.org/officeDocument/2006/math">
+                      <m:f>
+                        <m:fPr>
+                          <m:ctrlPr>
+                            <a:rPr lang="fr-FR" sz="1050" b="1" i="1" smtClean="0">
+                              <a:solidFill>
+                                <a:schemeClr val="tx1"/>
+                              </a:solidFill>
+                              <a:latin typeface="Cambria Math" panose="02040503050406030204" pitchFamily="18" charset="0"/>
+                              <a:ea typeface="Cambria Math" panose="02040503050406030204" pitchFamily="18" charset="0"/>
+                            </a:rPr>
+                          </m:ctrlPr>
+                        </m:fPr>
+                        <m:num>
+                          <m:sSub>
+                            <m:sSubPr>
+                              <m:ctrlPr>
+                                <a:rPr lang="fr-FR" sz="1050" b="1" i="1" smtClean="0">
+                                  <a:solidFill>
+                                    <a:schemeClr val="tx1"/>
+                                  </a:solidFill>
+                                  <a:latin typeface="Cambria Math" panose="02040503050406030204" pitchFamily="18" charset="0"/>
+                                  <a:ea typeface="Cambria Math" panose="02040503050406030204" pitchFamily="18" charset="0"/>
+                                </a:rPr>
+                              </m:ctrlPr>
+                            </m:sSubPr>
+                            <m:e>
+                              <m:r>
+                                <a:rPr lang="fr-FR" sz="1050" b="1" i="1" smtClean="0">
+                                  <a:solidFill>
+                                    <a:schemeClr val="tx1"/>
+                                  </a:solidFill>
+                                  <a:latin typeface="Cambria Math" panose="02040503050406030204" pitchFamily="18" charset="0"/>
+                                  <a:ea typeface="Cambria Math" panose="02040503050406030204" pitchFamily="18" charset="0"/>
+                                </a:rPr>
+                                <m:t>𝒏</m:t>
+                              </m:r>
+                            </m:e>
+                            <m:sub>
+                              <m:r>
+                                <a:rPr lang="fr-FR" sz="1050" b="1" i="1" smtClean="0">
+                                  <a:solidFill>
+                                    <a:schemeClr val="tx1"/>
+                                  </a:solidFill>
+                                  <a:latin typeface="Cambria Math" panose="02040503050406030204" pitchFamily="18" charset="0"/>
+                                  <a:ea typeface="Cambria Math" panose="02040503050406030204" pitchFamily="18" charset="0"/>
+                                </a:rPr>
+                                <m:t>𝟐</m:t>
+                              </m:r>
+                            </m:sub>
+                          </m:sSub>
+                        </m:num>
+                        <m:den>
+                          <m:sSub>
+                            <m:sSubPr>
+                              <m:ctrlPr>
+                                <a:rPr lang="fr-FR" sz="1050" b="1" i="1" smtClean="0">
+                                  <a:solidFill>
+                                    <a:schemeClr val="tx1"/>
+                                  </a:solidFill>
+                                  <a:latin typeface="Cambria Math" panose="02040503050406030204" pitchFamily="18" charset="0"/>
+                                  <a:ea typeface="Cambria Math" panose="02040503050406030204" pitchFamily="18" charset="0"/>
+                                </a:rPr>
+                              </m:ctrlPr>
+                            </m:sSubPr>
+                            <m:e>
+                              <m:r>
+                                <a:rPr lang="fr-FR" sz="1050" b="1" i="1" smtClean="0">
+                                  <a:solidFill>
+                                    <a:schemeClr val="tx1"/>
+                                  </a:solidFill>
+                                  <a:latin typeface="Cambria Math" panose="02040503050406030204" pitchFamily="18" charset="0"/>
+                                  <a:ea typeface="Cambria Math" panose="02040503050406030204" pitchFamily="18" charset="0"/>
+                                </a:rPr>
+                                <m:t>𝒏</m:t>
+                              </m:r>
+                            </m:e>
+                            <m:sub>
+                              <m:r>
+                                <a:rPr lang="fr-FR" sz="1050" b="1" i="1" smtClean="0">
+                                  <a:solidFill>
+                                    <a:schemeClr val="tx1"/>
+                                  </a:solidFill>
+                                  <a:latin typeface="Cambria Math" panose="02040503050406030204" pitchFamily="18" charset="0"/>
+                                  <a:ea typeface="Cambria Math" panose="02040503050406030204" pitchFamily="18" charset="0"/>
+                                </a:rPr>
+                                <m:t>𝟏</m:t>
+                              </m:r>
+                            </m:sub>
+                          </m:sSub>
+                        </m:den>
+                      </m:f>
+                      <m:r>
+                        <a:rPr lang="fr-FR" sz="1050" b="1" i="1" smtClean="0">
+                          <a:solidFill>
+                            <a:schemeClr val="tx1"/>
+                          </a:solidFill>
+                          <a:latin typeface="Cambria Math" panose="02040503050406030204" pitchFamily="18" charset="0"/>
+                          <a:ea typeface="Cambria Math" panose="02040503050406030204" pitchFamily="18" charset="0"/>
+                        </a:rPr>
+                        <m:t>𝑬</m:t>
+                      </m:r>
+                      <m:r>
+                        <a:rPr lang="fr-FR" sz="1050" b="1" i="1" smtClean="0">
+                          <a:solidFill>
+                            <a:schemeClr val="tx1"/>
+                          </a:solidFill>
+                          <a:latin typeface="Cambria Math" panose="02040503050406030204" pitchFamily="18" charset="0"/>
+                          <a:ea typeface="Cambria Math" panose="02040503050406030204" pitchFamily="18" charset="0"/>
+                        </a:rPr>
+                        <m:t>− </m:t>
+                      </m:r>
+                      <m:sSub>
+                        <m:sSubPr>
+                          <m:ctrlPr>
+                            <a:rPr lang="fr-FR" sz="1050" b="1" i="1" smtClean="0">
+                              <a:solidFill>
+                                <a:schemeClr val="tx1"/>
+                              </a:solidFill>
+                              <a:latin typeface="Cambria Math" panose="02040503050406030204" pitchFamily="18" charset="0"/>
+                              <a:ea typeface="Cambria Math" panose="02040503050406030204" pitchFamily="18" charset="0"/>
+                            </a:rPr>
+                          </m:ctrlPr>
+                        </m:sSubPr>
+                        <m:e>
+                          <m:r>
+                            <a:rPr lang="fr-FR" sz="1050" b="1" i="1" smtClean="0">
+                              <a:solidFill>
+                                <a:schemeClr val="tx1"/>
+                              </a:solidFill>
+                              <a:latin typeface="Cambria Math" panose="02040503050406030204" pitchFamily="18" charset="0"/>
+                              <a:ea typeface="Cambria Math" panose="02040503050406030204" pitchFamily="18" charset="0"/>
+                            </a:rPr>
+                            <m:t>𝑽</m:t>
+                          </m:r>
+                        </m:e>
+                        <m:sub>
+                          <m:r>
+                            <a:rPr lang="fr-FR" sz="1050" b="1" i="1" smtClean="0">
+                              <a:solidFill>
+                                <a:schemeClr val="tx1"/>
+                              </a:solidFill>
+                              <a:latin typeface="Cambria Math" panose="02040503050406030204" pitchFamily="18" charset="0"/>
+                              <a:ea typeface="Cambria Math" panose="02040503050406030204" pitchFamily="18" charset="0"/>
+                            </a:rPr>
+                            <m:t>𝑺</m:t>
+                          </m:r>
+                        </m:sub>
+                      </m:sSub>
+                    </m:oMath>
+                  </m:oMathPara>
+                </a14:m>
+                <a:endParaRPr lang="fr-FR" sz="1050" b="1" dirty="0">
+                  <a:solidFill>
+                    <a:schemeClr val="tx1"/>
+                  </a:solidFill>
+                </a:endParaRPr>
+              </a:p>
+            </p:txBody>
+          </p:sp>
+        </mc:Choice>
+        <mc:Fallback>
+          <p:sp>
+            <p:nvSpPr>
+              <p:cNvPr id="97" name="ZoneTexte 96">
+                <a:extLst>
+                  <a:ext uri="{FF2B5EF4-FFF2-40B4-BE49-F238E27FC236}">
+                    <a16:creationId xmlns:a16="http://schemas.microsoft.com/office/drawing/2014/main" id="{DE396919-36E0-25F4-1F11-4E52CA5E7C65}"/>
+                  </a:ext>
+                </a:extLst>
+              </p:cNvPr>
+              <p:cNvSpPr txBox="1">
+                <a:spLocks noRot="1" noChangeAspect="1" noMove="1" noResize="1" noEditPoints="1" noAdjustHandles="1" noChangeArrowheads="1" noChangeShapeType="1" noTextEdit="1"/>
+              </p:cNvSpPr>
+              <p:nvPr/>
+            </p:nvSpPr>
+            <p:spPr>
+              <a:xfrm>
+                <a:off x="1544672" y="5912676"/>
+                <a:ext cx="816762" cy="397866"/>
+              </a:xfrm>
+              <a:prstGeom prst="rect">
+                <a:avLst/>
+              </a:prstGeom>
+              <a:blipFill>
+                <a:blip r:embed="rId11"/>
+                <a:stretch>
+                  <a:fillRect/>
+                </a:stretch>
+              </a:blipFill>
+            </p:spPr>
+            <p:txBody>
+              <a:bodyPr/>
+              <a:lstStyle/>
+              <a:p>
+                <a:r>
+                  <a:rPr lang="fr-FR">
+                    <a:noFill/>
+                  </a:rPr>
+                  <a:t> </a:t>
+                </a:r>
+              </a:p>
+            </p:txBody>
+          </p:sp>
+        </mc:Fallback>
+      </mc:AlternateContent>
+      <p:cxnSp>
+        <p:nvCxnSpPr>
+          <p:cNvPr id="98" name="Connecteur droit 97">
+            <a:extLst>
+              <a:ext uri="{FF2B5EF4-FFF2-40B4-BE49-F238E27FC236}">
+                <a16:creationId xmlns:a16="http://schemas.microsoft.com/office/drawing/2014/main" id="{C3D13A28-BAF0-0E71-2F6A-A79F0CD62590}"/>
+              </a:ext>
+            </a:extLst>
+          </p:cNvPr>
+          <p:cNvCxnSpPr>
+            <a:cxnSpLocks/>
+          </p:cNvCxnSpPr>
+          <p:nvPr/>
+        </p:nvCxnSpPr>
+        <p:spPr>
+          <a:xfrm flipV="1">
+            <a:off x="2280522" y="7281392"/>
+            <a:ext cx="856664" cy="298391"/>
+          </a:xfrm>
+          <a:prstGeom prst="line">
+            <a:avLst/>
+          </a:prstGeom>
+          <a:ln w="38100">
+            <a:solidFill>
+              <a:schemeClr val="tx1"/>
+            </a:solidFill>
+            <a:prstDash val="sysDot"/>
+          </a:ln>
+        </p:spPr>
+        <p:style>
+          <a:lnRef idx="1">
+            <a:schemeClr val="accent1"/>
+          </a:lnRef>
+          <a:fillRef idx="0">
+            <a:schemeClr val="accent1"/>
+          </a:fillRef>
+          <a:effectRef idx="0">
+            <a:schemeClr val="accent1"/>
+          </a:effectRef>
+          <a:fontRef idx="minor">
+            <a:schemeClr val="tx1"/>
+          </a:fontRef>
+        </p:style>
+      </p:cxnSp>
+      <p:cxnSp>
+        <p:nvCxnSpPr>
+          <p:cNvPr id="99" name="Connecteur droit 98">
+            <a:extLst>
+              <a:ext uri="{FF2B5EF4-FFF2-40B4-BE49-F238E27FC236}">
+                <a16:creationId xmlns:a16="http://schemas.microsoft.com/office/drawing/2014/main" id="{A42BD313-597B-6F04-6A40-6C4E7F3CAC57}"/>
+              </a:ext>
+            </a:extLst>
+          </p:cNvPr>
+          <p:cNvCxnSpPr>
+            <a:cxnSpLocks/>
+          </p:cNvCxnSpPr>
+          <p:nvPr/>
+        </p:nvCxnSpPr>
+        <p:spPr>
+          <a:xfrm flipV="1">
+            <a:off x="2272873" y="7426198"/>
+            <a:ext cx="871392" cy="168077"/>
+          </a:xfrm>
+          <a:prstGeom prst="line">
+            <a:avLst/>
+          </a:prstGeom>
+          <a:ln w="38100">
+            <a:solidFill>
+              <a:srgbClr val="FF0000"/>
+            </a:solidFill>
+          </a:ln>
+        </p:spPr>
+        <p:style>
+          <a:lnRef idx="1">
+            <a:schemeClr val="accent1"/>
+          </a:lnRef>
+          <a:fillRef idx="0">
+            <a:schemeClr val="accent1"/>
+          </a:fillRef>
+          <a:effectRef idx="0">
+            <a:schemeClr val="accent1"/>
+          </a:effectRef>
+          <a:fontRef idx="minor">
+            <a:schemeClr val="tx1"/>
+          </a:fontRef>
+        </p:style>
+      </p:cxnSp>
+      <p:cxnSp>
+        <p:nvCxnSpPr>
+          <p:cNvPr id="101" name="Connecteur droit 100">
+            <a:extLst>
+              <a:ext uri="{FF2B5EF4-FFF2-40B4-BE49-F238E27FC236}">
+                <a16:creationId xmlns:a16="http://schemas.microsoft.com/office/drawing/2014/main" id="{82A24A0F-8B95-7A8A-D56D-667A16524866}"/>
+              </a:ext>
+            </a:extLst>
+          </p:cNvPr>
+          <p:cNvCxnSpPr>
+            <a:cxnSpLocks/>
+          </p:cNvCxnSpPr>
+          <p:nvPr/>
+        </p:nvCxnSpPr>
+        <p:spPr>
+          <a:xfrm flipV="1">
+            <a:off x="2244041" y="7295884"/>
+            <a:ext cx="856664" cy="298391"/>
+          </a:xfrm>
+          <a:prstGeom prst="line">
+            <a:avLst/>
+          </a:prstGeom>
+          <a:ln w="38100">
+            <a:solidFill>
+              <a:srgbClr val="00B050"/>
+            </a:solidFill>
+            <a:prstDash val="sysDot"/>
+          </a:ln>
+        </p:spPr>
+        <p:style>
+          <a:lnRef idx="1">
+            <a:schemeClr val="accent1"/>
+          </a:lnRef>
+          <a:fillRef idx="0">
+            <a:schemeClr val="accent1"/>
+          </a:fillRef>
+          <a:effectRef idx="0">
+            <a:schemeClr val="accent1"/>
+          </a:effectRef>
+          <a:fontRef idx="minor">
+            <a:schemeClr val="tx1"/>
+          </a:fontRef>
+        </p:style>
+      </p:cxnSp>
+      <p:cxnSp>
+        <p:nvCxnSpPr>
+          <p:cNvPr id="102" name="Connecteur droit 101">
+            <a:extLst>
+              <a:ext uri="{FF2B5EF4-FFF2-40B4-BE49-F238E27FC236}">
+                <a16:creationId xmlns:a16="http://schemas.microsoft.com/office/drawing/2014/main" id="{8483BAFE-17DE-DC7E-480D-803155CDC665}"/>
+              </a:ext>
+            </a:extLst>
+          </p:cNvPr>
+          <p:cNvCxnSpPr>
+            <a:cxnSpLocks/>
+          </p:cNvCxnSpPr>
+          <p:nvPr/>
+        </p:nvCxnSpPr>
+        <p:spPr>
+          <a:xfrm flipH="1" flipV="1">
+            <a:off x="3173097" y="7635701"/>
+            <a:ext cx="793141" cy="259005"/>
+          </a:xfrm>
+          <a:prstGeom prst="line">
+            <a:avLst/>
+          </a:prstGeom>
+          <a:ln w="38100">
+            <a:solidFill>
+              <a:schemeClr val="tx1"/>
+            </a:solidFill>
+          </a:ln>
+        </p:spPr>
+        <p:style>
+          <a:lnRef idx="1">
+            <a:schemeClr val="accent1"/>
+          </a:lnRef>
+          <a:fillRef idx="0">
+            <a:schemeClr val="accent1"/>
+          </a:fillRef>
+          <a:effectRef idx="0">
+            <a:schemeClr val="accent1"/>
+          </a:effectRef>
+          <a:fontRef idx="minor">
+            <a:schemeClr val="tx1"/>
+          </a:fontRef>
+        </p:style>
+      </p:cxnSp>
+      <p:cxnSp>
+        <p:nvCxnSpPr>
+          <p:cNvPr id="105" name="Connecteur droit 104">
+            <a:extLst>
+              <a:ext uri="{FF2B5EF4-FFF2-40B4-BE49-F238E27FC236}">
+                <a16:creationId xmlns:a16="http://schemas.microsoft.com/office/drawing/2014/main" id="{0CB7DB6C-6BA5-2D62-40A1-1CC28C4B3E44}"/>
+              </a:ext>
+            </a:extLst>
+          </p:cNvPr>
+          <p:cNvCxnSpPr>
+            <a:cxnSpLocks/>
+          </p:cNvCxnSpPr>
+          <p:nvPr/>
+        </p:nvCxnSpPr>
+        <p:spPr>
+          <a:xfrm flipH="1">
+            <a:off x="3166734" y="7909127"/>
+            <a:ext cx="793141" cy="259005"/>
+          </a:xfrm>
+          <a:prstGeom prst="line">
+            <a:avLst/>
+          </a:prstGeom>
+          <a:ln w="38100">
+            <a:solidFill>
+              <a:srgbClr val="00B050"/>
+            </a:solidFill>
+          </a:ln>
+        </p:spPr>
+        <p:style>
+          <a:lnRef idx="1">
+            <a:schemeClr val="accent1"/>
+          </a:lnRef>
+          <a:fillRef idx="0">
+            <a:schemeClr val="accent1"/>
+          </a:fillRef>
+          <a:effectRef idx="0">
+            <a:schemeClr val="accent1"/>
+          </a:effectRef>
+          <a:fontRef idx="minor">
+            <a:schemeClr val="tx1"/>
+          </a:fontRef>
+        </p:style>
+      </p:cxnSp>
+      <p:cxnSp>
+        <p:nvCxnSpPr>
+          <p:cNvPr id="106" name="Connecteur droit 105">
+            <a:extLst>
+              <a:ext uri="{FF2B5EF4-FFF2-40B4-BE49-F238E27FC236}">
+                <a16:creationId xmlns:a16="http://schemas.microsoft.com/office/drawing/2014/main" id="{BD54D403-9A25-9AD7-8B99-D8D6FFCF0F1C}"/>
+              </a:ext>
+            </a:extLst>
+          </p:cNvPr>
+          <p:cNvCxnSpPr>
+            <a:cxnSpLocks/>
+          </p:cNvCxnSpPr>
+          <p:nvPr/>
+        </p:nvCxnSpPr>
+        <p:spPr>
+          <a:xfrm>
+            <a:off x="3155523" y="7899307"/>
+            <a:ext cx="1216049" cy="0"/>
+          </a:xfrm>
+          <a:prstGeom prst="line">
+            <a:avLst/>
+          </a:prstGeom>
+          <a:ln w="38100">
+            <a:solidFill>
+              <a:srgbClr val="FF0000"/>
+            </a:solidFill>
+          </a:ln>
+        </p:spPr>
+        <p:style>
+          <a:lnRef idx="1">
+            <a:schemeClr val="accent1"/>
+          </a:lnRef>
+          <a:fillRef idx="0">
+            <a:schemeClr val="accent1"/>
+          </a:fillRef>
+          <a:effectRef idx="0">
+            <a:schemeClr val="accent1"/>
+          </a:effectRef>
+          <a:fontRef idx="minor">
+            <a:schemeClr val="tx1"/>
+          </a:fontRef>
+        </p:style>
+      </p:cxnSp>
+      <p:cxnSp>
+        <p:nvCxnSpPr>
+          <p:cNvPr id="109" name="Connecteur droit 108">
+            <a:extLst>
+              <a:ext uri="{FF2B5EF4-FFF2-40B4-BE49-F238E27FC236}">
+                <a16:creationId xmlns:a16="http://schemas.microsoft.com/office/drawing/2014/main" id="{1BDB43D2-928C-6064-5B63-45CBE8759901}"/>
+              </a:ext>
+            </a:extLst>
+          </p:cNvPr>
+          <p:cNvCxnSpPr>
+            <a:cxnSpLocks/>
+          </p:cNvCxnSpPr>
+          <p:nvPr/>
+        </p:nvCxnSpPr>
+        <p:spPr>
+          <a:xfrm flipV="1">
+            <a:off x="4420433" y="7355583"/>
+            <a:ext cx="623039" cy="217015"/>
+          </a:xfrm>
+          <a:prstGeom prst="line">
+            <a:avLst/>
+          </a:prstGeom>
+          <a:ln w="38100">
+            <a:solidFill>
+              <a:schemeClr val="tx1"/>
+            </a:solidFill>
+            <a:prstDash val="sysDot"/>
+          </a:ln>
+        </p:spPr>
+        <p:style>
+          <a:lnRef idx="1">
+            <a:schemeClr val="accent1"/>
+          </a:lnRef>
+          <a:fillRef idx="0">
+            <a:schemeClr val="accent1"/>
+          </a:fillRef>
+          <a:effectRef idx="0">
+            <a:schemeClr val="accent1"/>
+          </a:effectRef>
+          <a:fontRef idx="minor">
+            <a:schemeClr val="tx1"/>
+          </a:fontRef>
+        </p:style>
+      </p:cxnSp>
+      <p:cxnSp>
+        <p:nvCxnSpPr>
+          <p:cNvPr id="110" name="Connecteur droit 109">
+            <a:extLst>
+              <a:ext uri="{FF2B5EF4-FFF2-40B4-BE49-F238E27FC236}">
+                <a16:creationId xmlns:a16="http://schemas.microsoft.com/office/drawing/2014/main" id="{6EBC90B8-F6D4-B06D-09E2-81208CFF5D2C}"/>
+              </a:ext>
+            </a:extLst>
+          </p:cNvPr>
+          <p:cNvCxnSpPr>
+            <a:cxnSpLocks/>
+          </p:cNvCxnSpPr>
+          <p:nvPr/>
+        </p:nvCxnSpPr>
+        <p:spPr>
+          <a:xfrm flipV="1">
+            <a:off x="4412784" y="7471933"/>
+            <a:ext cx="597029" cy="115157"/>
+          </a:xfrm>
+          <a:prstGeom prst="line">
+            <a:avLst/>
+          </a:prstGeom>
+          <a:ln w="38100">
+            <a:solidFill>
+              <a:srgbClr val="FF0000"/>
+            </a:solidFill>
+          </a:ln>
+        </p:spPr>
+        <p:style>
+          <a:lnRef idx="1">
+            <a:schemeClr val="accent1"/>
+          </a:lnRef>
+          <a:fillRef idx="0">
+            <a:schemeClr val="accent1"/>
+          </a:fillRef>
+          <a:effectRef idx="0">
+            <a:schemeClr val="accent1"/>
+          </a:effectRef>
+          <a:fontRef idx="minor">
+            <a:schemeClr val="tx1"/>
+          </a:fontRef>
+        </p:style>
+      </p:cxnSp>
+      <p:cxnSp>
+        <p:nvCxnSpPr>
+          <p:cNvPr id="111" name="Connecteur droit 110">
+            <a:extLst>
+              <a:ext uri="{FF2B5EF4-FFF2-40B4-BE49-F238E27FC236}">
+                <a16:creationId xmlns:a16="http://schemas.microsoft.com/office/drawing/2014/main" id="{DAA0336B-7865-07CF-DD24-2F3DB9C6E9A2}"/>
+              </a:ext>
+            </a:extLst>
+          </p:cNvPr>
+          <p:cNvCxnSpPr>
+            <a:cxnSpLocks/>
+          </p:cNvCxnSpPr>
+          <p:nvPr/>
+        </p:nvCxnSpPr>
+        <p:spPr>
+          <a:xfrm flipV="1">
+            <a:off x="4383952" y="7346076"/>
+            <a:ext cx="659520" cy="241014"/>
+          </a:xfrm>
+          <a:prstGeom prst="line">
+            <a:avLst/>
+          </a:prstGeom>
+          <a:ln w="38100">
+            <a:solidFill>
+              <a:srgbClr val="00B050"/>
+            </a:solidFill>
+            <a:prstDash val="sysDot"/>
+          </a:ln>
+        </p:spPr>
+        <p:style>
+          <a:lnRef idx="1">
+            <a:schemeClr val="accent1"/>
+          </a:lnRef>
+          <a:fillRef idx="0">
+            <a:schemeClr val="accent1"/>
+          </a:fillRef>
+          <a:effectRef idx="0">
+            <a:schemeClr val="accent1"/>
+          </a:effectRef>
+          <a:fontRef idx="minor">
+            <a:schemeClr val="tx1"/>
+          </a:fontRef>
+        </p:style>
+      </p:cxnSp>
+      <p:cxnSp>
+        <p:nvCxnSpPr>
+          <p:cNvPr id="123" name="Connecteur droit 122">
+            <a:extLst>
+              <a:ext uri="{FF2B5EF4-FFF2-40B4-BE49-F238E27FC236}">
+                <a16:creationId xmlns:a16="http://schemas.microsoft.com/office/drawing/2014/main" id="{58AABCD4-DD1F-1D8F-F3FD-188E58521613}"/>
+              </a:ext>
+            </a:extLst>
+          </p:cNvPr>
+          <p:cNvCxnSpPr>
+            <a:cxnSpLocks/>
+          </p:cNvCxnSpPr>
+          <p:nvPr/>
+        </p:nvCxnSpPr>
+        <p:spPr>
+          <a:xfrm flipH="1">
+            <a:off x="3151914" y="8581408"/>
+            <a:ext cx="814324" cy="0"/>
+          </a:xfrm>
+          <a:prstGeom prst="line">
+            <a:avLst/>
+          </a:prstGeom>
+          <a:ln w="38100">
+            <a:solidFill>
+              <a:schemeClr val="tx1"/>
+            </a:solidFill>
+          </a:ln>
+        </p:spPr>
+        <p:style>
+          <a:lnRef idx="1">
+            <a:schemeClr val="accent1"/>
+          </a:lnRef>
+          <a:fillRef idx="0">
+            <a:schemeClr val="accent1"/>
+          </a:fillRef>
+          <a:effectRef idx="0">
+            <a:schemeClr val="accent1"/>
+          </a:effectRef>
+          <a:fontRef idx="minor">
+            <a:schemeClr val="tx1"/>
+          </a:fontRef>
+        </p:style>
+      </p:cxnSp>
+      <p:cxnSp>
+        <p:nvCxnSpPr>
+          <p:cNvPr id="125" name="Connecteur droit 124">
+            <a:extLst>
+              <a:ext uri="{FF2B5EF4-FFF2-40B4-BE49-F238E27FC236}">
+                <a16:creationId xmlns:a16="http://schemas.microsoft.com/office/drawing/2014/main" id="{B952C007-483A-7018-40C1-A8FC47FC69FF}"/>
+              </a:ext>
+            </a:extLst>
+          </p:cNvPr>
+          <p:cNvCxnSpPr>
+            <a:cxnSpLocks/>
+          </p:cNvCxnSpPr>
+          <p:nvPr/>
+        </p:nvCxnSpPr>
+        <p:spPr>
+          <a:xfrm flipH="1">
+            <a:off x="3966238" y="8810008"/>
+            <a:ext cx="446546" cy="0"/>
+          </a:xfrm>
+          <a:prstGeom prst="line">
+            <a:avLst/>
+          </a:prstGeom>
+          <a:ln w="38100">
+            <a:solidFill>
+              <a:schemeClr val="tx1"/>
+            </a:solidFill>
+          </a:ln>
+        </p:spPr>
+        <p:style>
+          <a:lnRef idx="1">
+            <a:schemeClr val="accent1"/>
+          </a:lnRef>
+          <a:fillRef idx="0">
+            <a:schemeClr val="accent1"/>
+          </a:fillRef>
+          <a:effectRef idx="0">
+            <a:schemeClr val="accent1"/>
+          </a:effectRef>
+          <a:fontRef idx="minor">
+            <a:schemeClr val="tx1"/>
+          </a:fontRef>
+        </p:style>
+      </p:cxnSp>
+      <p:cxnSp>
+        <p:nvCxnSpPr>
+          <p:cNvPr id="127" name="Connecteur droit 126">
+            <a:extLst>
+              <a:ext uri="{FF2B5EF4-FFF2-40B4-BE49-F238E27FC236}">
+                <a16:creationId xmlns:a16="http://schemas.microsoft.com/office/drawing/2014/main" id="{7785030E-6187-95DA-87D0-8F926DCD4896}"/>
+              </a:ext>
+            </a:extLst>
+          </p:cNvPr>
+          <p:cNvCxnSpPr>
+            <a:cxnSpLocks/>
+          </p:cNvCxnSpPr>
+          <p:nvPr/>
+        </p:nvCxnSpPr>
+        <p:spPr>
+          <a:xfrm>
+            <a:off x="3966238" y="8571680"/>
+            <a:ext cx="0" cy="238328"/>
+          </a:xfrm>
+          <a:prstGeom prst="line">
+            <a:avLst/>
+          </a:prstGeom>
+          <a:ln w="38100">
+            <a:solidFill>
+              <a:schemeClr val="tx1"/>
+            </a:solidFill>
+          </a:ln>
+        </p:spPr>
+        <p:style>
+          <a:lnRef idx="1">
+            <a:schemeClr val="accent1"/>
+          </a:lnRef>
+          <a:fillRef idx="0">
+            <a:schemeClr val="accent1"/>
+          </a:fillRef>
+          <a:effectRef idx="0">
+            <a:schemeClr val="accent1"/>
+          </a:effectRef>
+          <a:fontRef idx="minor">
+            <a:schemeClr val="tx1"/>
+          </a:fontRef>
+        </p:style>
+      </p:cxnSp>
+      <p:cxnSp>
+        <p:nvCxnSpPr>
+          <p:cNvPr id="130" name="Connecteur droit 129">
+            <a:extLst>
+              <a:ext uri="{FF2B5EF4-FFF2-40B4-BE49-F238E27FC236}">
+                <a16:creationId xmlns:a16="http://schemas.microsoft.com/office/drawing/2014/main" id="{5551F38F-DA8D-CB63-BB7C-9E3093071D35}"/>
+              </a:ext>
+            </a:extLst>
+          </p:cNvPr>
+          <p:cNvCxnSpPr>
+            <a:cxnSpLocks/>
+          </p:cNvCxnSpPr>
+          <p:nvPr/>
+        </p:nvCxnSpPr>
+        <p:spPr>
+          <a:xfrm>
+            <a:off x="4392552" y="8821986"/>
+            <a:ext cx="0" cy="238328"/>
+          </a:xfrm>
+          <a:prstGeom prst="line">
+            <a:avLst/>
+          </a:prstGeom>
+          <a:ln w="38100">
+            <a:solidFill>
+              <a:schemeClr val="tx1"/>
+            </a:solidFill>
+          </a:ln>
+        </p:spPr>
+        <p:style>
+          <a:lnRef idx="1">
+            <a:schemeClr val="accent1"/>
+          </a:lnRef>
+          <a:fillRef idx="0">
+            <a:schemeClr val="accent1"/>
+          </a:fillRef>
+          <a:effectRef idx="0">
+            <a:schemeClr val="accent1"/>
+          </a:effectRef>
+          <a:fontRef idx="minor">
+            <a:schemeClr val="tx1"/>
+          </a:fontRef>
+        </p:style>
+      </p:cxnSp>
+      <p:cxnSp>
+        <p:nvCxnSpPr>
+          <p:cNvPr id="131" name="Connecteur droit 130">
+            <a:extLst>
+              <a:ext uri="{FF2B5EF4-FFF2-40B4-BE49-F238E27FC236}">
+                <a16:creationId xmlns:a16="http://schemas.microsoft.com/office/drawing/2014/main" id="{2F8EF38C-F80F-E154-8404-0AC2829C7D1E}"/>
+              </a:ext>
+            </a:extLst>
+          </p:cNvPr>
+          <p:cNvCxnSpPr>
+            <a:cxnSpLocks/>
+          </p:cNvCxnSpPr>
+          <p:nvPr/>
+        </p:nvCxnSpPr>
+        <p:spPr>
+          <a:xfrm>
+            <a:off x="3159326" y="8582759"/>
+            <a:ext cx="0" cy="457917"/>
+          </a:xfrm>
+          <a:prstGeom prst="line">
+            <a:avLst/>
+          </a:prstGeom>
+          <a:ln w="38100">
+            <a:solidFill>
+              <a:schemeClr val="tx1"/>
+            </a:solidFill>
+          </a:ln>
+        </p:spPr>
+        <p:style>
+          <a:lnRef idx="1">
+            <a:schemeClr val="accent1"/>
+          </a:lnRef>
+          <a:fillRef idx="0">
+            <a:schemeClr val="accent1"/>
+          </a:fillRef>
+          <a:effectRef idx="0">
+            <a:schemeClr val="accent1"/>
+          </a:effectRef>
+          <a:fontRef idx="minor">
+            <a:schemeClr val="tx1"/>
+          </a:fontRef>
+        </p:style>
+      </p:cxnSp>
+    </p:spTree>
+    <p:extLst>
+      <p:ext uri="{BB962C8B-B14F-4D97-AF65-F5344CB8AC3E}">
+        <p14:creationId xmlns:p14="http://schemas.microsoft.com/office/powerpoint/2010/main" val="4196119950"/>
+      </p:ext>
+    </p:extLst>
+  </p:cSld>
+  <p:clrMapOvr>
+    <a:masterClrMapping/>
+  </p:clrMapOvr>
+</p:sld>
+</file>
+
 <file path=ppt/slides/slide2.xml><?xml version="1.0" encoding="utf-8"?>
 <p:sld xmlns:a="http://schemas.openxmlformats.org/drawingml/2006/main" xmlns:r="http://schemas.openxmlformats.org/officeDocument/2006/relationships" xmlns:p="http://schemas.openxmlformats.org/presentationml/2006/main">
   <p:cSld>
@@ -6646,14 +11335,13 @@
           <a:lstStyle/>
           <a:p>
             <a:r>
-              <a:rPr lang="fr-FR" dirty="0" smtClean="0"/>
+              <a:rPr lang="fr-FR" dirty="0"/>
               <a:t>I</a:t>
             </a:r>
             <a:r>
-              <a:rPr lang="fr-FR" baseline="-25000" dirty="0" smtClean="0"/>
+              <a:rPr lang="fr-FR" baseline="-25000" dirty="0"/>
               <a:t>m</a:t>
             </a:r>
-            <a:endParaRPr lang="fr-FR" baseline="-25000" dirty="0"/>
           </a:p>
         </p:txBody>
       </p:sp>
@@ -6680,14 +11368,13 @@
           <a:lstStyle/>
           <a:p>
             <a:r>
-              <a:rPr lang="fr-FR" dirty="0" smtClean="0"/>
+              <a:rPr lang="fr-FR" dirty="0"/>
               <a:t>V</a:t>
             </a:r>
             <a:r>
-              <a:rPr lang="fr-FR" baseline="-25000" dirty="0" smtClean="0"/>
+              <a:rPr lang="fr-FR" baseline="-25000" dirty="0"/>
               <a:t>m</a:t>
             </a:r>
-            <a:endParaRPr lang="fr-FR" baseline="-25000" dirty="0"/>
           </a:p>
         </p:txBody>
       </p:sp>
@@ -6989,18 +11676,13 @@
           <a:lstStyle/>
           <a:p>
             <a:r>
-              <a:rPr lang="fr-FR" sz="1400" b="1" dirty="0" smtClean="0">
+              <a:rPr lang="fr-FR" sz="1400" b="1" dirty="0">
                 <a:solidFill>
                   <a:srgbClr val="FF0000"/>
                 </a:solidFill>
               </a:rPr>
               <a:t>(2.2)</a:t>
             </a:r>
-            <a:endParaRPr lang="fr-FR" sz="1400" b="1" dirty="0">
-              <a:solidFill>
-                <a:srgbClr val="FF0000"/>
-              </a:solidFill>
-            </a:endParaRPr>
           </a:p>
         </p:txBody>
       </p:sp>
@@ -7027,18 +11709,13 @@
           <a:lstStyle/>
           <a:p>
             <a:r>
-              <a:rPr lang="fr-FR" sz="1200" b="1" dirty="0" smtClean="0">
+              <a:rPr lang="fr-FR" sz="1200" b="1" dirty="0">
                 <a:solidFill>
                   <a:srgbClr val="00B050"/>
                 </a:solidFill>
               </a:rPr>
               <a:t>(2.3)</a:t>
             </a:r>
-            <a:endParaRPr lang="fr-FR" sz="1200" b="1" dirty="0">
-              <a:solidFill>
-                <a:srgbClr val="00B050"/>
-              </a:solidFill>
-            </a:endParaRPr>
           </a:p>
         </p:txBody>
       </p:sp>
@@ -7065,18 +11742,13 @@
           <a:lstStyle/>
           <a:p>
             <a:r>
-              <a:rPr lang="fr-FR" sz="1200" b="1" dirty="0" smtClean="0">
+              <a:rPr lang="fr-FR" sz="1200" b="1" dirty="0">
                 <a:solidFill>
                   <a:srgbClr val="0070C0"/>
                 </a:solidFill>
               </a:rPr>
               <a:t>(2.4)</a:t>
             </a:r>
-            <a:endParaRPr lang="fr-FR" sz="1200" b="1" dirty="0">
-              <a:solidFill>
-                <a:srgbClr val="0070C0"/>
-              </a:solidFill>
-            </a:endParaRPr>
           </a:p>
         </p:txBody>
       </p:sp>
@@ -7208,18 +11880,13 @@
           <a:lstStyle/>
           <a:p>
             <a:r>
-              <a:rPr lang="fr-FR" sz="1200" b="1" dirty="0" smtClean="0">
+              <a:rPr lang="fr-FR" sz="1200" b="1" dirty="0">
                 <a:solidFill>
                   <a:schemeClr val="accent2"/>
                 </a:solidFill>
               </a:rPr>
               <a:t>(2.5)</a:t>
             </a:r>
-            <a:endParaRPr lang="fr-FR" sz="1200" b="1" dirty="0">
-              <a:solidFill>
-                <a:schemeClr val="accent2"/>
-              </a:solidFill>
-            </a:endParaRPr>
           </a:p>
         </p:txBody>
       </p:sp>
@@ -13574,18 +18241,13 @@
           <a:lstStyle/>
           <a:p>
             <a:r>
-              <a:rPr lang="fr-FR" sz="2800" b="1" dirty="0" smtClean="0">
+              <a:rPr lang="fr-FR" sz="2800" b="1" dirty="0">
                 <a:solidFill>
                   <a:srgbClr val="FF0000"/>
                 </a:solidFill>
               </a:rPr>
               <a:t>1/2</a:t>
             </a:r>
-            <a:endParaRPr lang="fr-FR" sz="2800" b="1" dirty="0">
-              <a:solidFill>
-                <a:srgbClr val="FF0000"/>
-              </a:solidFill>
-            </a:endParaRPr>
           </a:p>
         </p:txBody>
       </p:sp>
